--- a/sample/sample01a.pptx
+++ b/sample/sample01a.pptx
@@ -20,7 +20,7 @@
     <p:sldId id="268" r:id="rId14"/>
     <p:sldId id="269" r:id="rId15"/>
   </p:sldIdLst>
-  <p:sldSz cx="6858000" cy="12192000"/>
+  <p:sldSz cx="6858000" cy="12193588"/>
   <p:notesSz cx="6858000" cy="9144000"/>
   <p:defaultTextStyle>
     <a:defPPr>
@@ -315,7 +315,7 @@
           <a:p>
             <a:fld id="{5BCAD085-E8A6-8845-BD4E-CB4CCA059FC4}" type="datetimeFigureOut">
               <a:rPr lang="en-US" smtClean="0"/>
-              <a:t>5/24/2026</a:t>
+              <a:t>5/25/2026</a:t>
             </a:fld>
             <a:endParaRPr lang="en-US"/>
           </a:p>
@@ -483,7 +483,7 @@
           <a:p>
             <a:fld id="{5BCAD085-E8A6-8845-BD4E-CB4CCA059FC4}" type="datetimeFigureOut">
               <a:rPr lang="en-US" smtClean="0"/>
-              <a:t>5/24/2026</a:t>
+              <a:t>5/25/2026</a:t>
             </a:fld>
             <a:endParaRPr lang="en-US"/>
           </a:p>
@@ -661,7 +661,7 @@
           <a:p>
             <a:fld id="{5BCAD085-E8A6-8845-BD4E-CB4CCA059FC4}" type="datetimeFigureOut">
               <a:rPr lang="en-US" smtClean="0"/>
-              <a:t>5/24/2026</a:t>
+              <a:t>5/25/2026</a:t>
             </a:fld>
             <a:endParaRPr lang="en-US"/>
           </a:p>
@@ -829,7 +829,7 @@
           <a:p>
             <a:fld id="{5BCAD085-E8A6-8845-BD4E-CB4CCA059FC4}" type="datetimeFigureOut">
               <a:rPr lang="en-US" smtClean="0"/>
-              <a:t>5/24/2026</a:t>
+              <a:t>5/25/2026</a:t>
             </a:fld>
             <a:endParaRPr lang="en-US"/>
           </a:p>
@@ -1074,7 +1074,7 @@
           <a:p>
             <a:fld id="{5BCAD085-E8A6-8845-BD4E-CB4CCA059FC4}" type="datetimeFigureOut">
               <a:rPr lang="en-US" smtClean="0"/>
-              <a:t>5/24/2026</a:t>
+              <a:t>5/25/2026</a:t>
             </a:fld>
             <a:endParaRPr lang="en-US"/>
           </a:p>
@@ -1359,7 +1359,7 @@
           <a:p>
             <a:fld id="{5BCAD085-E8A6-8845-BD4E-CB4CCA059FC4}" type="datetimeFigureOut">
               <a:rPr lang="en-US" smtClean="0"/>
-              <a:t>5/24/2026</a:t>
+              <a:t>5/25/2026</a:t>
             </a:fld>
             <a:endParaRPr lang="en-US"/>
           </a:p>
@@ -1778,7 +1778,7 @@
           <a:p>
             <a:fld id="{5BCAD085-E8A6-8845-BD4E-CB4CCA059FC4}" type="datetimeFigureOut">
               <a:rPr lang="en-US" smtClean="0"/>
-              <a:t>5/24/2026</a:t>
+              <a:t>5/25/2026</a:t>
             </a:fld>
             <a:endParaRPr lang="en-US"/>
           </a:p>
@@ -1895,7 +1895,7 @@
           <a:p>
             <a:fld id="{5BCAD085-E8A6-8845-BD4E-CB4CCA059FC4}" type="datetimeFigureOut">
               <a:rPr lang="en-US" smtClean="0"/>
-              <a:t>5/24/2026</a:t>
+              <a:t>5/25/2026</a:t>
             </a:fld>
             <a:endParaRPr lang="en-US"/>
           </a:p>
@@ -1990,7 +1990,7 @@
           <a:p>
             <a:fld id="{5BCAD085-E8A6-8845-BD4E-CB4CCA059FC4}" type="datetimeFigureOut">
               <a:rPr lang="en-US" smtClean="0"/>
-              <a:t>5/24/2026</a:t>
+              <a:t>5/25/2026</a:t>
             </a:fld>
             <a:endParaRPr lang="en-US"/>
           </a:p>
@@ -2265,7 +2265,7 @@
           <a:p>
             <a:fld id="{5BCAD085-E8A6-8845-BD4E-CB4CCA059FC4}" type="datetimeFigureOut">
               <a:rPr lang="en-US" smtClean="0"/>
-              <a:t>5/24/2026</a:t>
+              <a:t>5/25/2026</a:t>
             </a:fld>
             <a:endParaRPr lang="en-US"/>
           </a:p>
@@ -2517,7 +2517,7 @@
           <a:p>
             <a:fld id="{5BCAD085-E8A6-8845-BD4E-CB4CCA059FC4}" type="datetimeFigureOut">
               <a:rPr lang="en-US" smtClean="0"/>
-              <a:t>5/24/2026</a:t>
+              <a:t>5/25/2026</a:t>
             </a:fld>
             <a:endParaRPr lang="en-US"/>
           </a:p>
@@ -2728,7 +2728,7 @@
           <a:p>
             <a:fld id="{5BCAD085-E8A6-8845-BD4E-CB4CCA059FC4}" type="datetimeFigureOut">
               <a:rPr lang="en-US" smtClean="0"/>
-              <a:t>5/24/2026</a:t>
+              <a:t>5/25/2026</a:t>
             </a:fld>
             <a:endParaRPr lang="en-US"/>
           </a:p>
@@ -3105,7 +3105,7 @@
       </p:grpSpPr>
       <p:pic>
         <p:nvPicPr>
-          <p:cNvPr id="2" name="Picture 1"/>
+          <p:cNvPr id="2" name="Picture 1" descr="image.jpg"/>
           <p:cNvPicPr>
             <a:picLocks noChangeAspect="1"/>
           </p:cNvPicPr>
@@ -3113,15 +3113,14 @@
         </p:nvPicPr>
         <p:blipFill>
           <a:blip r:embed="rId2"/>
-          <a:srcRect l="2292" t="7736" r="40652" b="28868"/>
           <a:stretch>
             <a:fillRect/>
           </a:stretch>
         </p:blipFill>
         <p:spPr>
           <a:xfrm>
-            <a:off x="-1" y="-1"/>
-            <a:ext cx="6858001" cy="12192001"/>
+            <a:off x="0" y="0"/>
+            <a:ext cx="6858000" cy="12193200"/>
           </a:xfrm>
           <a:prstGeom prst="rect">
             <a:avLst/>
@@ -3136,20 +3135,22 @@
         </p:nvSpPr>
         <p:spPr>
           <a:xfrm>
-            <a:off x="914400" y="5852013"/>
-            <a:ext cx="5029200" cy="711200"/>
-          </a:xfrm>
-          <a:prstGeom prst="rect">
-            <a:avLst/>
-          </a:prstGeom>
-          <a:noFill/>
-        </p:spPr>
-        <p:txBody>
-          <a:bodyPr wrap="square"/>
-          <a:lstStyle/>
-          <a:p>
-            <a:r>
-              <a:rPr sz="5100" dirty="0" err="1">
+            <a:off x="914400" y="5682479"/>
+            <a:ext cx="5760000" cy="883920"/>
+          </a:xfrm>
+          <a:prstGeom prst="rect">
+            <a:avLst/>
+          </a:prstGeom>
+          <a:noFill/>
+        </p:spPr>
+        <p:txBody>
+          <a:bodyPr wrap="none">
+            <a:noAutofit/>
+          </a:bodyPr>
+          <a:lstStyle/>
+          <a:p>
+            <a:r>
+              <a:rPr sz="4800" dirty="0" err="1">
                 <a:solidFill>
                   <a:srgbClr val="FF6B35"/>
                 </a:solidFill>
@@ -3158,12 +3159,12 @@
               <a:t>张爱玲</a:t>
             </a:r>
             <a:r>
-              <a:rPr sz="5100" dirty="0" err="1">
+              <a:rPr sz="4800" dirty="0" err="1">
                 <a:latin typeface="华康少女文字W5(P)"/>
               </a:rPr>
               <a:t>有一句话</a:t>
             </a:r>
-            <a:endParaRPr sz="5100" dirty="0">
+            <a:endParaRPr sz="4800" dirty="0">
               <a:latin typeface="华康少女文字W5(P)"/>
             </a:endParaRPr>
           </a:p>
@@ -3174,43 +3175,6 @@
   <p:clrMapOvr>
     <a:masterClrMapping/>
   </p:clrMapOvr>
-  <p:transition advTm="1600"/>
-  <p:timing>
-    <p:tnLst>
-      <p:par>
-        <p:cTn id="1" dur="indefinite" restart="never" nodeType="tmRoot">
-          <p:stCondLst>
-            <p:cond delay="0"/>
-          </p:stCondLst>
-          <p:childTnLst>
-            <p:par>
-              <p:cTn id="2" fill="hold">
-                <p:stCondLst>
-                  <p:cond delay="0"/>
-                </p:stCondLst>
-                <p:childTnLst>
-                  <p:par>
-                    <p:cTn id="3" dur="500" fill="hold">
-                      <p:childTnLst>
-                        <p:animEffect transition="in">
-                          <p:cBhvr>
-                            <p:cTn id="4" dur="500"/>
-                            <p:tgtEl>
-                              <p:spTgt spid="3"/>
-                            </p:tgtEl>
-                          </p:cBhvr>
-                        </p:animEffect>
-                      </p:childTnLst>
-                    </p:cTn>
-                  </p:par>
-                </p:childTnLst>
-              </p:cTn>
-            </p:par>
-          </p:childTnLst>
-        </p:cTn>
-      </p:par>
-    </p:tnLst>
-  </p:timing>
 </p:sld>
 </file>
 
@@ -3233,7 +3197,7 @@
       </p:grpSpPr>
       <p:pic>
         <p:nvPicPr>
-          <p:cNvPr id="2" name="Picture 1"/>
+          <p:cNvPr id="2" name="Picture 1" descr="image.jpg"/>
           <p:cNvPicPr>
             <a:picLocks noChangeAspect="1"/>
           </p:cNvPicPr>
@@ -3241,13 +3205,14 @@
         </p:nvPicPr>
         <p:blipFill>
           <a:blip r:embed="rId2"/>
-          <a:srcRect/>
-          <a:stretch/>
+          <a:stretch>
+            <a:fillRect/>
+          </a:stretch>
         </p:blipFill>
         <p:spPr>
           <a:xfrm>
-            <a:off x="86" y="0"/>
-            <a:ext cx="6857828" cy="12191695"/>
+            <a:off x="0" y="0"/>
+            <a:ext cx="6858000" cy="12193200"/>
           </a:xfrm>
           <a:prstGeom prst="rect">
             <a:avLst/>
@@ -3256,115 +3221,103 @@
       </p:pic>
       <p:sp>
         <p:nvSpPr>
-          <p:cNvPr id="10" name="TextBox 9"/>
-          <p:cNvSpPr txBox="1"/>
-          <p:nvPr/>
-        </p:nvSpPr>
-        <p:spPr>
-          <a:xfrm>
-            <a:off x="914400" y="4161099"/>
-            <a:ext cx="5029200" cy="711200"/>
-          </a:xfrm>
-          <a:prstGeom prst="rect">
-            <a:avLst/>
-          </a:prstGeom>
-          <a:noFill/>
-        </p:spPr>
-        <p:txBody>
-          <a:bodyPr wrap="square"/>
-          <a:lstStyle/>
-          <a:p>
-            <a:r>
-              <a:rPr sz="5900" dirty="0" err="1">
+          <p:cNvPr id="3" name="TextBox 2"/>
+          <p:cNvSpPr txBox="1"/>
+          <p:nvPr/>
+        </p:nvSpPr>
+        <p:spPr>
+          <a:xfrm>
+            <a:off x="914400" y="5682479"/>
+            <a:ext cx="5760000" cy="883920"/>
+          </a:xfrm>
+          <a:prstGeom prst="rect">
+            <a:avLst/>
+          </a:prstGeom>
+          <a:noFill/>
+        </p:spPr>
+        <p:txBody>
+          <a:bodyPr wrap="none">
+            <a:noAutofit/>
+          </a:bodyPr>
+          <a:lstStyle/>
+          <a:p>
+            <a:r>
+              <a:rPr sz="4800">
+                <a:latin typeface="华康少女文字W5(P)"/>
+              </a:rPr>
+              <a:t>最高的境界了</a:t>
+            </a:r>
+          </a:p>
+        </p:txBody>
+      </p:sp>
+      <p:sp>
+        <p:nvSpPr>
+          <p:cNvPr id="4" name="TextBox 3"/>
+          <p:cNvSpPr txBox="1"/>
+          <p:nvPr/>
+        </p:nvSpPr>
+        <p:spPr>
+          <a:xfrm>
+            <a:off x="914400" y="4831665"/>
+            <a:ext cx="5760000" cy="724814"/>
+          </a:xfrm>
+          <a:prstGeom prst="rect">
+            <a:avLst/>
+          </a:prstGeom>
+          <a:noFill/>
+        </p:spPr>
+        <p:txBody>
+          <a:bodyPr wrap="none">
+            <a:noAutofit/>
+          </a:bodyPr>
+          <a:lstStyle/>
+          <a:p>
+            <a:r>
+              <a:rPr sz="3936">
+                <a:latin typeface="华康少女文字W5(P)"/>
+              </a:rPr>
+              <a:t>不讲道理已经到了</a:t>
+            </a:r>
+          </a:p>
+        </p:txBody>
+      </p:sp>
+      <p:sp>
+        <p:nvSpPr>
+          <p:cNvPr id="5" name="TextBox 4"/>
+          <p:cNvSpPr txBox="1"/>
+          <p:nvPr/>
+        </p:nvSpPr>
+        <p:spPr>
+          <a:xfrm>
+            <a:off x="914400" y="4111317"/>
+            <a:ext cx="5760000" cy="594347"/>
+          </a:xfrm>
+          <a:prstGeom prst="rect">
+            <a:avLst/>
+          </a:prstGeom>
+          <a:noFill/>
+        </p:spPr>
+        <p:txBody>
+          <a:bodyPr wrap="none">
+            <a:noAutofit/>
+          </a:bodyPr>
+          <a:lstStyle/>
+          <a:p>
+            <a:r>
+              <a:rPr sz="3227">
                 <a:latin typeface="华康少女文字W5(P)"/>
               </a:rPr>
               <a:t>我们家里那个</a:t>
             </a:r>
-            <a:endParaRPr sz="5900" dirty="0">
-              <a:latin typeface="华康少女文字W5(P)"/>
-            </a:endParaRPr>
-          </a:p>
-        </p:txBody>
-      </p:sp>
-      <p:sp>
-        <p:nvSpPr>
-          <p:cNvPr id="11" name="TextBox 10"/>
-          <p:cNvSpPr txBox="1"/>
-          <p:nvPr/>
-        </p:nvSpPr>
-        <p:spPr>
-          <a:xfrm>
-            <a:off x="914400" y="5039213"/>
-            <a:ext cx="5029200" cy="711200"/>
-          </a:xfrm>
-          <a:prstGeom prst="rect">
-            <a:avLst/>
-          </a:prstGeom>
-          <a:noFill/>
-        </p:spPr>
-        <p:txBody>
-          <a:bodyPr wrap="square"/>
-          <a:lstStyle/>
-          <a:p>
-            <a:r>
-              <a:rPr sz="4400" dirty="0" err="1">
-                <a:latin typeface="华康少女文字W5(P)"/>
-              </a:rPr>
-              <a:t>不讲道理已经到了</a:t>
-            </a:r>
-            <a:endParaRPr sz="4400" dirty="0">
-              <a:latin typeface="华康少女文字W5(P)"/>
-            </a:endParaRPr>
-          </a:p>
-        </p:txBody>
-      </p:sp>
-      <p:sp>
-        <p:nvSpPr>
-          <p:cNvPr id="12" name="TextBox 11"/>
-          <p:cNvSpPr txBox="1"/>
-          <p:nvPr/>
-        </p:nvSpPr>
-        <p:spPr>
-          <a:xfrm>
-            <a:off x="914400" y="5852013"/>
-            <a:ext cx="5029200" cy="711200"/>
-          </a:xfrm>
-          <a:prstGeom prst="rect">
-            <a:avLst/>
-          </a:prstGeom>
-          <a:noFill/>
-        </p:spPr>
-        <p:txBody>
-          <a:bodyPr wrap="square"/>
-          <a:lstStyle/>
-          <a:p>
-            <a:r>
-              <a:rPr sz="5900" dirty="0" err="1">
-                <a:solidFill>
-                  <a:srgbClr val="FF0000"/>
-                </a:solidFill>
-                <a:latin typeface="华康少女文字W5(P)"/>
-              </a:rPr>
-              <a:t>最高</a:t>
-            </a:r>
-            <a:r>
-              <a:rPr sz="5900" dirty="0" err="1">
-                <a:latin typeface="华康少女文字W5(P)"/>
-              </a:rPr>
-              <a:t>的境界了</a:t>
-            </a:r>
-            <a:endParaRPr sz="5900" dirty="0">
-              <a:latin typeface="华康少女文字W5(P)"/>
-            </a:endParaRPr>
-          </a:p>
-        </p:txBody>
-      </p:sp>
-      <p:sp>
-        <p:nvSpPr>
-          <p:cNvPr id="13" name="TextBox 5">
+          </a:p>
+        </p:txBody>
+      </p:sp>
+      <p:sp>
+        <p:nvSpPr>
+          <p:cNvPr id="13" name="TextBox 3">
             <a:extLst>
               <a:ext uri="{FF2B5EF4-FFF2-40B4-BE49-F238E27FC236}">
-                <a16:creationId xmlns:a16="http://schemas.microsoft.com/office/drawing/2014/main" id="{7C7AA7E9-F3FE-E8EF-E0F8-C2FE138AE36D}"/>
+                <a16:creationId xmlns:a16="http://schemas.microsoft.com/office/drawing/2014/main" id="{E76203DA-D2E0-A09D-F2D8-B97EB63A2983}"/>
               </a:ext>
             </a:extLst>
           </p:cNvPr>
@@ -3372,26 +3325,28 @@
           <p:nvPr/>
         </p:nvSpPr>
         <p:spPr>
-          <a:xfrm>
-            <a:off x="9894241" y="-1587345"/>
-            <a:ext cx="6705600" cy="619002"/>
-          </a:xfrm>
-          <a:prstGeom prst="rect">
-            <a:avLst/>
-          </a:prstGeom>
-          <a:noFill/>
-        </p:spPr>
-        <p:txBody>
-          <a:bodyPr wrap="square"/>
-          <a:lstStyle/>
-          <a:p>
-            <a:r>
-              <a:rPr sz="8800" dirty="0" err="1">
-                <a:latin typeface="华康少女文字W5(P)"/>
-              </a:rPr>
-              <a:t>她说</a:t>
-            </a:r>
-            <a:endParaRPr sz="8800" dirty="0">
+          <a:xfrm rot="5400000">
+            <a:off x="1101003" y="3994127"/>
+            <a:ext cx="5760000" cy="883920"/>
+          </a:xfrm>
+          <a:prstGeom prst="rect">
+            <a:avLst/>
+          </a:prstGeom>
+          <a:noFill/>
+        </p:spPr>
+        <p:txBody>
+          <a:bodyPr wrap="none">
+            <a:noAutofit/>
+          </a:bodyPr>
+          <a:lstStyle/>
+          <a:p>
+            <a:r>
+              <a:rPr sz="4800" dirty="0" err="1">
+                <a:latin typeface="华康少女文字W5(P)"/>
+              </a:rPr>
+              <a:t>谁占上风</a:t>
+            </a:r>
+            <a:endParaRPr sz="4800" dirty="0">
               <a:latin typeface="华康少女文字W5(P)"/>
             </a:endParaRPr>
           </a:p>
@@ -3402,7 +3357,7 @@
           <p:cNvPr id="14" name="TextBox 4">
             <a:extLst>
               <a:ext uri="{FF2B5EF4-FFF2-40B4-BE49-F238E27FC236}">
-                <a16:creationId xmlns:a16="http://schemas.microsoft.com/office/drawing/2014/main" id="{86BA8890-BD73-0921-3FB8-9ACB006E90E6}"/>
+                <a16:creationId xmlns:a16="http://schemas.microsoft.com/office/drawing/2014/main" id="{346081B1-6EC3-5EC3-20B3-229BB51AC55B}"/>
               </a:ext>
             </a:extLst>
           </p:cNvPr>
@@ -3410,188 +3365,29 @@
           <p:nvPr/>
         </p:nvSpPr>
         <p:spPr>
-          <a:xfrm>
-            <a:off x="9894242" y="-3078285"/>
-            <a:ext cx="10189025" cy="1017347"/>
-          </a:xfrm>
-          <a:prstGeom prst="rect">
-            <a:avLst/>
-          </a:prstGeom>
-          <a:noFill/>
-        </p:spPr>
-        <p:txBody>
-          <a:bodyPr wrap="square"/>
-          <a:lstStyle/>
-          <a:p>
-            <a:r>
-              <a:rPr sz="8800" dirty="0" err="1">
-                <a:latin typeface="华康少女文字W5(P)"/>
-              </a:rPr>
-              <a:t>我觉得</a:t>
-            </a:r>
-            <a:endParaRPr sz="8800" dirty="0">
-              <a:latin typeface="华康少女文字W5(P)"/>
-            </a:endParaRPr>
-          </a:p>
-        </p:txBody>
-      </p:sp>
-      <p:sp>
-        <p:nvSpPr>
-          <p:cNvPr id="15" name="TextBox 3">
-            <a:extLst>
-              <a:ext uri="{FF2B5EF4-FFF2-40B4-BE49-F238E27FC236}">
-                <a16:creationId xmlns:a16="http://schemas.microsoft.com/office/drawing/2014/main" id="{F23D20E1-854A-AE7A-27FB-1AF9B1D4937D}"/>
-              </a:ext>
-            </a:extLst>
-          </p:cNvPr>
-          <p:cNvSpPr txBox="1"/>
-          <p:nvPr/>
-        </p:nvSpPr>
-        <p:spPr>
-          <a:xfrm>
-            <a:off x="9894245" y="-4661838"/>
-            <a:ext cx="10189025" cy="1017347"/>
-          </a:xfrm>
-          <a:prstGeom prst="rect">
-            <a:avLst/>
-          </a:prstGeom>
-          <a:noFill/>
-        </p:spPr>
-        <p:txBody>
-          <a:bodyPr wrap="square"/>
-          <a:lstStyle/>
-          <a:p>
-            <a:r>
-              <a:rPr sz="8000" dirty="0" err="1">
-                <a:latin typeface="华康少女文字W5(P)"/>
-              </a:rPr>
-              <a:t>讲得很对的</a:t>
-            </a:r>
-            <a:endParaRPr sz="8000" dirty="0">
-              <a:latin typeface="华康少女文字W5(P)"/>
-            </a:endParaRPr>
-          </a:p>
-        </p:txBody>
-      </p:sp>
-      <p:sp>
-        <p:nvSpPr>
-          <p:cNvPr id="16" name="TextBox 2">
-            <a:extLst>
-              <a:ext uri="{FF2B5EF4-FFF2-40B4-BE49-F238E27FC236}">
-                <a16:creationId xmlns:a16="http://schemas.microsoft.com/office/drawing/2014/main" id="{5245F6DC-48AD-6F02-E4E0-95889A990F12}"/>
-              </a:ext>
-            </a:extLst>
-          </p:cNvPr>
-          <p:cNvSpPr txBox="1"/>
-          <p:nvPr/>
-        </p:nvSpPr>
-        <p:spPr>
-          <a:xfrm>
-            <a:off x="9894242" y="-5866043"/>
-            <a:ext cx="10189025" cy="1017347"/>
-          </a:xfrm>
-          <a:prstGeom prst="rect">
-            <a:avLst/>
-          </a:prstGeom>
-          <a:noFill/>
-        </p:spPr>
-        <p:txBody>
-          <a:bodyPr wrap="square"/>
-          <a:lstStyle/>
-          <a:p>
-            <a:r>
-              <a:rPr sz="6000" dirty="0" err="1">
-                <a:solidFill>
-                  <a:srgbClr val="FF6B35"/>
-                </a:solidFill>
-                <a:latin typeface="华文行楷"/>
-              </a:rPr>
-              <a:t>张爱玲</a:t>
-            </a:r>
-            <a:r>
-              <a:rPr sz="6000" dirty="0" err="1">
-                <a:latin typeface="华康少女文字W5(P)"/>
-              </a:rPr>
-              <a:t>有一句话</a:t>
-            </a:r>
-            <a:endParaRPr sz="6000" dirty="0">
-              <a:latin typeface="华康少女文字W5(P)"/>
-            </a:endParaRPr>
-          </a:p>
-        </p:txBody>
-      </p:sp>
-      <p:sp>
-        <p:nvSpPr>
-          <p:cNvPr id="17" name="TextBox 8">
-            <a:extLst>
-              <a:ext uri="{FF2B5EF4-FFF2-40B4-BE49-F238E27FC236}">
-                <a16:creationId xmlns:a16="http://schemas.microsoft.com/office/drawing/2014/main" id="{57518AC7-32F2-A36D-0843-472E97F273E1}"/>
-              </a:ext>
-            </a:extLst>
-          </p:cNvPr>
-          <p:cNvSpPr txBox="1"/>
-          <p:nvPr/>
-        </p:nvSpPr>
-        <p:spPr>
           <a:xfrm rot="5400000">
-            <a:off x="2825230" y="2983637"/>
-            <a:ext cx="7260127" cy="892762"/>
-          </a:xfrm>
-          <a:prstGeom prst="rect">
-            <a:avLst/>
-          </a:prstGeom>
-          <a:noFill/>
-        </p:spPr>
-        <p:txBody>
-          <a:bodyPr wrap="square"/>
-          <a:lstStyle/>
-          <a:p>
-            <a:r>
-              <a:rPr sz="8800" dirty="0" err="1">
-                <a:latin typeface="华康少女文字W5(P)"/>
-              </a:rPr>
-              <a:t>谁占上风</a:t>
-            </a:r>
-            <a:endParaRPr sz="8800" dirty="0">
-              <a:latin typeface="华康少女文字W5(P)"/>
-            </a:endParaRPr>
-          </a:p>
-        </p:txBody>
-      </p:sp>
-      <p:sp>
-        <p:nvSpPr>
-          <p:cNvPr id="18" name="TextBox 7">
-            <a:extLst>
-              <a:ext uri="{FF2B5EF4-FFF2-40B4-BE49-F238E27FC236}">
-                <a16:creationId xmlns:a16="http://schemas.microsoft.com/office/drawing/2014/main" id="{1296DEA5-4A37-E324-4F00-6202ED2052E4}"/>
-              </a:ext>
-            </a:extLst>
-          </p:cNvPr>
-          <p:cNvSpPr txBox="1"/>
-          <p:nvPr/>
-        </p:nvSpPr>
-        <p:spPr>
-          <a:xfrm rot="5400000">
-            <a:off x="4301018" y="2983637"/>
-            <a:ext cx="7260127" cy="892762"/>
-          </a:xfrm>
-          <a:prstGeom prst="rect">
-            <a:avLst/>
-          </a:prstGeom>
-          <a:noFill/>
-        </p:spPr>
-        <p:txBody>
-          <a:bodyPr wrap="square"/>
-          <a:lstStyle/>
-          <a:p>
-            <a:r>
-              <a:rPr sz="8000" dirty="0" err="1">
+            <a:off x="1905370" y="4073679"/>
+            <a:ext cx="5760000" cy="724814"/>
+          </a:xfrm>
+          <a:prstGeom prst="rect">
+            <a:avLst/>
+          </a:prstGeom>
+          <a:noFill/>
+        </p:spPr>
+        <p:txBody>
+          <a:bodyPr wrap="none">
+            <a:noAutofit/>
+          </a:bodyPr>
+          <a:lstStyle/>
+          <a:p>
+            <a:r>
+              <a:rPr sz="3936" dirty="0" err="1">
                 <a:latin typeface="华康少女文字W5(P)"/>
               </a:rPr>
               <a:t>谁</a:t>
             </a:r>
             <a:r>
-              <a:rPr sz="8000" dirty="0" err="1">
+              <a:rPr sz="3936" dirty="0" err="1">
                 <a:solidFill>
                   <a:srgbClr val="FF0000"/>
                 </a:solidFill>
@@ -3599,7 +3395,7 @@
               </a:rPr>
               <a:t>不讲道理</a:t>
             </a:r>
-            <a:endParaRPr sz="8000" dirty="0">
+            <a:endParaRPr sz="3936" dirty="0">
               <a:solidFill>
                 <a:srgbClr val="FF0000"/>
               </a:solidFill>
@@ -3610,10 +3406,10 @@
       </p:sp>
       <p:sp>
         <p:nvSpPr>
-          <p:cNvPr id="19" name="TextBox 6">
+          <p:cNvPr id="15" name="TextBox 5">
             <a:extLst>
               <a:ext uri="{FF2B5EF4-FFF2-40B4-BE49-F238E27FC236}">
-                <a16:creationId xmlns:a16="http://schemas.microsoft.com/office/drawing/2014/main" id="{5C369099-B639-04D5-AEFE-47379C1D033C}"/>
+                <a16:creationId xmlns:a16="http://schemas.microsoft.com/office/drawing/2014/main" id="{09D79740-8638-B27B-8B50-0CF1F3B1DD29}"/>
               </a:ext>
             </a:extLst>
           </p:cNvPr>
@@ -3622,25 +3418,190 @@
         </p:nvSpPr>
         <p:spPr>
           <a:xfrm rot="5400000">
-            <a:off x="5817796" y="2983637"/>
-            <a:ext cx="7260127" cy="892762"/>
-          </a:xfrm>
-          <a:prstGeom prst="rect">
-            <a:avLst/>
-          </a:prstGeom>
-          <a:noFill/>
-        </p:spPr>
-        <p:txBody>
-          <a:bodyPr wrap="square"/>
-          <a:lstStyle/>
-          <a:p>
-            <a:r>
-              <a:rPr sz="8000" dirty="0" err="1">
+            <a:off x="2564951" y="4138913"/>
+            <a:ext cx="5760000" cy="594347"/>
+          </a:xfrm>
+          <a:prstGeom prst="rect">
+            <a:avLst/>
+          </a:prstGeom>
+          <a:noFill/>
+        </p:spPr>
+        <p:txBody>
+          <a:bodyPr wrap="none">
+            <a:noAutofit/>
+          </a:bodyPr>
+          <a:lstStyle/>
+          <a:p>
+            <a:r>
+              <a:rPr sz="3227" dirty="0" err="1">
                 <a:latin typeface="华康少女文字W5(P)"/>
               </a:rPr>
               <a:t>结婚之后嘛</a:t>
             </a:r>
-            <a:endParaRPr sz="8000" dirty="0">
+            <a:endParaRPr sz="3227" dirty="0">
+              <a:latin typeface="华康少女文字W5(P)"/>
+            </a:endParaRPr>
+          </a:p>
+        </p:txBody>
+      </p:sp>
+      <p:sp>
+        <p:nvSpPr>
+          <p:cNvPr id="16" name="TextBox 6">
+            <a:extLst>
+              <a:ext uri="{FF2B5EF4-FFF2-40B4-BE49-F238E27FC236}">
+                <a16:creationId xmlns:a16="http://schemas.microsoft.com/office/drawing/2014/main" id="{D3826D44-8FB0-C3C1-9692-A5D52DD53E76}"/>
+              </a:ext>
+            </a:extLst>
+          </p:cNvPr>
+          <p:cNvSpPr txBox="1"/>
+          <p:nvPr/>
+        </p:nvSpPr>
+        <p:spPr>
+          <a:xfrm>
+            <a:off x="5611185" y="780570"/>
+            <a:ext cx="5760000" cy="883920"/>
+          </a:xfrm>
+          <a:prstGeom prst="rect">
+            <a:avLst/>
+          </a:prstGeom>
+          <a:noFill/>
+        </p:spPr>
+        <p:txBody>
+          <a:bodyPr wrap="none">
+            <a:noAutofit/>
+          </a:bodyPr>
+          <a:lstStyle/>
+          <a:p>
+            <a:r>
+              <a:rPr sz="4800">
+                <a:latin typeface="华康少女文字W5(P)"/>
+              </a:rPr>
+              <a:t>她说</a:t>
+            </a:r>
+          </a:p>
+        </p:txBody>
+      </p:sp>
+      <p:sp>
+        <p:nvSpPr>
+          <p:cNvPr id="17" name="TextBox 7">
+            <a:extLst>
+              <a:ext uri="{FF2B5EF4-FFF2-40B4-BE49-F238E27FC236}">
+                <a16:creationId xmlns:a16="http://schemas.microsoft.com/office/drawing/2014/main" id="{A0263DF6-67D1-1FF4-C9D3-050909F348D4}"/>
+              </a:ext>
+            </a:extLst>
+          </p:cNvPr>
+          <p:cNvSpPr txBox="1"/>
+          <p:nvPr/>
+        </p:nvSpPr>
+        <p:spPr>
+          <a:xfrm>
+            <a:off x="5611185" y="-70244"/>
+            <a:ext cx="5760000" cy="724814"/>
+          </a:xfrm>
+          <a:prstGeom prst="rect">
+            <a:avLst/>
+          </a:prstGeom>
+          <a:noFill/>
+        </p:spPr>
+        <p:txBody>
+          <a:bodyPr wrap="none">
+            <a:noAutofit/>
+          </a:bodyPr>
+          <a:lstStyle/>
+          <a:p>
+            <a:r>
+              <a:rPr sz="3936">
+                <a:latin typeface="华康少女文字W5(P)"/>
+              </a:rPr>
+              <a:t>我觉得</a:t>
+            </a:r>
+          </a:p>
+        </p:txBody>
+      </p:sp>
+      <p:sp>
+        <p:nvSpPr>
+          <p:cNvPr id="18" name="TextBox 8">
+            <a:extLst>
+              <a:ext uri="{FF2B5EF4-FFF2-40B4-BE49-F238E27FC236}">
+                <a16:creationId xmlns:a16="http://schemas.microsoft.com/office/drawing/2014/main" id="{94718D60-5815-680A-CEFC-9571B78F1909}"/>
+              </a:ext>
+            </a:extLst>
+          </p:cNvPr>
+          <p:cNvSpPr txBox="1"/>
+          <p:nvPr/>
+        </p:nvSpPr>
+        <p:spPr>
+          <a:xfrm>
+            <a:off x="5611185" y="-790592"/>
+            <a:ext cx="5760000" cy="594347"/>
+          </a:xfrm>
+          <a:prstGeom prst="rect">
+            <a:avLst/>
+          </a:prstGeom>
+          <a:noFill/>
+        </p:spPr>
+        <p:txBody>
+          <a:bodyPr wrap="none">
+            <a:noAutofit/>
+          </a:bodyPr>
+          <a:lstStyle/>
+          <a:p>
+            <a:r>
+              <a:rPr sz="3227" dirty="0" err="1">
+                <a:latin typeface="华康少女文字W5(P)"/>
+              </a:rPr>
+              <a:t>讲得很对的</a:t>
+            </a:r>
+            <a:endParaRPr sz="3227" dirty="0">
+              <a:latin typeface="华康少女文字W5(P)"/>
+            </a:endParaRPr>
+          </a:p>
+        </p:txBody>
+      </p:sp>
+      <p:sp>
+        <p:nvSpPr>
+          <p:cNvPr id="19" name="TextBox 9">
+            <a:extLst>
+              <a:ext uri="{FF2B5EF4-FFF2-40B4-BE49-F238E27FC236}">
+                <a16:creationId xmlns:a16="http://schemas.microsoft.com/office/drawing/2014/main" id="{275D41C1-9AA0-E23D-9DE6-7EAFE15D9F30}"/>
+              </a:ext>
+            </a:extLst>
+          </p:cNvPr>
+          <p:cNvSpPr txBox="1"/>
+          <p:nvPr/>
+        </p:nvSpPr>
+        <p:spPr>
+          <a:xfrm>
+            <a:off x="5611184" y="-1403957"/>
+            <a:ext cx="5760000" cy="487365"/>
+          </a:xfrm>
+          <a:prstGeom prst="rect">
+            <a:avLst/>
+          </a:prstGeom>
+          <a:noFill/>
+        </p:spPr>
+        <p:txBody>
+          <a:bodyPr wrap="none">
+            <a:noAutofit/>
+          </a:bodyPr>
+          <a:lstStyle/>
+          <a:p>
+            <a:r>
+              <a:rPr sz="2646" dirty="0" err="1">
+                <a:solidFill>
+                  <a:srgbClr val="FF6B35"/>
+                </a:solidFill>
+                <a:latin typeface="华文行楷"/>
+              </a:rPr>
+              <a:t>张爱玲</a:t>
+            </a:r>
+            <a:r>
+              <a:rPr sz="2646" dirty="0" err="1">
+                <a:latin typeface="华康少女文字W5(P)"/>
+              </a:rPr>
+              <a:t>有一句话</a:t>
+            </a:r>
+            <a:endParaRPr sz="2646" dirty="0">
               <a:latin typeface="华康少女文字W5(P)"/>
             </a:endParaRPr>
           </a:p>
@@ -3651,43 +3612,6 @@
   <p:clrMapOvr>
     <a:masterClrMapping/>
   </p:clrMapOvr>
-  <p:transition advTm="14000"/>
-  <p:timing>
-    <p:tnLst>
-      <p:par>
-        <p:cTn id="1" dur="indefinite" restart="never" nodeType="tmRoot">
-          <p:stCondLst>
-            <p:cond delay="0"/>
-          </p:stCondLst>
-          <p:childTnLst>
-            <p:par>
-              <p:cTn id="2" fill="hold">
-                <p:stCondLst>
-                  <p:cond delay="0"/>
-                </p:stCondLst>
-                <p:childTnLst>
-                  <p:par>
-                    <p:cTn id="3" dur="500" fill="hold">
-                      <p:childTnLst>
-                        <p:animEffect transition="in">
-                          <p:cBhvr>
-                            <p:cTn id="4" dur="500"/>
-                            <p:tgtEl>
-                              <p:spTgt spid="12"/>
-                            </p:tgtEl>
-                          </p:cBhvr>
-                        </p:animEffect>
-                      </p:childTnLst>
-                    </p:cTn>
-                  </p:par>
-                </p:childTnLst>
-              </p:cTn>
-            </p:par>
-          </p:childTnLst>
-        </p:cTn>
-      </p:par>
-    </p:tnLst>
-  </p:timing>
 </p:sld>
 </file>
 
@@ -3710,7 +3634,7 @@
       </p:grpSpPr>
       <p:pic>
         <p:nvPicPr>
-          <p:cNvPr id="2" name="Picture 1"/>
+          <p:cNvPr id="2" name="Picture 1" descr="image.jpg"/>
           <p:cNvPicPr>
             <a:picLocks noChangeAspect="1"/>
           </p:cNvPicPr>
@@ -3718,13 +3642,14 @@
         </p:nvPicPr>
         <p:blipFill>
           <a:blip r:embed="rId2"/>
-          <a:srcRect/>
-          <a:stretch/>
+          <a:stretch>
+            <a:fillRect/>
+          </a:stretch>
         </p:blipFill>
         <p:spPr>
           <a:xfrm>
-            <a:off x="86" y="0"/>
-            <a:ext cx="6857828" cy="12191695"/>
+            <a:off x="0" y="0"/>
+            <a:ext cx="6858000" cy="12193200"/>
           </a:xfrm>
           <a:prstGeom prst="rect">
             <a:avLst/>
@@ -3733,31 +3658,126 @@
       </p:pic>
       <p:sp>
         <p:nvSpPr>
-          <p:cNvPr id="13" name="TextBox 12"/>
-          <p:cNvSpPr txBox="1"/>
-          <p:nvPr/>
-        </p:nvSpPr>
-        <p:spPr>
-          <a:xfrm>
-            <a:off x="914400" y="5852013"/>
-            <a:ext cx="5029200" cy="711200"/>
-          </a:xfrm>
-          <a:prstGeom prst="rect">
-            <a:avLst/>
-          </a:prstGeom>
-          <a:noFill/>
-        </p:spPr>
-        <p:txBody>
-          <a:bodyPr wrap="square"/>
-          <a:lstStyle/>
-          <a:p>
-            <a:r>
-              <a:rPr sz="5900" dirty="0" err="1">
+          <p:cNvPr id="3" name="TextBox 2"/>
+          <p:cNvSpPr txBox="1"/>
+          <p:nvPr/>
+        </p:nvSpPr>
+        <p:spPr>
+          <a:xfrm>
+            <a:off x="914400" y="5682479"/>
+            <a:ext cx="5760000" cy="883920"/>
+          </a:xfrm>
+          <a:prstGeom prst="rect">
+            <a:avLst/>
+          </a:prstGeom>
+          <a:noFill/>
+        </p:spPr>
+        <p:txBody>
+          <a:bodyPr wrap="none">
+            <a:noAutofit/>
+          </a:bodyPr>
+          <a:lstStyle/>
+          <a:p>
+            <a:r>
+              <a:rPr sz="4800">
                 <a:latin typeface="华康少女文字W5(P)"/>
               </a:rPr>
               <a:t>他连话都不讲</a:t>
             </a:r>
-            <a:endParaRPr sz="5900" dirty="0">
+          </a:p>
+        </p:txBody>
+      </p:sp>
+      <p:sp>
+        <p:nvSpPr>
+          <p:cNvPr id="4" name="TextBox 3"/>
+          <p:cNvSpPr txBox="1"/>
+          <p:nvPr/>
+        </p:nvSpPr>
+        <p:spPr>
+          <a:xfrm>
+            <a:off x="914400" y="4831665"/>
+            <a:ext cx="5760000" cy="724814"/>
+          </a:xfrm>
+          <a:prstGeom prst="rect">
+            <a:avLst/>
+          </a:prstGeom>
+          <a:noFill/>
+        </p:spPr>
+        <p:txBody>
+          <a:bodyPr wrap="none">
+            <a:noAutofit/>
+          </a:bodyPr>
+          <a:lstStyle/>
+          <a:p>
+            <a:r>
+              <a:rPr sz="3936">
+                <a:latin typeface="华康少女文字W5(P)"/>
+              </a:rPr>
+              <a:t>最高的境界了</a:t>
+            </a:r>
+          </a:p>
+        </p:txBody>
+      </p:sp>
+      <p:sp>
+        <p:nvSpPr>
+          <p:cNvPr id="5" name="TextBox 4"/>
+          <p:cNvSpPr txBox="1"/>
+          <p:nvPr/>
+        </p:nvSpPr>
+        <p:spPr>
+          <a:xfrm>
+            <a:off x="914400" y="4111317"/>
+            <a:ext cx="5760000" cy="594347"/>
+          </a:xfrm>
+          <a:prstGeom prst="rect">
+            <a:avLst/>
+          </a:prstGeom>
+          <a:noFill/>
+        </p:spPr>
+        <p:txBody>
+          <a:bodyPr wrap="none">
+            <a:noAutofit/>
+          </a:bodyPr>
+          <a:lstStyle/>
+          <a:p>
+            <a:r>
+              <a:rPr sz="3227">
+                <a:latin typeface="华康少女文字W5(P)"/>
+              </a:rPr>
+              <a:t>不讲道理已经到了</a:t>
+            </a:r>
+          </a:p>
+        </p:txBody>
+      </p:sp>
+      <p:sp>
+        <p:nvSpPr>
+          <p:cNvPr id="6" name="TextBox 5"/>
+          <p:cNvSpPr txBox="1"/>
+          <p:nvPr/>
+        </p:nvSpPr>
+        <p:spPr>
+          <a:xfrm>
+            <a:off x="914400" y="3497952"/>
+            <a:ext cx="5760000" cy="487365"/>
+          </a:xfrm>
+          <a:prstGeom prst="rect">
+            <a:avLst/>
+          </a:prstGeom>
+          <a:noFill/>
+        </p:spPr>
+        <p:txBody>
+          <a:bodyPr wrap="none">
+            <a:noAutofit/>
+          </a:bodyPr>
+          <a:lstStyle/>
+          <a:p>
+            <a:r>
+              <a:rPr sz="2646" dirty="0" err="1">
+                <a:latin typeface="华康少女文字W5(P)"/>
+              </a:rPr>
+              <a:t>我们家里那个</a:t>
+            </a:r>
+            <a:endParaRPr sz="2646" dirty="0">
               <a:latin typeface="华康少女文字W5(P)"/>
             </a:endParaRPr>
           </a:p>
@@ -3765,10 +3785,10 @@
       </p:sp>
       <p:sp>
         <p:nvSpPr>
-          <p:cNvPr id="14" name="TextBox 9">
+          <p:cNvPr id="14" name="TextBox 3">
             <a:extLst>
               <a:ext uri="{FF2B5EF4-FFF2-40B4-BE49-F238E27FC236}">
-                <a16:creationId xmlns:a16="http://schemas.microsoft.com/office/drawing/2014/main" id="{DCD4650C-FEC3-EF89-3C3C-1987B8DA2B05}"/>
+                <a16:creationId xmlns:a16="http://schemas.microsoft.com/office/drawing/2014/main" id="{128A34D3-7DBD-2986-DFD8-E382D2C9BAB5}"/>
               </a:ext>
             </a:extLst>
           </p:cNvPr>
@@ -3776,26 +3796,28 @@
           <p:nvPr/>
         </p:nvSpPr>
         <p:spPr>
-          <a:xfrm>
-            <a:off x="914400" y="3279360"/>
-            <a:ext cx="5029200" cy="711200"/>
-          </a:xfrm>
-          <a:prstGeom prst="rect">
-            <a:avLst/>
-          </a:prstGeom>
-          <a:noFill/>
-        </p:spPr>
-        <p:txBody>
-          <a:bodyPr wrap="square"/>
-          <a:lstStyle/>
-          <a:p>
-            <a:r>
-              <a:rPr sz="5900" dirty="0" err="1">
-                <a:latin typeface="华康少女文字W5(P)"/>
-              </a:rPr>
-              <a:t>我们家里那个</a:t>
-            </a:r>
-            <a:endParaRPr sz="5900" dirty="0">
+          <a:xfrm rot="5400000">
+            <a:off x="475364" y="3729434"/>
+            <a:ext cx="5760000" cy="883920"/>
+          </a:xfrm>
+          <a:prstGeom prst="rect">
+            <a:avLst/>
+          </a:prstGeom>
+          <a:noFill/>
+        </p:spPr>
+        <p:txBody>
+          <a:bodyPr wrap="none">
+            <a:noAutofit/>
+          </a:bodyPr>
+          <a:lstStyle/>
+          <a:p>
+            <a:r>
+              <a:rPr sz="4400" dirty="0" err="1">
+                <a:latin typeface="华康少女文字W5(P)"/>
+              </a:rPr>
+              <a:t>谁占上风</a:t>
+            </a:r>
+            <a:endParaRPr sz="4400" dirty="0">
               <a:latin typeface="华康少女文字W5(P)"/>
             </a:endParaRPr>
           </a:p>
@@ -3803,10 +3825,10 @@
       </p:sp>
       <p:sp>
         <p:nvSpPr>
-          <p:cNvPr id="15" name="TextBox 10">
+          <p:cNvPr id="15" name="TextBox 4">
             <a:extLst>
               <a:ext uri="{FF2B5EF4-FFF2-40B4-BE49-F238E27FC236}">
-                <a16:creationId xmlns:a16="http://schemas.microsoft.com/office/drawing/2014/main" id="{8C1316E3-364C-2199-F8A1-E2D0E37D3617}"/>
+                <a16:creationId xmlns:a16="http://schemas.microsoft.com/office/drawing/2014/main" id="{DC136954-08E1-D4D3-1534-4098F631E030}"/>
               </a:ext>
             </a:extLst>
           </p:cNvPr>
@@ -3814,311 +3836,29 @@
           <p:nvPr/>
         </p:nvSpPr>
         <p:spPr>
-          <a:xfrm>
-            <a:off x="914400" y="4157474"/>
-            <a:ext cx="5029200" cy="711200"/>
-          </a:xfrm>
-          <a:prstGeom prst="rect">
-            <a:avLst/>
-          </a:prstGeom>
-          <a:noFill/>
-        </p:spPr>
-        <p:txBody>
-          <a:bodyPr wrap="square"/>
-          <a:lstStyle/>
-          <a:p>
-            <a:r>
-              <a:rPr sz="4400" dirty="0" err="1">
-                <a:latin typeface="华康少女文字W5(P)"/>
-              </a:rPr>
-              <a:t>不讲道理已经到了</a:t>
-            </a:r>
-            <a:endParaRPr sz="4400" dirty="0">
-              <a:latin typeface="华康少女文字W5(P)"/>
-            </a:endParaRPr>
-          </a:p>
-        </p:txBody>
-      </p:sp>
-      <p:sp>
-        <p:nvSpPr>
-          <p:cNvPr id="16" name="TextBox 11">
-            <a:extLst>
-              <a:ext uri="{FF2B5EF4-FFF2-40B4-BE49-F238E27FC236}">
-                <a16:creationId xmlns:a16="http://schemas.microsoft.com/office/drawing/2014/main" id="{B00386D2-1C63-4825-B55C-A09D1D3E096E}"/>
-              </a:ext>
-            </a:extLst>
-          </p:cNvPr>
-          <p:cNvSpPr txBox="1"/>
-          <p:nvPr/>
-        </p:nvSpPr>
-        <p:spPr>
-          <a:xfrm>
-            <a:off x="914400" y="4970274"/>
-            <a:ext cx="5029200" cy="711200"/>
-          </a:xfrm>
-          <a:prstGeom prst="rect">
-            <a:avLst/>
-          </a:prstGeom>
-          <a:noFill/>
-        </p:spPr>
-        <p:txBody>
-          <a:bodyPr wrap="square"/>
-          <a:lstStyle/>
-          <a:p>
-            <a:r>
-              <a:rPr sz="5900" dirty="0" err="1">
-                <a:solidFill>
-                  <a:srgbClr val="FF0000"/>
-                </a:solidFill>
-                <a:latin typeface="华康少女文字W5(P)"/>
-              </a:rPr>
-              <a:t>最高</a:t>
-            </a:r>
-            <a:r>
-              <a:rPr sz="5900" dirty="0" err="1">
-                <a:latin typeface="华康少女文字W5(P)"/>
-              </a:rPr>
-              <a:t>的境界了</a:t>
-            </a:r>
-            <a:endParaRPr sz="5900" dirty="0">
-              <a:latin typeface="华康少女文字W5(P)"/>
-            </a:endParaRPr>
-          </a:p>
-        </p:txBody>
-      </p:sp>
-      <p:sp>
-        <p:nvSpPr>
-          <p:cNvPr id="17" name="TextBox 5">
-            <a:extLst>
-              <a:ext uri="{FF2B5EF4-FFF2-40B4-BE49-F238E27FC236}">
-                <a16:creationId xmlns:a16="http://schemas.microsoft.com/office/drawing/2014/main" id="{7BC0600C-23C2-BC75-2783-2CC20515A623}"/>
-              </a:ext>
-            </a:extLst>
-          </p:cNvPr>
-          <p:cNvSpPr txBox="1"/>
-          <p:nvPr/>
-        </p:nvSpPr>
-        <p:spPr>
-          <a:xfrm>
-            <a:off x="9894241" y="-2469084"/>
-            <a:ext cx="6705600" cy="619002"/>
-          </a:xfrm>
-          <a:prstGeom prst="rect">
-            <a:avLst/>
-          </a:prstGeom>
-          <a:noFill/>
-        </p:spPr>
-        <p:txBody>
-          <a:bodyPr wrap="square"/>
-          <a:lstStyle/>
-          <a:p>
-            <a:r>
-              <a:rPr sz="8800" dirty="0" err="1">
-                <a:latin typeface="华康少女文字W5(P)"/>
-              </a:rPr>
-              <a:t>她说</a:t>
-            </a:r>
-            <a:endParaRPr sz="8800" dirty="0">
-              <a:latin typeface="华康少女文字W5(P)"/>
-            </a:endParaRPr>
-          </a:p>
-        </p:txBody>
-      </p:sp>
-      <p:sp>
-        <p:nvSpPr>
-          <p:cNvPr id="18" name="TextBox 4">
-            <a:extLst>
-              <a:ext uri="{FF2B5EF4-FFF2-40B4-BE49-F238E27FC236}">
-                <a16:creationId xmlns:a16="http://schemas.microsoft.com/office/drawing/2014/main" id="{949E9F71-DF7E-0992-9B16-EB5609647BCE}"/>
-              </a:ext>
-            </a:extLst>
-          </p:cNvPr>
-          <p:cNvSpPr txBox="1"/>
-          <p:nvPr/>
-        </p:nvSpPr>
-        <p:spPr>
-          <a:xfrm>
-            <a:off x="9894242" y="-3960024"/>
-            <a:ext cx="10189025" cy="1017347"/>
-          </a:xfrm>
-          <a:prstGeom prst="rect">
-            <a:avLst/>
-          </a:prstGeom>
-          <a:noFill/>
-        </p:spPr>
-        <p:txBody>
-          <a:bodyPr wrap="square"/>
-          <a:lstStyle/>
-          <a:p>
-            <a:r>
-              <a:rPr sz="8800" dirty="0" err="1">
-                <a:latin typeface="华康少女文字W5(P)"/>
-              </a:rPr>
-              <a:t>我觉得</a:t>
-            </a:r>
-            <a:endParaRPr sz="8800" dirty="0">
-              <a:latin typeface="华康少女文字W5(P)"/>
-            </a:endParaRPr>
-          </a:p>
-        </p:txBody>
-      </p:sp>
-      <p:sp>
-        <p:nvSpPr>
-          <p:cNvPr id="19" name="TextBox 3">
-            <a:extLst>
-              <a:ext uri="{FF2B5EF4-FFF2-40B4-BE49-F238E27FC236}">
-                <a16:creationId xmlns:a16="http://schemas.microsoft.com/office/drawing/2014/main" id="{3770497E-8659-1DCC-2EF8-8F54EB55B8EB}"/>
-              </a:ext>
-            </a:extLst>
-          </p:cNvPr>
-          <p:cNvSpPr txBox="1"/>
-          <p:nvPr/>
-        </p:nvSpPr>
-        <p:spPr>
-          <a:xfrm>
-            <a:off x="9894245" y="-5543577"/>
-            <a:ext cx="10189025" cy="1017347"/>
-          </a:xfrm>
-          <a:prstGeom prst="rect">
-            <a:avLst/>
-          </a:prstGeom>
-          <a:noFill/>
-        </p:spPr>
-        <p:txBody>
-          <a:bodyPr wrap="square"/>
-          <a:lstStyle/>
-          <a:p>
-            <a:r>
-              <a:rPr sz="8000" dirty="0" err="1">
-                <a:latin typeface="华康少女文字W5(P)"/>
-              </a:rPr>
-              <a:t>讲得很对的</a:t>
-            </a:r>
-            <a:endParaRPr sz="8000" dirty="0">
-              <a:latin typeface="华康少女文字W5(P)"/>
-            </a:endParaRPr>
-          </a:p>
-        </p:txBody>
-      </p:sp>
-      <p:sp>
-        <p:nvSpPr>
-          <p:cNvPr id="20" name="TextBox 2">
-            <a:extLst>
-              <a:ext uri="{FF2B5EF4-FFF2-40B4-BE49-F238E27FC236}">
-                <a16:creationId xmlns:a16="http://schemas.microsoft.com/office/drawing/2014/main" id="{71B025A7-06EC-E56F-C322-E0A8C54ED2A5}"/>
-              </a:ext>
-            </a:extLst>
-          </p:cNvPr>
-          <p:cNvSpPr txBox="1"/>
-          <p:nvPr/>
-        </p:nvSpPr>
-        <p:spPr>
-          <a:xfrm>
-            <a:off x="9894242" y="-6747782"/>
-            <a:ext cx="10189025" cy="1017347"/>
-          </a:xfrm>
-          <a:prstGeom prst="rect">
-            <a:avLst/>
-          </a:prstGeom>
-          <a:noFill/>
-        </p:spPr>
-        <p:txBody>
-          <a:bodyPr wrap="square"/>
-          <a:lstStyle/>
-          <a:p>
-            <a:r>
-              <a:rPr sz="6000" dirty="0" err="1">
-                <a:solidFill>
-                  <a:srgbClr val="FF6B35"/>
-                </a:solidFill>
-                <a:latin typeface="华文行楷"/>
-              </a:rPr>
-              <a:t>张爱玲</a:t>
-            </a:r>
-            <a:r>
-              <a:rPr sz="6000" dirty="0" err="1">
-                <a:latin typeface="华康少女文字W5(P)"/>
-              </a:rPr>
-              <a:t>有一句话</a:t>
-            </a:r>
-            <a:endParaRPr sz="6000" dirty="0">
-              <a:latin typeface="华康少女文字W5(P)"/>
-            </a:endParaRPr>
-          </a:p>
-        </p:txBody>
-      </p:sp>
-      <p:sp>
-        <p:nvSpPr>
-          <p:cNvPr id="21" name="TextBox 8">
-            <a:extLst>
-              <a:ext uri="{FF2B5EF4-FFF2-40B4-BE49-F238E27FC236}">
-                <a16:creationId xmlns:a16="http://schemas.microsoft.com/office/drawing/2014/main" id="{BA7FBD27-2CC6-2045-0C5B-11424748CFF5}"/>
-              </a:ext>
-            </a:extLst>
-          </p:cNvPr>
-          <p:cNvSpPr txBox="1"/>
-          <p:nvPr/>
-        </p:nvSpPr>
-        <p:spPr>
           <a:xfrm rot="5400000">
-            <a:off x="2825230" y="2101898"/>
-            <a:ext cx="7260127" cy="892762"/>
-          </a:xfrm>
-          <a:prstGeom prst="rect">
-            <a:avLst/>
-          </a:prstGeom>
-          <a:noFill/>
-        </p:spPr>
-        <p:txBody>
-          <a:bodyPr wrap="square"/>
-          <a:lstStyle/>
-          <a:p>
-            <a:r>
-              <a:rPr sz="8800" dirty="0" err="1">
-                <a:latin typeface="华康少女文字W5(P)"/>
-              </a:rPr>
-              <a:t>谁占上风</a:t>
-            </a:r>
-            <a:endParaRPr sz="8800" dirty="0">
-              <a:latin typeface="华康少女文字W5(P)"/>
-            </a:endParaRPr>
-          </a:p>
-        </p:txBody>
-      </p:sp>
-      <p:sp>
-        <p:nvSpPr>
-          <p:cNvPr id="22" name="TextBox 7">
-            <a:extLst>
-              <a:ext uri="{FF2B5EF4-FFF2-40B4-BE49-F238E27FC236}">
-                <a16:creationId xmlns:a16="http://schemas.microsoft.com/office/drawing/2014/main" id="{FF22A262-046D-2FDD-3D28-C543899224E3}"/>
-              </a:ext>
-            </a:extLst>
-          </p:cNvPr>
-          <p:cNvSpPr txBox="1"/>
-          <p:nvPr/>
-        </p:nvSpPr>
-        <p:spPr>
-          <a:xfrm rot="5400000">
-            <a:off x="4301018" y="2101898"/>
-            <a:ext cx="7260127" cy="892762"/>
-          </a:xfrm>
-          <a:prstGeom prst="rect">
-            <a:avLst/>
-          </a:prstGeom>
-          <a:noFill/>
-        </p:spPr>
-        <p:txBody>
-          <a:bodyPr wrap="square"/>
-          <a:lstStyle/>
-          <a:p>
-            <a:r>
-              <a:rPr sz="8000" dirty="0" err="1">
+            <a:off x="1279731" y="3808986"/>
+            <a:ext cx="5760000" cy="724814"/>
+          </a:xfrm>
+          <a:prstGeom prst="rect">
+            <a:avLst/>
+          </a:prstGeom>
+          <a:noFill/>
+        </p:spPr>
+        <p:txBody>
+          <a:bodyPr wrap="none">
+            <a:noAutofit/>
+          </a:bodyPr>
+          <a:lstStyle/>
+          <a:p>
+            <a:r>
+              <a:rPr sz="3600" dirty="0" err="1">
                 <a:latin typeface="华康少女文字W5(P)"/>
               </a:rPr>
               <a:t>谁</a:t>
             </a:r>
             <a:r>
-              <a:rPr sz="8000" dirty="0" err="1">
+              <a:rPr sz="3600" dirty="0" err="1">
                 <a:solidFill>
                   <a:srgbClr val="FF0000"/>
                 </a:solidFill>
@@ -4126,7 +3866,7 @@
               </a:rPr>
               <a:t>不讲道理</a:t>
             </a:r>
-            <a:endParaRPr sz="8000" dirty="0">
+            <a:endParaRPr sz="3600" dirty="0">
               <a:solidFill>
                 <a:srgbClr val="FF0000"/>
               </a:solidFill>
@@ -4137,10 +3877,10 @@
       </p:sp>
       <p:sp>
         <p:nvSpPr>
-          <p:cNvPr id="23" name="TextBox 6">
+          <p:cNvPr id="16" name="TextBox 5">
             <a:extLst>
               <a:ext uri="{FF2B5EF4-FFF2-40B4-BE49-F238E27FC236}">
-                <a16:creationId xmlns:a16="http://schemas.microsoft.com/office/drawing/2014/main" id="{508408A9-6105-035B-4065-C8490CE3C16E}"/>
+                <a16:creationId xmlns:a16="http://schemas.microsoft.com/office/drawing/2014/main" id="{06EE16C9-AF83-4909-1F89-EB7907B9D897}"/>
               </a:ext>
             </a:extLst>
           </p:cNvPr>
@@ -4149,25 +3889,190 @@
         </p:nvSpPr>
         <p:spPr>
           <a:xfrm rot="5400000">
-            <a:off x="5817796" y="2101898"/>
-            <a:ext cx="7260127" cy="892762"/>
-          </a:xfrm>
-          <a:prstGeom prst="rect">
-            <a:avLst/>
-          </a:prstGeom>
-          <a:noFill/>
-        </p:spPr>
-        <p:txBody>
-          <a:bodyPr wrap="square"/>
-          <a:lstStyle/>
-          <a:p>
-            <a:r>
-              <a:rPr sz="8000" dirty="0" err="1">
+            <a:off x="1939312" y="3874220"/>
+            <a:ext cx="5760000" cy="594347"/>
+          </a:xfrm>
+          <a:prstGeom prst="rect">
+            <a:avLst/>
+          </a:prstGeom>
+          <a:noFill/>
+        </p:spPr>
+        <p:txBody>
+          <a:bodyPr wrap="none">
+            <a:noAutofit/>
+          </a:bodyPr>
+          <a:lstStyle/>
+          <a:p>
+            <a:r>
+              <a:rPr sz="3200" dirty="0" err="1">
                 <a:latin typeface="华康少女文字W5(P)"/>
               </a:rPr>
               <a:t>结婚之后嘛</a:t>
             </a:r>
-            <a:endParaRPr sz="8000" dirty="0">
+            <a:endParaRPr sz="3200" dirty="0">
+              <a:latin typeface="华康少女文字W5(P)"/>
+            </a:endParaRPr>
+          </a:p>
+        </p:txBody>
+      </p:sp>
+      <p:sp>
+        <p:nvSpPr>
+          <p:cNvPr id="17" name="TextBox 6">
+            <a:extLst>
+              <a:ext uri="{FF2B5EF4-FFF2-40B4-BE49-F238E27FC236}">
+                <a16:creationId xmlns:a16="http://schemas.microsoft.com/office/drawing/2014/main" id="{A1682E79-39D5-3A07-1DD2-F41DA305DD81}"/>
+              </a:ext>
+            </a:extLst>
+          </p:cNvPr>
+          <p:cNvSpPr txBox="1"/>
+          <p:nvPr/>
+        </p:nvSpPr>
+        <p:spPr>
+          <a:xfrm>
+            <a:off x="4985546" y="515877"/>
+            <a:ext cx="5760000" cy="883920"/>
+          </a:xfrm>
+          <a:prstGeom prst="rect">
+            <a:avLst/>
+          </a:prstGeom>
+          <a:noFill/>
+        </p:spPr>
+        <p:txBody>
+          <a:bodyPr wrap="none">
+            <a:noAutofit/>
+          </a:bodyPr>
+          <a:lstStyle/>
+          <a:p>
+            <a:r>
+              <a:rPr sz="4400">
+                <a:latin typeface="华康少女文字W5(P)"/>
+              </a:rPr>
+              <a:t>她说</a:t>
+            </a:r>
+          </a:p>
+        </p:txBody>
+      </p:sp>
+      <p:sp>
+        <p:nvSpPr>
+          <p:cNvPr id="18" name="TextBox 7">
+            <a:extLst>
+              <a:ext uri="{FF2B5EF4-FFF2-40B4-BE49-F238E27FC236}">
+                <a16:creationId xmlns:a16="http://schemas.microsoft.com/office/drawing/2014/main" id="{5B3C4CBC-04F3-A5CC-A01C-FBA4C21354B6}"/>
+              </a:ext>
+            </a:extLst>
+          </p:cNvPr>
+          <p:cNvSpPr txBox="1"/>
+          <p:nvPr/>
+        </p:nvSpPr>
+        <p:spPr>
+          <a:xfrm>
+            <a:off x="4985546" y="-334937"/>
+            <a:ext cx="5760000" cy="724814"/>
+          </a:xfrm>
+          <a:prstGeom prst="rect">
+            <a:avLst/>
+          </a:prstGeom>
+          <a:noFill/>
+        </p:spPr>
+        <p:txBody>
+          <a:bodyPr wrap="none">
+            <a:noAutofit/>
+          </a:bodyPr>
+          <a:lstStyle/>
+          <a:p>
+            <a:r>
+              <a:rPr sz="3600">
+                <a:latin typeface="华康少女文字W5(P)"/>
+              </a:rPr>
+              <a:t>我觉得</a:t>
+            </a:r>
+          </a:p>
+        </p:txBody>
+      </p:sp>
+      <p:sp>
+        <p:nvSpPr>
+          <p:cNvPr id="19" name="TextBox 8">
+            <a:extLst>
+              <a:ext uri="{FF2B5EF4-FFF2-40B4-BE49-F238E27FC236}">
+                <a16:creationId xmlns:a16="http://schemas.microsoft.com/office/drawing/2014/main" id="{E9E76D1D-A4C3-53D6-8AB4-CF1270E3DBF0}"/>
+              </a:ext>
+            </a:extLst>
+          </p:cNvPr>
+          <p:cNvSpPr txBox="1"/>
+          <p:nvPr/>
+        </p:nvSpPr>
+        <p:spPr>
+          <a:xfrm>
+            <a:off x="4985546" y="-1055285"/>
+            <a:ext cx="5760000" cy="594347"/>
+          </a:xfrm>
+          <a:prstGeom prst="rect">
+            <a:avLst/>
+          </a:prstGeom>
+          <a:noFill/>
+        </p:spPr>
+        <p:txBody>
+          <a:bodyPr wrap="none">
+            <a:noAutofit/>
+          </a:bodyPr>
+          <a:lstStyle/>
+          <a:p>
+            <a:r>
+              <a:rPr sz="3200" dirty="0" err="1">
+                <a:latin typeface="华康少女文字W5(P)"/>
+              </a:rPr>
+              <a:t>讲得很对的</a:t>
+            </a:r>
+            <a:endParaRPr sz="3200" dirty="0">
+              <a:latin typeface="华康少女文字W5(P)"/>
+            </a:endParaRPr>
+          </a:p>
+        </p:txBody>
+      </p:sp>
+      <p:sp>
+        <p:nvSpPr>
+          <p:cNvPr id="20" name="TextBox 9">
+            <a:extLst>
+              <a:ext uri="{FF2B5EF4-FFF2-40B4-BE49-F238E27FC236}">
+                <a16:creationId xmlns:a16="http://schemas.microsoft.com/office/drawing/2014/main" id="{0DE2A9B6-120A-8F6C-EDAE-9A22407C81F7}"/>
+              </a:ext>
+            </a:extLst>
+          </p:cNvPr>
+          <p:cNvSpPr txBox="1"/>
+          <p:nvPr/>
+        </p:nvSpPr>
+        <p:spPr>
+          <a:xfrm>
+            <a:off x="4985545" y="-1668650"/>
+            <a:ext cx="5760000" cy="487365"/>
+          </a:xfrm>
+          <a:prstGeom prst="rect">
+            <a:avLst/>
+          </a:prstGeom>
+          <a:noFill/>
+        </p:spPr>
+        <p:txBody>
+          <a:bodyPr wrap="none">
+            <a:noAutofit/>
+          </a:bodyPr>
+          <a:lstStyle/>
+          <a:p>
+            <a:r>
+              <a:rPr sz="2400" dirty="0" err="1">
+                <a:solidFill>
+                  <a:srgbClr val="FF6B35"/>
+                </a:solidFill>
+                <a:latin typeface="华文行楷"/>
+              </a:rPr>
+              <a:t>张爱玲</a:t>
+            </a:r>
+            <a:r>
+              <a:rPr sz="2400" dirty="0" err="1">
+                <a:latin typeface="华康少女文字W5(P)"/>
+              </a:rPr>
+              <a:t>有一句话</a:t>
+            </a:r>
+            <a:endParaRPr sz="2400" dirty="0">
               <a:latin typeface="华康少女文字W5(P)"/>
             </a:endParaRPr>
           </a:p>
@@ -4178,43 +4083,6 @@
   <p:clrMapOvr>
     <a:masterClrMapping/>
   </p:clrMapOvr>
-  <p:transition advTm="15380"/>
-  <p:timing>
-    <p:tnLst>
-      <p:par>
-        <p:cTn id="1" dur="indefinite" restart="never" nodeType="tmRoot">
-          <p:stCondLst>
-            <p:cond delay="0"/>
-          </p:stCondLst>
-          <p:childTnLst>
-            <p:par>
-              <p:cTn id="2" fill="hold">
-                <p:stCondLst>
-                  <p:cond delay="0"/>
-                </p:stCondLst>
-                <p:childTnLst>
-                  <p:par>
-                    <p:cTn id="3" dur="500" fill="hold">
-                      <p:childTnLst>
-                        <p:animEffect transition="in">
-                          <p:cBhvr>
-                            <p:cTn id="4" dur="500"/>
-                            <p:tgtEl>
-                              <p:spTgt spid="13"/>
-                            </p:tgtEl>
-                          </p:cBhvr>
-                        </p:animEffect>
-                      </p:childTnLst>
-                    </p:cTn>
-                  </p:par>
-                </p:childTnLst>
-              </p:cTn>
-            </p:par>
-          </p:childTnLst>
-        </p:cTn>
-      </p:par>
-    </p:tnLst>
-  </p:timing>
 </p:sld>
 </file>
 
@@ -4237,7 +4105,7 @@
       </p:grpSpPr>
       <p:pic>
         <p:nvPicPr>
-          <p:cNvPr id="2" name="Picture 1"/>
+          <p:cNvPr id="2" name="Picture 1" descr="image.jpg"/>
           <p:cNvPicPr>
             <a:picLocks noChangeAspect="1"/>
           </p:cNvPicPr>
@@ -4245,13 +4113,14 @@
         </p:nvPicPr>
         <p:blipFill>
           <a:blip r:embed="rId2"/>
-          <a:srcRect/>
-          <a:stretch/>
+          <a:stretch>
+            <a:fillRect/>
+          </a:stretch>
         </p:blipFill>
         <p:spPr>
           <a:xfrm>
-            <a:off x="86" y="0"/>
-            <a:ext cx="6857828" cy="12191695"/>
+            <a:off x="0" y="0"/>
+            <a:ext cx="6858000" cy="12193200"/>
           </a:xfrm>
           <a:prstGeom prst="rect">
             <a:avLst/>
@@ -4260,31 +4129,33 @@
       </p:pic>
       <p:sp>
         <p:nvSpPr>
-          <p:cNvPr id="10" name="TextBox 9"/>
-          <p:cNvSpPr txBox="1"/>
-          <p:nvPr/>
-        </p:nvSpPr>
-        <p:spPr>
-          <a:xfrm>
-            <a:off x="914400" y="5852013"/>
-            <a:ext cx="5029200" cy="711200"/>
-          </a:xfrm>
-          <a:prstGeom prst="rect">
-            <a:avLst/>
-          </a:prstGeom>
-          <a:noFill/>
-        </p:spPr>
-        <p:txBody>
-          <a:bodyPr wrap="square"/>
-          <a:lstStyle/>
-          <a:p>
-            <a:r>
-              <a:rPr sz="5900" dirty="0" err="1">
+          <p:cNvPr id="3" name="TextBox 2"/>
+          <p:cNvSpPr txBox="1"/>
+          <p:nvPr/>
+        </p:nvSpPr>
+        <p:spPr>
+          <a:xfrm>
+            <a:off x="914400" y="5682479"/>
+            <a:ext cx="5760000" cy="883920"/>
+          </a:xfrm>
+          <a:prstGeom prst="rect">
+            <a:avLst/>
+          </a:prstGeom>
+          <a:noFill/>
+        </p:spPr>
+        <p:txBody>
+          <a:bodyPr wrap="none">
+            <a:noAutofit/>
+          </a:bodyPr>
+          <a:lstStyle/>
+          <a:p>
+            <a:r>
+              <a:rPr sz="4800" dirty="0" err="1">
                 <a:latin typeface="华康少女文字W5(P)"/>
               </a:rPr>
               <a:t>他就是拿一双</a:t>
             </a:r>
-            <a:endParaRPr sz="5900" dirty="0">
+            <a:endParaRPr sz="4800" dirty="0">
               <a:latin typeface="华康少女文字W5(P)"/>
             </a:endParaRPr>
           </a:p>
@@ -4292,10 +4163,10 @@
       </p:sp>
       <p:sp>
         <p:nvSpPr>
-          <p:cNvPr id="11" name="TextBox 12">
+          <p:cNvPr id="15" name="TextBox 2">
             <a:extLst>
               <a:ext uri="{FF2B5EF4-FFF2-40B4-BE49-F238E27FC236}">
-                <a16:creationId xmlns:a16="http://schemas.microsoft.com/office/drawing/2014/main" id="{5C821162-47FC-504F-094C-17F098938CD9}"/>
+                <a16:creationId xmlns:a16="http://schemas.microsoft.com/office/drawing/2014/main" id="{00B3CBB6-7083-67EC-3F37-55D3F048BA63}"/>
               </a:ext>
             </a:extLst>
           </p:cNvPr>
@@ -4304,36 +4175,35 @@
         </p:nvSpPr>
         <p:spPr>
           <a:xfrm rot="16200000">
-            <a:off x="-2119087" y="3337411"/>
-            <a:ext cx="5029200" cy="711200"/>
-          </a:xfrm>
-          <a:prstGeom prst="rect">
-            <a:avLst/>
-          </a:prstGeom>
-          <a:noFill/>
-        </p:spPr>
-        <p:txBody>
-          <a:bodyPr wrap="square"/>
-          <a:lstStyle/>
-          <a:p>
-            <a:r>
-              <a:rPr sz="5900" dirty="0" err="1">
+            <a:off x="-2259743" y="2545440"/>
+            <a:ext cx="5760000" cy="883920"/>
+          </a:xfrm>
+          <a:prstGeom prst="rect">
+            <a:avLst/>
+          </a:prstGeom>
+          <a:noFill/>
+        </p:spPr>
+        <p:txBody>
+          <a:bodyPr wrap="none">
+            <a:noAutofit/>
+          </a:bodyPr>
+          <a:lstStyle/>
+          <a:p>
+            <a:r>
+              <a:rPr sz="4800">
                 <a:latin typeface="华康少女文字W5(P)"/>
               </a:rPr>
               <a:t>他连话都不讲</a:t>
             </a:r>
-            <a:endParaRPr sz="5900" dirty="0">
-              <a:latin typeface="华康少女文字W5(P)"/>
-            </a:endParaRPr>
-          </a:p>
-        </p:txBody>
-      </p:sp>
-      <p:sp>
-        <p:nvSpPr>
-          <p:cNvPr id="12" name="TextBox 9">
+          </a:p>
+        </p:txBody>
+      </p:sp>
+      <p:sp>
+        <p:nvSpPr>
+          <p:cNvPr id="16" name="TextBox 3">
             <a:extLst>
               <a:ext uri="{FF2B5EF4-FFF2-40B4-BE49-F238E27FC236}">
-                <a16:creationId xmlns:a16="http://schemas.microsoft.com/office/drawing/2014/main" id="{EC93B99E-62FA-EE01-43E9-D6508660CEEB}"/>
+                <a16:creationId xmlns:a16="http://schemas.microsoft.com/office/drawing/2014/main" id="{94EBAA75-F146-CA30-C6AB-E4758A84DDEB}"/>
               </a:ext>
             </a:extLst>
           </p:cNvPr>
@@ -4342,25 +4212,27 @@
         </p:nvSpPr>
         <p:spPr>
           <a:xfrm rot="16200000">
-            <a:off x="-4691740" y="3337411"/>
-            <a:ext cx="5029200" cy="711200"/>
-          </a:xfrm>
-          <a:prstGeom prst="rect">
-            <a:avLst/>
-          </a:prstGeom>
-          <a:noFill/>
-        </p:spPr>
-        <p:txBody>
-          <a:bodyPr wrap="square"/>
-          <a:lstStyle/>
-          <a:p>
-            <a:r>
-              <a:rPr sz="5900" dirty="0" err="1">
-                <a:latin typeface="华康少女文字W5(P)"/>
-              </a:rPr>
-              <a:t>我们家里那个</a:t>
-            </a:r>
-            <a:endParaRPr sz="5900" dirty="0">
+            <a:off x="-3075225" y="2630029"/>
+            <a:ext cx="5760000" cy="724814"/>
+          </a:xfrm>
+          <a:prstGeom prst="rect">
+            <a:avLst/>
+          </a:prstGeom>
+          <a:noFill/>
+        </p:spPr>
+        <p:txBody>
+          <a:bodyPr wrap="none">
+            <a:noAutofit/>
+          </a:bodyPr>
+          <a:lstStyle/>
+          <a:p>
+            <a:r>
+              <a:rPr sz="3936" dirty="0" err="1">
+                <a:latin typeface="华康少女文字W5(P)"/>
+              </a:rPr>
+              <a:t>最高的境界了</a:t>
+            </a:r>
+            <a:endParaRPr sz="3936" dirty="0">
               <a:latin typeface="华康少女文字W5(P)"/>
             </a:endParaRPr>
           </a:p>
@@ -4368,10 +4240,10 @@
       </p:sp>
       <p:sp>
         <p:nvSpPr>
-          <p:cNvPr id="13" name="TextBox 10">
+          <p:cNvPr id="17" name="TextBox 4">
             <a:extLst>
               <a:ext uri="{FF2B5EF4-FFF2-40B4-BE49-F238E27FC236}">
-                <a16:creationId xmlns:a16="http://schemas.microsoft.com/office/drawing/2014/main" id="{617E86CA-6F89-17A2-FC54-D8EB95676859}"/>
+                <a16:creationId xmlns:a16="http://schemas.microsoft.com/office/drawing/2014/main" id="{9C7B8255-A7A4-B9B3-D7C5-94EB197E9632}"/>
               </a:ext>
             </a:extLst>
           </p:cNvPr>
@@ -4380,23 +4252,105 @@
         </p:nvSpPr>
         <p:spPr>
           <a:xfrm rot="16200000">
-            <a:off x="-3813625" y="3337411"/>
-            <a:ext cx="5029200" cy="711200"/>
-          </a:xfrm>
-          <a:prstGeom prst="rect">
-            <a:avLst/>
-          </a:prstGeom>
-          <a:noFill/>
-        </p:spPr>
-        <p:txBody>
-          <a:bodyPr wrap="square"/>
+            <a:off x="-3734806" y="2695263"/>
+            <a:ext cx="5760000" cy="594347"/>
+          </a:xfrm>
+          <a:prstGeom prst="rect">
+            <a:avLst/>
+          </a:prstGeom>
+          <a:noFill/>
+        </p:spPr>
+        <p:txBody>
+          <a:bodyPr wrap="none">
+            <a:noAutofit/>
+          </a:bodyPr>
+          <a:lstStyle/>
+          <a:p>
+            <a:r>
+              <a:rPr sz="3227" dirty="0" err="1">
+                <a:latin typeface="华康少女文字W5(P)"/>
+              </a:rPr>
+              <a:t>不讲道理已经到了</a:t>
+            </a:r>
+            <a:endParaRPr sz="3227" dirty="0">
+              <a:latin typeface="华康少女文字W5(P)"/>
+            </a:endParaRPr>
+          </a:p>
+        </p:txBody>
+      </p:sp>
+      <p:sp>
+        <p:nvSpPr>
+          <p:cNvPr id="18" name="TextBox 5">
+            <a:extLst>
+              <a:ext uri="{FF2B5EF4-FFF2-40B4-BE49-F238E27FC236}">
+                <a16:creationId xmlns:a16="http://schemas.microsoft.com/office/drawing/2014/main" id="{5B71AF67-A200-3728-0A40-4CCDDCE27B44}"/>
+              </a:ext>
+            </a:extLst>
+          </p:cNvPr>
+          <p:cNvSpPr txBox="1"/>
+          <p:nvPr/>
+        </p:nvSpPr>
+        <p:spPr>
+          <a:xfrm rot="16200000">
+            <a:off x="-4275663" y="2748754"/>
+            <a:ext cx="5760000" cy="487365"/>
+          </a:xfrm>
+          <a:prstGeom prst="rect">
+            <a:avLst/>
+          </a:prstGeom>
+          <a:noFill/>
+        </p:spPr>
+        <p:txBody>
+          <a:bodyPr wrap="none">
+            <a:noAutofit/>
+          </a:bodyPr>
+          <a:lstStyle/>
+          <a:p>
+            <a:r>
+              <a:rPr sz="2646" dirty="0" err="1">
+                <a:latin typeface="华康少女文字W5(P)"/>
+              </a:rPr>
+              <a:t>我们家里那个</a:t>
+            </a:r>
+            <a:endParaRPr sz="2646" dirty="0">
+              <a:latin typeface="华康少女文字W5(P)"/>
+            </a:endParaRPr>
+          </a:p>
+        </p:txBody>
+      </p:sp>
+      <p:sp>
+        <p:nvSpPr>
+          <p:cNvPr id="19" name="TextBox 3">
+            <a:extLst>
+              <a:ext uri="{FF2B5EF4-FFF2-40B4-BE49-F238E27FC236}">
+                <a16:creationId xmlns:a16="http://schemas.microsoft.com/office/drawing/2014/main" id="{4853C02E-44FE-12AD-7032-9730824FF076}"/>
+              </a:ext>
+            </a:extLst>
+          </p:cNvPr>
+          <p:cNvSpPr txBox="1"/>
+          <p:nvPr/>
+        </p:nvSpPr>
+        <p:spPr>
+          <a:xfrm>
+            <a:off x="-3893059" y="2910477"/>
+            <a:ext cx="5760000" cy="883920"/>
+          </a:xfrm>
+          <a:prstGeom prst="rect">
+            <a:avLst/>
+          </a:prstGeom>
+          <a:noFill/>
+        </p:spPr>
+        <p:txBody>
+          <a:bodyPr wrap="none">
+            <a:noAutofit/>
+          </a:bodyPr>
           <a:lstStyle/>
           <a:p>
             <a:r>
               <a:rPr sz="4400" dirty="0" err="1">
                 <a:latin typeface="华康少女文字W5(P)"/>
               </a:rPr>
-              <a:t>不讲道理已经到了</a:t>
+              <a:t>谁占上风</a:t>
             </a:r>
             <a:endParaRPr sz="4400" dirty="0">
               <a:latin typeface="华康少女文字W5(P)"/>
@@ -4406,10 +4360,10 @@
       </p:sp>
       <p:sp>
         <p:nvSpPr>
-          <p:cNvPr id="14" name="TextBox 11">
+          <p:cNvPr id="20" name="TextBox 4">
             <a:extLst>
               <a:ext uri="{FF2B5EF4-FFF2-40B4-BE49-F238E27FC236}">
-                <a16:creationId xmlns:a16="http://schemas.microsoft.com/office/drawing/2014/main" id="{39D81B80-7116-A54F-32C0-2A367317641F}"/>
+                <a16:creationId xmlns:a16="http://schemas.microsoft.com/office/drawing/2014/main" id="{035C6DBF-2813-9242-573A-7035CD5637B2}"/>
               </a:ext>
             </a:extLst>
           </p:cNvPr>
@@ -4417,112 +4371,29 @@
           <p:nvPr/>
         </p:nvSpPr>
         <p:spPr>
-          <a:xfrm rot="16200000">
-            <a:off x="-3000826" y="3337411"/>
-            <a:ext cx="5029200" cy="711200"/>
-          </a:xfrm>
-          <a:prstGeom prst="rect">
-            <a:avLst/>
-          </a:prstGeom>
-          <a:noFill/>
-        </p:spPr>
-        <p:txBody>
-          <a:bodyPr wrap="square"/>
-          <a:lstStyle/>
-          <a:p>
-            <a:r>
-              <a:rPr sz="5900" dirty="0" err="1">
-                <a:solidFill>
-                  <a:srgbClr val="FF0000"/>
-                </a:solidFill>
-                <a:latin typeface="华康少女文字W5(P)"/>
-              </a:rPr>
-              <a:t>最高</a:t>
-            </a:r>
-            <a:r>
-              <a:rPr sz="5900" dirty="0" err="1">
-                <a:latin typeface="华康少女文字W5(P)"/>
-              </a:rPr>
-              <a:t>的境界了</a:t>
-            </a:r>
-            <a:endParaRPr sz="5900" dirty="0">
-              <a:latin typeface="华康少女文字W5(P)"/>
-            </a:endParaRPr>
-          </a:p>
-        </p:txBody>
-      </p:sp>
-      <p:sp>
-        <p:nvSpPr>
-          <p:cNvPr id="19" name="TextBox 8">
-            <a:extLst>
-              <a:ext uri="{FF2B5EF4-FFF2-40B4-BE49-F238E27FC236}">
-                <a16:creationId xmlns:a16="http://schemas.microsoft.com/office/drawing/2014/main" id="{206FCA18-68FD-6A0F-40B0-6C8FB2BBFF97}"/>
-              </a:ext>
-            </a:extLst>
-          </p:cNvPr>
-          <p:cNvSpPr txBox="1"/>
-          <p:nvPr/>
-        </p:nvSpPr>
-        <p:spPr>
-          <a:xfrm>
-            <a:off x="-6893884" y="220337"/>
-            <a:ext cx="7260127" cy="892762"/>
-          </a:xfrm>
-          <a:prstGeom prst="rect">
-            <a:avLst/>
-          </a:prstGeom>
-          <a:noFill/>
-        </p:spPr>
-        <p:txBody>
-          <a:bodyPr wrap="square"/>
-          <a:lstStyle/>
-          <a:p>
-            <a:r>
-              <a:rPr sz="8800" dirty="0" err="1">
-                <a:latin typeface="华康少女文字W5(P)"/>
-              </a:rPr>
-              <a:t>谁占上风</a:t>
-            </a:r>
-            <a:endParaRPr sz="8800" dirty="0">
-              <a:latin typeface="华康少女文字W5(P)"/>
-            </a:endParaRPr>
-          </a:p>
-        </p:txBody>
-      </p:sp>
-      <p:sp>
-        <p:nvSpPr>
-          <p:cNvPr id="20" name="TextBox 7">
-            <a:extLst>
-              <a:ext uri="{FF2B5EF4-FFF2-40B4-BE49-F238E27FC236}">
-                <a16:creationId xmlns:a16="http://schemas.microsoft.com/office/drawing/2014/main" id="{6CD386AA-2B3B-B574-9241-340CE091978E}"/>
-              </a:ext>
-            </a:extLst>
-          </p:cNvPr>
-          <p:cNvSpPr txBox="1"/>
-          <p:nvPr/>
-        </p:nvSpPr>
-        <p:spPr>
-          <a:xfrm>
-            <a:off x="-6893884" y="-1255451"/>
-            <a:ext cx="7260127" cy="892762"/>
-          </a:xfrm>
-          <a:prstGeom prst="rect">
-            <a:avLst/>
-          </a:prstGeom>
-          <a:noFill/>
-        </p:spPr>
-        <p:txBody>
-          <a:bodyPr wrap="square"/>
-          <a:lstStyle/>
-          <a:p>
-            <a:r>
-              <a:rPr sz="8000" dirty="0" err="1">
+          <a:xfrm>
+            <a:off x="-3893059" y="2185663"/>
+            <a:ext cx="5760000" cy="724814"/>
+          </a:xfrm>
+          <a:prstGeom prst="rect">
+            <a:avLst/>
+          </a:prstGeom>
+          <a:noFill/>
+        </p:spPr>
+        <p:txBody>
+          <a:bodyPr wrap="none">
+            <a:noAutofit/>
+          </a:bodyPr>
+          <a:lstStyle/>
+          <a:p>
+            <a:r>
+              <a:rPr sz="3600" dirty="0" err="1">
                 <a:latin typeface="华康少女文字W5(P)"/>
               </a:rPr>
               <a:t>谁</a:t>
             </a:r>
             <a:r>
-              <a:rPr sz="8000" dirty="0" err="1">
+              <a:rPr sz="3600" dirty="0" err="1">
                 <a:solidFill>
                   <a:srgbClr val="FF0000"/>
                 </a:solidFill>
@@ -4530,7 +4401,7 @@
               </a:rPr>
               <a:t>不讲道理</a:t>
             </a:r>
-            <a:endParaRPr sz="8000" dirty="0">
+            <a:endParaRPr sz="3600" dirty="0">
               <a:solidFill>
                 <a:srgbClr val="FF0000"/>
               </a:solidFill>
@@ -4541,10 +4412,10 @@
       </p:sp>
       <p:sp>
         <p:nvSpPr>
-          <p:cNvPr id="21" name="TextBox 6">
+          <p:cNvPr id="21" name="TextBox 5">
             <a:extLst>
               <a:ext uri="{FF2B5EF4-FFF2-40B4-BE49-F238E27FC236}">
-                <a16:creationId xmlns:a16="http://schemas.microsoft.com/office/drawing/2014/main" id="{184CBF94-8D21-6CF5-F913-21A44B93F8FC}"/>
+                <a16:creationId xmlns:a16="http://schemas.microsoft.com/office/drawing/2014/main" id="{540D4A1E-AEA3-6FBD-7DD8-1416A4D3AC82}"/>
               </a:ext>
             </a:extLst>
           </p:cNvPr>
@@ -4553,25 +4424,27 @@
         </p:nvSpPr>
         <p:spPr>
           <a:xfrm>
-            <a:off x="-6893884" y="-2772229"/>
-            <a:ext cx="7260127" cy="892762"/>
-          </a:xfrm>
-          <a:prstGeom prst="rect">
-            <a:avLst/>
-          </a:prstGeom>
-          <a:noFill/>
-        </p:spPr>
-        <p:txBody>
-          <a:bodyPr wrap="square"/>
-          <a:lstStyle/>
-          <a:p>
-            <a:r>
-              <a:rPr sz="8000" dirty="0" err="1">
+            <a:off x="-3898231" y="1591316"/>
+            <a:ext cx="5760000" cy="594347"/>
+          </a:xfrm>
+          <a:prstGeom prst="rect">
+            <a:avLst/>
+          </a:prstGeom>
+          <a:noFill/>
+        </p:spPr>
+        <p:txBody>
+          <a:bodyPr wrap="none">
+            <a:noAutofit/>
+          </a:bodyPr>
+          <a:lstStyle/>
+          <a:p>
+            <a:r>
+              <a:rPr sz="3200" dirty="0" err="1">
                 <a:latin typeface="华康少女文字W5(P)"/>
               </a:rPr>
               <a:t>结婚之后嘛</a:t>
             </a:r>
-            <a:endParaRPr sz="8000" dirty="0">
+            <a:endParaRPr sz="3200" dirty="0">
               <a:latin typeface="华康少女文字W5(P)"/>
             </a:endParaRPr>
           </a:p>
@@ -4582,43 +4455,6 @@
   <p:clrMapOvr>
     <a:masterClrMapping/>
   </p:clrMapOvr>
-  <p:transition advTm="17760"/>
-  <p:timing>
-    <p:tnLst>
-      <p:par>
-        <p:cTn id="1" dur="indefinite" restart="never" nodeType="tmRoot">
-          <p:stCondLst>
-            <p:cond delay="0"/>
-          </p:stCondLst>
-          <p:childTnLst>
-            <p:par>
-              <p:cTn id="2" fill="hold">
-                <p:stCondLst>
-                  <p:cond delay="0"/>
-                </p:stCondLst>
-                <p:childTnLst>
-                  <p:par>
-                    <p:cTn id="3" dur="500" fill="hold">
-                      <p:childTnLst>
-                        <p:animEffect transition="in">
-                          <p:cBhvr>
-                            <p:cTn id="4" dur="500"/>
-                            <p:tgtEl>
-                              <p:spTgt spid="10"/>
-                            </p:tgtEl>
-                          </p:cBhvr>
-                        </p:animEffect>
-                      </p:childTnLst>
-                    </p:cTn>
-                  </p:par>
-                </p:childTnLst>
-              </p:cTn>
-            </p:par>
-          </p:childTnLst>
-        </p:cTn>
-      </p:par>
-    </p:tnLst>
-  </p:timing>
 </p:sld>
 </file>
 
@@ -4641,7 +4477,7 @@
       </p:grpSpPr>
       <p:pic>
         <p:nvPicPr>
-          <p:cNvPr id="2" name="Picture 1"/>
+          <p:cNvPr id="2" name="Picture 1" descr="image.jpg"/>
           <p:cNvPicPr>
             <a:picLocks noChangeAspect="1"/>
           </p:cNvPicPr>
@@ -4649,13 +4485,14 @@
         </p:nvPicPr>
         <p:blipFill>
           <a:blip r:embed="rId2"/>
-          <a:srcRect/>
-          <a:stretch/>
+          <a:stretch>
+            <a:fillRect/>
+          </a:stretch>
         </p:blipFill>
         <p:spPr>
           <a:xfrm>
-            <a:off x="86" y="0"/>
-            <a:ext cx="6857828" cy="12191695"/>
+            <a:off x="0" y="0"/>
+            <a:ext cx="6858000" cy="12193200"/>
           </a:xfrm>
           <a:prstGeom prst="rect">
             <a:avLst/>
@@ -4664,32 +4501,33 @@
       </p:pic>
       <p:sp>
         <p:nvSpPr>
-          <p:cNvPr id="11" name="TextBox 10"/>
-          <p:cNvSpPr txBox="1"/>
-          <p:nvPr/>
-        </p:nvSpPr>
-        <p:spPr>
-          <a:xfrm>
-            <a:off x="914400" y="5852013"/>
-            <a:ext cx="5029200" cy="711200"/>
-          </a:xfrm>
-          <a:prstGeom prst="rect">
-            <a:avLst/>
-          </a:prstGeom>
-          <a:noFill/>
-        </p:spPr>
-        <p:txBody>
-          <a:bodyPr wrap="square"/>
-          <a:lstStyle/>
-          <a:p>
-            <a:pPr algn="ctr"/>
-            <a:r>
-              <a:rPr sz="3900" dirty="0" err="1">
+          <p:cNvPr id="3" name="TextBox 2"/>
+          <p:cNvSpPr txBox="1"/>
+          <p:nvPr/>
+        </p:nvSpPr>
+        <p:spPr>
+          <a:xfrm>
+            <a:off x="914400" y="5682479"/>
+            <a:ext cx="5760000" cy="883920"/>
+          </a:xfrm>
+          <a:prstGeom prst="rect">
+            <a:avLst/>
+          </a:prstGeom>
+          <a:noFill/>
+        </p:spPr>
+        <p:txBody>
+          <a:bodyPr wrap="none">
+            <a:noAutofit/>
+          </a:bodyPr>
+          <a:lstStyle/>
+          <a:p>
+            <a:r>
+              <a:rPr sz="4800" dirty="0" err="1">
                 <a:latin typeface="华康少女文字W5(P)"/>
               </a:rPr>
               <a:t>很忧郁的眼睛看着你</a:t>
             </a:r>
-            <a:endParaRPr sz="3900" dirty="0">
+            <a:endParaRPr sz="4800" dirty="0">
               <a:latin typeface="华康少女文字W5(P)"/>
             </a:endParaRPr>
           </a:p>
@@ -4697,10 +4535,44 @@
       </p:sp>
       <p:sp>
         <p:nvSpPr>
-          <p:cNvPr id="12" name="TextBox 9">
+          <p:cNvPr id="4" name="TextBox 3"/>
+          <p:cNvSpPr txBox="1"/>
+          <p:nvPr/>
+        </p:nvSpPr>
+        <p:spPr>
+          <a:xfrm>
+            <a:off x="914400" y="4831665"/>
+            <a:ext cx="5760000" cy="724814"/>
+          </a:xfrm>
+          <a:prstGeom prst="rect">
+            <a:avLst/>
+          </a:prstGeom>
+          <a:noFill/>
+        </p:spPr>
+        <p:txBody>
+          <a:bodyPr wrap="none">
+            <a:noAutofit/>
+          </a:bodyPr>
+          <a:lstStyle/>
+          <a:p>
+            <a:r>
+              <a:rPr sz="3936" dirty="0" err="1">
+                <a:latin typeface="华康少女文字W5(P)"/>
+              </a:rPr>
+              <a:t>他就是拿一双</a:t>
+            </a:r>
+            <a:endParaRPr sz="3936" dirty="0">
+              <a:latin typeface="华康少女文字W5(P)"/>
+            </a:endParaRPr>
+          </a:p>
+        </p:txBody>
+      </p:sp>
+      <p:sp>
+        <p:nvSpPr>
+          <p:cNvPr id="16" name="TextBox 2">
             <a:extLst>
               <a:ext uri="{FF2B5EF4-FFF2-40B4-BE49-F238E27FC236}">
-                <a16:creationId xmlns:a16="http://schemas.microsoft.com/office/drawing/2014/main" id="{27DB56AC-21FD-609A-4FBC-293D418C5292}"/>
+                <a16:creationId xmlns:a16="http://schemas.microsoft.com/office/drawing/2014/main" id="{B71A864B-3EA5-1F17-939B-B76D13C9B5EF}"/>
               </a:ext>
             </a:extLst>
           </p:cNvPr>
@@ -4708,37 +4580,36 @@
           <p:nvPr/>
         </p:nvSpPr>
         <p:spPr>
-          <a:xfrm>
-            <a:off x="914400" y="4774326"/>
-            <a:ext cx="6857828" cy="711200"/>
-          </a:xfrm>
-          <a:prstGeom prst="rect">
-            <a:avLst/>
-          </a:prstGeom>
-          <a:noFill/>
-        </p:spPr>
-        <p:txBody>
-          <a:bodyPr wrap="square"/>
-          <a:lstStyle/>
-          <a:p>
-            <a:r>
-              <a:rPr sz="6600" dirty="0" err="1">
-                <a:latin typeface="华康少女文字W5(P)"/>
-              </a:rPr>
-              <a:t>他就是拿一双</a:t>
-            </a:r>
-            <a:endParaRPr sz="6600" dirty="0">
-              <a:latin typeface="华康少女文字W5(P)"/>
-            </a:endParaRPr>
-          </a:p>
-        </p:txBody>
-      </p:sp>
-      <p:sp>
-        <p:nvSpPr>
-          <p:cNvPr id="13" name="TextBox 12">
+          <a:xfrm rot="16200000">
+            <a:off x="-2235680" y="1582916"/>
+            <a:ext cx="5760000" cy="883920"/>
+          </a:xfrm>
+          <a:prstGeom prst="rect">
+            <a:avLst/>
+          </a:prstGeom>
+          <a:noFill/>
+        </p:spPr>
+        <p:txBody>
+          <a:bodyPr wrap="none">
+            <a:noAutofit/>
+          </a:bodyPr>
+          <a:lstStyle/>
+          <a:p>
+            <a:r>
+              <a:rPr sz="4800">
+                <a:latin typeface="华康少女文字W5(P)"/>
+              </a:rPr>
+              <a:t>他连话都不讲</a:t>
+            </a:r>
+          </a:p>
+        </p:txBody>
+      </p:sp>
+      <p:sp>
+        <p:nvSpPr>
+          <p:cNvPr id="17" name="TextBox 3">
             <a:extLst>
               <a:ext uri="{FF2B5EF4-FFF2-40B4-BE49-F238E27FC236}">
-                <a16:creationId xmlns:a16="http://schemas.microsoft.com/office/drawing/2014/main" id="{5C23CFD1-CF2D-52F9-0419-BC3408124638}"/>
+                <a16:creationId xmlns:a16="http://schemas.microsoft.com/office/drawing/2014/main" id="{D76D6B28-0B49-51F4-BCDD-A4D8784A8E6C}"/>
               </a:ext>
             </a:extLst>
           </p:cNvPr>
@@ -4747,25 +4618,27 @@
         </p:nvSpPr>
         <p:spPr>
           <a:xfrm rot="16200000">
-            <a:off x="-3330549" y="1048261"/>
-            <a:ext cx="7229728" cy="933598"/>
-          </a:xfrm>
-          <a:prstGeom prst="rect">
-            <a:avLst/>
-          </a:prstGeom>
-          <a:noFill/>
-        </p:spPr>
-        <p:txBody>
-          <a:bodyPr wrap="square"/>
-          <a:lstStyle/>
-          <a:p>
-            <a:r>
-              <a:rPr sz="6600" dirty="0" err="1">
-                <a:latin typeface="华康少女文字W5(P)"/>
-              </a:rPr>
-              <a:t>他连话都不讲</a:t>
-            </a:r>
-            <a:endParaRPr sz="6600" dirty="0">
+            <a:off x="-3051162" y="1667505"/>
+            <a:ext cx="5760000" cy="724814"/>
+          </a:xfrm>
+          <a:prstGeom prst="rect">
+            <a:avLst/>
+          </a:prstGeom>
+          <a:noFill/>
+        </p:spPr>
+        <p:txBody>
+          <a:bodyPr wrap="none">
+            <a:noAutofit/>
+          </a:bodyPr>
+          <a:lstStyle/>
+          <a:p>
+            <a:r>
+              <a:rPr sz="3936" dirty="0" err="1">
+                <a:latin typeface="华康少女文字W5(P)"/>
+              </a:rPr>
+              <a:t>最高的境界了</a:t>
+            </a:r>
+            <a:endParaRPr sz="3936" dirty="0">
               <a:latin typeface="华康少女文字W5(P)"/>
             </a:endParaRPr>
           </a:p>
@@ -4773,10 +4646,10 @@
       </p:sp>
       <p:sp>
         <p:nvSpPr>
-          <p:cNvPr id="14" name="TextBox 9">
+          <p:cNvPr id="18" name="TextBox 4">
             <a:extLst>
               <a:ext uri="{FF2B5EF4-FFF2-40B4-BE49-F238E27FC236}">
-                <a16:creationId xmlns:a16="http://schemas.microsoft.com/office/drawing/2014/main" id="{0A8A75CD-F649-611E-DDBB-10F9CDF118AC}"/>
+                <a16:creationId xmlns:a16="http://schemas.microsoft.com/office/drawing/2014/main" id="{02BFE870-6293-3011-F4C3-478EBEB19C54}"/>
               </a:ext>
             </a:extLst>
           </p:cNvPr>
@@ -4785,25 +4658,27 @@
         </p:nvSpPr>
         <p:spPr>
           <a:xfrm rot="16200000">
-            <a:off x="-6707693" y="1048261"/>
-            <a:ext cx="7229728" cy="933598"/>
-          </a:xfrm>
-          <a:prstGeom prst="rect">
-            <a:avLst/>
-          </a:prstGeom>
-          <a:noFill/>
-        </p:spPr>
-        <p:txBody>
-          <a:bodyPr wrap="square"/>
-          <a:lstStyle/>
-          <a:p>
-            <a:r>
-              <a:rPr sz="6600" dirty="0" err="1">
-                <a:latin typeface="华康少女文字W5(P)"/>
-              </a:rPr>
-              <a:t>我们家里那个</a:t>
-            </a:r>
-            <a:endParaRPr sz="6600" dirty="0">
+            <a:off x="-3710743" y="1732739"/>
+            <a:ext cx="5760000" cy="594347"/>
+          </a:xfrm>
+          <a:prstGeom prst="rect">
+            <a:avLst/>
+          </a:prstGeom>
+          <a:noFill/>
+        </p:spPr>
+        <p:txBody>
+          <a:bodyPr wrap="none">
+            <a:noAutofit/>
+          </a:bodyPr>
+          <a:lstStyle/>
+          <a:p>
+            <a:r>
+              <a:rPr sz="3227" dirty="0" err="1">
+                <a:latin typeface="华康少女文字W5(P)"/>
+              </a:rPr>
+              <a:t>不讲道理已经到了</a:t>
+            </a:r>
+            <a:endParaRPr sz="3227" dirty="0">
               <a:latin typeface="华康少女文字W5(P)"/>
             </a:endParaRPr>
           </a:p>
@@ -4811,10 +4686,10 @@
       </p:sp>
       <p:sp>
         <p:nvSpPr>
-          <p:cNvPr id="15" name="TextBox 10">
+          <p:cNvPr id="19" name="TextBox 5">
             <a:extLst>
               <a:ext uri="{FF2B5EF4-FFF2-40B4-BE49-F238E27FC236}">
-                <a16:creationId xmlns:a16="http://schemas.microsoft.com/office/drawing/2014/main" id="{5258BC9F-BBF8-A5A3-F9E8-63758BBC1EE4}"/>
+                <a16:creationId xmlns:a16="http://schemas.microsoft.com/office/drawing/2014/main" id="{11281BB2-6C68-3747-FCD4-0A490465A292}"/>
               </a:ext>
             </a:extLst>
           </p:cNvPr>
@@ -4823,25 +4698,27 @@
         </p:nvSpPr>
         <p:spPr>
           <a:xfrm rot="16200000">
-            <a:off x="-5554984" y="1048261"/>
-            <a:ext cx="7229728" cy="933598"/>
-          </a:xfrm>
-          <a:prstGeom prst="rect">
-            <a:avLst/>
-          </a:prstGeom>
-          <a:noFill/>
-        </p:spPr>
-        <p:txBody>
-          <a:bodyPr wrap="square"/>
-          <a:lstStyle/>
-          <a:p>
-            <a:r>
-              <a:rPr sz="5400" dirty="0" err="1">
-                <a:latin typeface="华康少女文字W5(P)"/>
-              </a:rPr>
-              <a:t>不讲道理已经到了</a:t>
-            </a:r>
-            <a:endParaRPr sz="5400" dirty="0">
+            <a:off x="-4251600" y="1786230"/>
+            <a:ext cx="5760000" cy="487365"/>
+          </a:xfrm>
+          <a:prstGeom prst="rect">
+            <a:avLst/>
+          </a:prstGeom>
+          <a:noFill/>
+        </p:spPr>
+        <p:txBody>
+          <a:bodyPr wrap="none">
+            <a:noAutofit/>
+          </a:bodyPr>
+          <a:lstStyle/>
+          <a:p>
+            <a:r>
+              <a:rPr sz="2646" dirty="0" err="1">
+                <a:latin typeface="华康少女文字W5(P)"/>
+              </a:rPr>
+              <a:t>我们家里那个</a:t>
+            </a:r>
+            <a:endParaRPr sz="2646" dirty="0">
               <a:latin typeface="华康少女文字W5(P)"/>
             </a:endParaRPr>
           </a:p>
@@ -4849,10 +4726,10 @@
       </p:sp>
       <p:sp>
         <p:nvSpPr>
-          <p:cNvPr id="16" name="TextBox 11">
+          <p:cNvPr id="20" name="TextBox 3">
             <a:extLst>
               <a:ext uri="{FF2B5EF4-FFF2-40B4-BE49-F238E27FC236}">
-                <a16:creationId xmlns:a16="http://schemas.microsoft.com/office/drawing/2014/main" id="{1FDC14CE-32BE-62EA-FD00-4C6B8D28235A}"/>
+                <a16:creationId xmlns:a16="http://schemas.microsoft.com/office/drawing/2014/main" id="{81C34876-8C67-031E-2240-0A2352ABE1FC}"/>
               </a:ext>
             </a:extLst>
           </p:cNvPr>
@@ -4860,35 +4737,28 @@
           <p:nvPr/>
         </p:nvSpPr>
         <p:spPr>
-          <a:xfrm rot="16200000">
-            <a:off x="-4488016" y="1048261"/>
-            <a:ext cx="7229728" cy="933598"/>
-          </a:xfrm>
-          <a:prstGeom prst="rect">
-            <a:avLst/>
-          </a:prstGeom>
-          <a:noFill/>
-        </p:spPr>
-        <p:txBody>
-          <a:bodyPr wrap="square"/>
-          <a:lstStyle/>
-          <a:p>
-            <a:r>
-              <a:rPr sz="6600" dirty="0" err="1">
-                <a:solidFill>
-                  <a:srgbClr val="FF0000"/>
-                </a:solidFill>
-                <a:latin typeface="华康少女文字W5(P)"/>
-              </a:rPr>
-              <a:t>最高</a:t>
-            </a:r>
-            <a:r>
-              <a:rPr sz="6600" dirty="0" err="1">
-                <a:latin typeface="华康少女文字W5(P)"/>
-              </a:rPr>
-              <a:t>的境界了</a:t>
-            </a:r>
-            <a:endParaRPr sz="6600" dirty="0">
+          <a:xfrm>
+            <a:off x="-3868996" y="1947953"/>
+            <a:ext cx="5760000" cy="883920"/>
+          </a:xfrm>
+          <a:prstGeom prst="rect">
+            <a:avLst/>
+          </a:prstGeom>
+          <a:noFill/>
+        </p:spPr>
+        <p:txBody>
+          <a:bodyPr wrap="none">
+            <a:noAutofit/>
+          </a:bodyPr>
+          <a:lstStyle/>
+          <a:p>
+            <a:r>
+              <a:rPr sz="4400" dirty="0" err="1">
+                <a:latin typeface="华康少女文字W5(P)"/>
+              </a:rPr>
+              <a:t>谁占上风</a:t>
+            </a:r>
+            <a:endParaRPr sz="4400" dirty="0">
               <a:latin typeface="华康少女文字W5(P)"/>
             </a:endParaRPr>
           </a:p>
@@ -4896,10 +4766,10 @@
       </p:sp>
       <p:sp>
         <p:nvSpPr>
-          <p:cNvPr id="17" name="TextBox 8">
+          <p:cNvPr id="21" name="TextBox 4">
             <a:extLst>
               <a:ext uri="{FF2B5EF4-FFF2-40B4-BE49-F238E27FC236}">
-                <a16:creationId xmlns:a16="http://schemas.microsoft.com/office/drawing/2014/main" id="{1D031196-09B4-2FA6-09CE-1D125B7C796B}"/>
+                <a16:creationId xmlns:a16="http://schemas.microsoft.com/office/drawing/2014/main" id="{825F07D2-C978-3DD8-E68D-7C0A1D406481}"/>
               </a:ext>
             </a:extLst>
           </p:cNvPr>
@@ -4908,64 +4778,28 @@
         </p:nvSpPr>
         <p:spPr>
           <a:xfrm>
-            <a:off x="-9281604" y="-1779142"/>
-            <a:ext cx="7808284" cy="892762"/>
-          </a:xfrm>
-          <a:prstGeom prst="rect">
-            <a:avLst/>
-          </a:prstGeom>
-          <a:noFill/>
-        </p:spPr>
-        <p:txBody>
-          <a:bodyPr wrap="square"/>
-          <a:lstStyle/>
-          <a:p>
-            <a:r>
-              <a:rPr sz="11500" dirty="0" err="1">
-                <a:latin typeface="华康少女文字W5(P)"/>
-              </a:rPr>
-              <a:t>谁占上风</a:t>
-            </a:r>
-            <a:endParaRPr sz="11500" dirty="0">
-              <a:latin typeface="华康少女文字W5(P)"/>
-            </a:endParaRPr>
-          </a:p>
-        </p:txBody>
-      </p:sp>
-      <p:sp>
-        <p:nvSpPr>
-          <p:cNvPr id="18" name="TextBox 7">
-            <a:extLst>
-              <a:ext uri="{FF2B5EF4-FFF2-40B4-BE49-F238E27FC236}">
-                <a16:creationId xmlns:a16="http://schemas.microsoft.com/office/drawing/2014/main" id="{5B26734A-29A0-CCD6-DB8C-8DBFB745180F}"/>
-              </a:ext>
-            </a:extLst>
-          </p:cNvPr>
-          <p:cNvSpPr txBox="1"/>
-          <p:nvPr/>
-        </p:nvSpPr>
-        <p:spPr>
-          <a:xfrm>
-            <a:off x="-9281604" y="-3254930"/>
-            <a:ext cx="7808284" cy="892762"/>
-          </a:xfrm>
-          <a:prstGeom prst="rect">
-            <a:avLst/>
-          </a:prstGeom>
-          <a:noFill/>
-        </p:spPr>
-        <p:txBody>
-          <a:bodyPr wrap="square"/>
-          <a:lstStyle/>
-          <a:p>
-            <a:r>
-              <a:rPr sz="9600" dirty="0" err="1">
+            <a:off x="-3868996" y="1223139"/>
+            <a:ext cx="5760000" cy="724814"/>
+          </a:xfrm>
+          <a:prstGeom prst="rect">
+            <a:avLst/>
+          </a:prstGeom>
+          <a:noFill/>
+        </p:spPr>
+        <p:txBody>
+          <a:bodyPr wrap="none">
+            <a:noAutofit/>
+          </a:bodyPr>
+          <a:lstStyle/>
+          <a:p>
+            <a:r>
+              <a:rPr sz="3600" dirty="0" err="1">
                 <a:latin typeface="华康少女文字W5(P)"/>
               </a:rPr>
               <a:t>谁</a:t>
             </a:r>
             <a:r>
-              <a:rPr sz="9600" dirty="0" err="1">
+              <a:rPr sz="3600" dirty="0" err="1">
                 <a:solidFill>
                   <a:srgbClr val="FF0000"/>
                 </a:solidFill>
@@ -4973,7 +4807,7 @@
               </a:rPr>
               <a:t>不讲道理</a:t>
             </a:r>
-            <a:endParaRPr sz="9600" dirty="0">
+            <a:endParaRPr sz="3600" dirty="0">
               <a:solidFill>
                 <a:srgbClr val="FF0000"/>
               </a:solidFill>
@@ -4984,10 +4818,10 @@
       </p:sp>
       <p:sp>
         <p:nvSpPr>
-          <p:cNvPr id="19" name="TextBox 6">
+          <p:cNvPr id="22" name="TextBox 5">
             <a:extLst>
               <a:ext uri="{FF2B5EF4-FFF2-40B4-BE49-F238E27FC236}">
-                <a16:creationId xmlns:a16="http://schemas.microsoft.com/office/drawing/2014/main" id="{7B06DDD0-65E3-3EC7-613D-5514703B4099}"/>
+                <a16:creationId xmlns:a16="http://schemas.microsoft.com/office/drawing/2014/main" id="{67C49F96-F95C-6C74-9FEA-D9997BE059FE}"/>
               </a:ext>
             </a:extLst>
           </p:cNvPr>
@@ -4996,25 +4830,27 @@
         </p:nvSpPr>
         <p:spPr>
           <a:xfrm>
-            <a:off x="-9281604" y="-4771708"/>
-            <a:ext cx="7808284" cy="892762"/>
-          </a:xfrm>
-          <a:prstGeom prst="rect">
-            <a:avLst/>
-          </a:prstGeom>
-          <a:noFill/>
-        </p:spPr>
-        <p:txBody>
-          <a:bodyPr wrap="square"/>
-          <a:lstStyle/>
-          <a:p>
-            <a:r>
-              <a:rPr sz="9600" dirty="0" err="1">
+            <a:off x="-3874168" y="628792"/>
+            <a:ext cx="5760000" cy="594347"/>
+          </a:xfrm>
+          <a:prstGeom prst="rect">
+            <a:avLst/>
+          </a:prstGeom>
+          <a:noFill/>
+        </p:spPr>
+        <p:txBody>
+          <a:bodyPr wrap="none">
+            <a:noAutofit/>
+          </a:bodyPr>
+          <a:lstStyle/>
+          <a:p>
+            <a:r>
+              <a:rPr sz="3200" dirty="0" err="1">
                 <a:latin typeface="华康少女文字W5(P)"/>
               </a:rPr>
               <a:t>结婚之后嘛</a:t>
             </a:r>
-            <a:endParaRPr sz="9600" dirty="0">
+            <a:endParaRPr sz="3200" dirty="0">
               <a:latin typeface="华康少女文字W5(P)"/>
             </a:endParaRPr>
           </a:p>
@@ -5025,43 +4861,6 @@
   <p:clrMapOvr>
     <a:masterClrMapping/>
   </p:clrMapOvr>
-  <p:transition advTm="20160"/>
-  <p:timing>
-    <p:tnLst>
-      <p:par>
-        <p:cTn id="1" dur="indefinite" restart="never" nodeType="tmRoot">
-          <p:stCondLst>
-            <p:cond delay="0"/>
-          </p:stCondLst>
-          <p:childTnLst>
-            <p:par>
-              <p:cTn id="2" fill="hold">
-                <p:stCondLst>
-                  <p:cond delay="0"/>
-                </p:stCondLst>
-                <p:childTnLst>
-                  <p:par>
-                    <p:cTn id="3" dur="500" fill="hold">
-                      <p:childTnLst>
-                        <p:animEffect transition="in">
-                          <p:cBhvr>
-                            <p:cTn id="4" dur="500"/>
-                            <p:tgtEl>
-                              <p:spTgt spid="11"/>
-                            </p:tgtEl>
-                          </p:cBhvr>
-                        </p:animEffect>
-                      </p:childTnLst>
-                    </p:cTn>
-                  </p:par>
-                </p:childTnLst>
-              </p:cTn>
-            </p:par>
-          </p:childTnLst>
-        </p:cTn>
-      </p:par>
-    </p:tnLst>
-  </p:timing>
 </p:sld>
 </file>
 
@@ -5084,7 +4883,7 @@
       </p:grpSpPr>
       <p:pic>
         <p:nvPicPr>
-          <p:cNvPr id="2" name="Picture 1"/>
+          <p:cNvPr id="2" name="Picture 1" descr="image.jpg"/>
           <p:cNvPicPr>
             <a:picLocks noChangeAspect="1"/>
           </p:cNvPicPr>
@@ -5092,13 +4891,14 @@
         </p:nvPicPr>
         <p:blipFill>
           <a:blip r:embed="rId2"/>
-          <a:srcRect/>
-          <a:stretch/>
+          <a:stretch>
+            <a:fillRect/>
+          </a:stretch>
         </p:blipFill>
         <p:spPr>
           <a:xfrm>
-            <a:off x="86" y="0"/>
-            <a:ext cx="6857828" cy="12191695"/>
+            <a:off x="0" y="0"/>
+            <a:ext cx="6858000" cy="12193200"/>
           </a:xfrm>
           <a:prstGeom prst="rect">
             <a:avLst/>
@@ -5107,33 +4907,34 @@
       </p:pic>
       <p:sp>
         <p:nvSpPr>
-          <p:cNvPr id="12" name="TextBox 11"/>
-          <p:cNvSpPr txBox="1"/>
-          <p:nvPr/>
-        </p:nvSpPr>
-        <p:spPr>
-          <a:xfrm>
-            <a:off x="914400" y="5852013"/>
-            <a:ext cx="5029200" cy="711200"/>
-          </a:xfrm>
-          <a:prstGeom prst="rect">
-            <a:avLst/>
-          </a:prstGeom>
-          <a:noFill/>
-        </p:spPr>
-        <p:txBody>
-          <a:bodyPr wrap="square"/>
-          <a:lstStyle/>
-          <a:p>
-            <a:pPr algn="ctr"/>
-            <a:r>
-              <a:rPr sz="3900" dirty="0" err="1">
+          <p:cNvPr id="3" name="TextBox 2"/>
+          <p:cNvSpPr txBox="1"/>
+          <p:nvPr/>
+        </p:nvSpPr>
+        <p:spPr>
+          <a:xfrm>
+            <a:off x="914400" y="5682479"/>
+            <a:ext cx="5760000" cy="883920"/>
+          </a:xfrm>
+          <a:prstGeom prst="rect">
+            <a:avLst/>
+          </a:prstGeom>
+          <a:noFill/>
+        </p:spPr>
+        <p:txBody>
+          <a:bodyPr wrap="none">
+            <a:noAutofit/>
+          </a:bodyPr>
+          <a:lstStyle/>
+          <a:p>
+            <a:r>
+              <a:rPr sz="4800" dirty="0" err="1">
                 <a:latin typeface="华康少女文字W5(P)"/>
               </a:rPr>
               <a:t>直到你煮一碗</a:t>
             </a:r>
             <a:r>
-              <a:rPr sz="5400" b="1" dirty="0" err="1">
+              <a:rPr sz="6600" dirty="0" err="1">
                 <a:solidFill>
                   <a:schemeClr val="accent6">
                     <a:lumMod val="75000"/>
@@ -5144,12 +4945,12 @@
               <a:t>面</a:t>
             </a:r>
             <a:r>
-              <a:rPr sz="3900" dirty="0" err="1">
+              <a:rPr sz="4800" dirty="0" err="1">
                 <a:latin typeface="华康少女文字W5(P)"/>
               </a:rPr>
               <a:t>给他</a:t>
             </a:r>
-            <a:endParaRPr sz="3900" dirty="0">
+            <a:endParaRPr sz="4800" dirty="0">
               <a:latin typeface="华康少女文字W5(P)"/>
             </a:endParaRPr>
           </a:p>
@@ -5157,10 +4958,78 @@
       </p:sp>
       <p:sp>
         <p:nvSpPr>
-          <p:cNvPr id="13" name="TextBox 10">
+          <p:cNvPr id="4" name="TextBox 3"/>
+          <p:cNvSpPr txBox="1"/>
+          <p:nvPr/>
+        </p:nvSpPr>
+        <p:spPr>
+          <a:xfrm>
+            <a:off x="914400" y="4831665"/>
+            <a:ext cx="5760000" cy="724814"/>
+          </a:xfrm>
+          <a:prstGeom prst="rect">
+            <a:avLst/>
+          </a:prstGeom>
+          <a:noFill/>
+        </p:spPr>
+        <p:txBody>
+          <a:bodyPr wrap="none">
+            <a:noAutofit/>
+          </a:bodyPr>
+          <a:lstStyle/>
+          <a:p>
+            <a:r>
+              <a:rPr sz="3936" dirty="0" err="1">
+                <a:latin typeface="华康少女文字W5(P)"/>
+              </a:rPr>
+              <a:t>很忧郁的眼睛看着你</a:t>
+            </a:r>
+            <a:endParaRPr sz="3936" dirty="0">
+              <a:latin typeface="华康少女文字W5(P)"/>
+            </a:endParaRPr>
+          </a:p>
+        </p:txBody>
+      </p:sp>
+      <p:sp>
+        <p:nvSpPr>
+          <p:cNvPr id="5" name="TextBox 4"/>
+          <p:cNvSpPr txBox="1"/>
+          <p:nvPr/>
+        </p:nvSpPr>
+        <p:spPr>
+          <a:xfrm>
+            <a:off x="914400" y="4111317"/>
+            <a:ext cx="5760000" cy="594347"/>
+          </a:xfrm>
+          <a:prstGeom prst="rect">
+            <a:avLst/>
+          </a:prstGeom>
+          <a:noFill/>
+        </p:spPr>
+        <p:txBody>
+          <a:bodyPr wrap="none">
+            <a:noAutofit/>
+          </a:bodyPr>
+          <a:lstStyle/>
+          <a:p>
+            <a:r>
+              <a:rPr sz="3227" dirty="0" err="1">
+                <a:latin typeface="华康少女文字W5(P)"/>
+              </a:rPr>
+              <a:t>他就是拿一双</a:t>
+            </a:r>
+            <a:endParaRPr sz="3227" dirty="0">
+              <a:latin typeface="华康少女文字W5(P)"/>
+            </a:endParaRPr>
+          </a:p>
+        </p:txBody>
+      </p:sp>
+      <p:sp>
+        <p:nvSpPr>
+          <p:cNvPr id="17" name="TextBox 2">
             <a:extLst>
               <a:ext uri="{FF2B5EF4-FFF2-40B4-BE49-F238E27FC236}">
-                <a16:creationId xmlns:a16="http://schemas.microsoft.com/office/drawing/2014/main" id="{E390DCBE-70E5-BD20-470E-4350D6C80FE0}"/>
+                <a16:creationId xmlns:a16="http://schemas.microsoft.com/office/drawing/2014/main" id="{51C658CC-5D9B-DC44-2294-BB2809E03D92}"/>
               </a:ext>
             </a:extLst>
           </p:cNvPr>
@@ -5168,38 +5037,36 @@
           <p:nvPr/>
         </p:nvSpPr>
         <p:spPr>
-          <a:xfrm>
-            <a:off x="914400" y="5068245"/>
-            <a:ext cx="5029200" cy="711200"/>
-          </a:xfrm>
-          <a:prstGeom prst="rect">
-            <a:avLst/>
-          </a:prstGeom>
-          <a:noFill/>
-        </p:spPr>
-        <p:txBody>
-          <a:bodyPr wrap="square"/>
-          <a:lstStyle/>
-          <a:p>
-            <a:pPr algn="ctr"/>
-            <a:r>
-              <a:rPr sz="3900" dirty="0" err="1">
-                <a:latin typeface="华康少女文字W5(P)"/>
-              </a:rPr>
-              <a:t>很忧郁的眼睛看着你</a:t>
-            </a:r>
-            <a:endParaRPr sz="3900" dirty="0">
-              <a:latin typeface="华康少女文字W5(P)"/>
-            </a:endParaRPr>
-          </a:p>
-        </p:txBody>
-      </p:sp>
-      <p:sp>
-        <p:nvSpPr>
-          <p:cNvPr id="14" name="TextBox 9">
+          <a:xfrm rot="16200000">
+            <a:off x="-2235680" y="1029467"/>
+            <a:ext cx="5760000" cy="883920"/>
+          </a:xfrm>
+          <a:prstGeom prst="rect">
+            <a:avLst/>
+          </a:prstGeom>
+          <a:noFill/>
+        </p:spPr>
+        <p:txBody>
+          <a:bodyPr wrap="none">
+            <a:noAutofit/>
+          </a:bodyPr>
+          <a:lstStyle/>
+          <a:p>
+            <a:r>
+              <a:rPr sz="4800">
+                <a:latin typeface="华康少女文字W5(P)"/>
+              </a:rPr>
+              <a:t>他连话都不讲</a:t>
+            </a:r>
+          </a:p>
+        </p:txBody>
+      </p:sp>
+      <p:sp>
+        <p:nvSpPr>
+          <p:cNvPr id="18" name="TextBox 3">
             <a:extLst>
               <a:ext uri="{FF2B5EF4-FFF2-40B4-BE49-F238E27FC236}">
-                <a16:creationId xmlns:a16="http://schemas.microsoft.com/office/drawing/2014/main" id="{567014B1-5DFB-392E-3748-66AB44419E3B}"/>
+                <a16:creationId xmlns:a16="http://schemas.microsoft.com/office/drawing/2014/main" id="{69F340A6-06F7-05B9-1EDC-CC803C18D8B8}"/>
               </a:ext>
             </a:extLst>
           </p:cNvPr>
@@ -5207,26 +5074,28 @@
           <p:nvPr/>
         </p:nvSpPr>
         <p:spPr>
-          <a:xfrm>
-            <a:off x="914400" y="3990558"/>
-            <a:ext cx="6857828" cy="711200"/>
-          </a:xfrm>
-          <a:prstGeom prst="rect">
-            <a:avLst/>
-          </a:prstGeom>
-          <a:noFill/>
-        </p:spPr>
-        <p:txBody>
-          <a:bodyPr wrap="square"/>
-          <a:lstStyle/>
-          <a:p>
-            <a:r>
-              <a:rPr sz="6600" dirty="0" err="1">
-                <a:latin typeface="华康少女文字W5(P)"/>
-              </a:rPr>
-              <a:t>他就是拿一双</a:t>
-            </a:r>
-            <a:endParaRPr sz="6600" dirty="0">
+          <a:xfrm rot="16200000">
+            <a:off x="-3051162" y="1114056"/>
+            <a:ext cx="5760000" cy="724814"/>
+          </a:xfrm>
+          <a:prstGeom prst="rect">
+            <a:avLst/>
+          </a:prstGeom>
+          <a:noFill/>
+        </p:spPr>
+        <p:txBody>
+          <a:bodyPr wrap="none">
+            <a:noAutofit/>
+          </a:bodyPr>
+          <a:lstStyle/>
+          <a:p>
+            <a:r>
+              <a:rPr sz="3936" dirty="0" err="1">
+                <a:latin typeface="华康少女文字W5(P)"/>
+              </a:rPr>
+              <a:t>最高的境界了</a:t>
+            </a:r>
+            <a:endParaRPr sz="3936" dirty="0">
               <a:latin typeface="华康少女文字W5(P)"/>
             </a:endParaRPr>
           </a:p>
@@ -5234,10 +5103,10 @@
       </p:sp>
       <p:sp>
         <p:nvSpPr>
-          <p:cNvPr id="15" name="TextBox 12">
+          <p:cNvPr id="19" name="TextBox 4">
             <a:extLst>
               <a:ext uri="{FF2B5EF4-FFF2-40B4-BE49-F238E27FC236}">
-                <a16:creationId xmlns:a16="http://schemas.microsoft.com/office/drawing/2014/main" id="{312D469C-30C1-A6CD-34C2-5751BC33A0B0}"/>
+                <a16:creationId xmlns:a16="http://schemas.microsoft.com/office/drawing/2014/main" id="{50B28BFF-D4C7-7574-DF23-61A18DAE0C6E}"/>
               </a:ext>
             </a:extLst>
           </p:cNvPr>
@@ -5246,25 +5115,27 @@
         </p:nvSpPr>
         <p:spPr>
           <a:xfrm rot="16200000">
-            <a:off x="-3330549" y="264493"/>
-            <a:ext cx="7229728" cy="933598"/>
-          </a:xfrm>
-          <a:prstGeom prst="rect">
-            <a:avLst/>
-          </a:prstGeom>
-          <a:noFill/>
-        </p:spPr>
-        <p:txBody>
-          <a:bodyPr wrap="square"/>
-          <a:lstStyle/>
-          <a:p>
-            <a:r>
-              <a:rPr sz="6600" dirty="0" err="1">
-                <a:latin typeface="华康少女文字W5(P)"/>
-              </a:rPr>
-              <a:t>他连话都不讲</a:t>
-            </a:r>
-            <a:endParaRPr sz="6600" dirty="0">
+            <a:off x="-3710743" y="1179290"/>
+            <a:ext cx="5760000" cy="594347"/>
+          </a:xfrm>
+          <a:prstGeom prst="rect">
+            <a:avLst/>
+          </a:prstGeom>
+          <a:noFill/>
+        </p:spPr>
+        <p:txBody>
+          <a:bodyPr wrap="none">
+            <a:noAutofit/>
+          </a:bodyPr>
+          <a:lstStyle/>
+          <a:p>
+            <a:r>
+              <a:rPr sz="3227" dirty="0" err="1">
+                <a:latin typeface="华康少女文字W5(P)"/>
+              </a:rPr>
+              <a:t>不讲道理已经到了</a:t>
+            </a:r>
+            <a:endParaRPr sz="3227" dirty="0">
               <a:latin typeface="华康少女文字W5(P)"/>
             </a:endParaRPr>
           </a:p>
@@ -5272,10 +5143,10 @@
       </p:sp>
       <p:sp>
         <p:nvSpPr>
-          <p:cNvPr id="16" name="TextBox 9">
+          <p:cNvPr id="20" name="TextBox 5">
             <a:extLst>
               <a:ext uri="{FF2B5EF4-FFF2-40B4-BE49-F238E27FC236}">
-                <a16:creationId xmlns:a16="http://schemas.microsoft.com/office/drawing/2014/main" id="{DE25B191-3BE5-DA3C-9860-04999E84510E}"/>
+                <a16:creationId xmlns:a16="http://schemas.microsoft.com/office/drawing/2014/main" id="{6E43A641-E13B-904C-9FF4-940113AA51AD}"/>
               </a:ext>
             </a:extLst>
           </p:cNvPr>
@@ -5284,25 +5155,27 @@
         </p:nvSpPr>
         <p:spPr>
           <a:xfrm rot="16200000">
-            <a:off x="-6707693" y="264493"/>
-            <a:ext cx="7229728" cy="933598"/>
-          </a:xfrm>
-          <a:prstGeom prst="rect">
-            <a:avLst/>
-          </a:prstGeom>
-          <a:noFill/>
-        </p:spPr>
-        <p:txBody>
-          <a:bodyPr wrap="square"/>
-          <a:lstStyle/>
-          <a:p>
-            <a:r>
-              <a:rPr sz="6600" dirty="0" err="1">
+            <a:off x="-4251600" y="1232781"/>
+            <a:ext cx="5760000" cy="487365"/>
+          </a:xfrm>
+          <a:prstGeom prst="rect">
+            <a:avLst/>
+          </a:prstGeom>
+          <a:noFill/>
+        </p:spPr>
+        <p:txBody>
+          <a:bodyPr wrap="none">
+            <a:noAutofit/>
+          </a:bodyPr>
+          <a:lstStyle/>
+          <a:p>
+            <a:r>
+              <a:rPr sz="2646" dirty="0" err="1">
                 <a:latin typeface="华康少女文字W5(P)"/>
               </a:rPr>
               <a:t>我们家里那个</a:t>
             </a:r>
-            <a:endParaRPr sz="6600" dirty="0">
+            <a:endParaRPr sz="2646" dirty="0">
               <a:latin typeface="华康少女文字W5(P)"/>
             </a:endParaRPr>
           </a:p>
@@ -5310,10 +5183,10 @@
       </p:sp>
       <p:sp>
         <p:nvSpPr>
-          <p:cNvPr id="17" name="TextBox 10">
+          <p:cNvPr id="21" name="TextBox 3">
             <a:extLst>
               <a:ext uri="{FF2B5EF4-FFF2-40B4-BE49-F238E27FC236}">
-                <a16:creationId xmlns:a16="http://schemas.microsoft.com/office/drawing/2014/main" id="{230FF14E-34D8-74E4-BDE5-B0A90C3A125C}"/>
+                <a16:creationId xmlns:a16="http://schemas.microsoft.com/office/drawing/2014/main" id="{4BAE6B26-3C42-65EC-6A07-AB9EA7EA32F7}"/>
               </a:ext>
             </a:extLst>
           </p:cNvPr>
@@ -5321,26 +5194,28 @@
           <p:nvPr/>
         </p:nvSpPr>
         <p:spPr>
-          <a:xfrm rot="16200000">
-            <a:off x="-5554984" y="264493"/>
-            <a:ext cx="7229728" cy="933598"/>
-          </a:xfrm>
-          <a:prstGeom prst="rect">
-            <a:avLst/>
-          </a:prstGeom>
-          <a:noFill/>
-        </p:spPr>
-        <p:txBody>
-          <a:bodyPr wrap="square"/>
-          <a:lstStyle/>
-          <a:p>
-            <a:r>
-              <a:rPr sz="5400" dirty="0" err="1">
-                <a:latin typeface="华康少女文字W5(P)"/>
-              </a:rPr>
-              <a:t>不讲道理已经到了</a:t>
-            </a:r>
-            <a:endParaRPr sz="5400" dirty="0">
+          <a:xfrm>
+            <a:off x="-3868996" y="1394504"/>
+            <a:ext cx="5760000" cy="883920"/>
+          </a:xfrm>
+          <a:prstGeom prst="rect">
+            <a:avLst/>
+          </a:prstGeom>
+          <a:noFill/>
+        </p:spPr>
+        <p:txBody>
+          <a:bodyPr wrap="none">
+            <a:noAutofit/>
+          </a:bodyPr>
+          <a:lstStyle/>
+          <a:p>
+            <a:r>
+              <a:rPr sz="4400" dirty="0" err="1">
+                <a:latin typeface="华康少女文字W5(P)"/>
+              </a:rPr>
+              <a:t>谁占上风</a:t>
+            </a:r>
+            <a:endParaRPr sz="4400" dirty="0">
               <a:latin typeface="华康少女文字W5(P)"/>
             </a:endParaRPr>
           </a:p>
@@ -5348,10 +5223,10 @@
       </p:sp>
       <p:sp>
         <p:nvSpPr>
-          <p:cNvPr id="18" name="TextBox 11">
+          <p:cNvPr id="22" name="TextBox 4">
             <a:extLst>
               <a:ext uri="{FF2B5EF4-FFF2-40B4-BE49-F238E27FC236}">
-                <a16:creationId xmlns:a16="http://schemas.microsoft.com/office/drawing/2014/main" id="{EB878591-F80C-1A53-8869-71ADF0F6CFAC}"/>
+                <a16:creationId xmlns:a16="http://schemas.microsoft.com/office/drawing/2014/main" id="{8A868B03-7CD4-A516-80A6-727B6D36CA0F}"/>
               </a:ext>
             </a:extLst>
           </p:cNvPr>
@@ -5359,112 +5234,29 @@
           <p:nvPr/>
         </p:nvSpPr>
         <p:spPr>
-          <a:xfrm rot="16200000">
-            <a:off x="-4488016" y="264493"/>
-            <a:ext cx="7229728" cy="933598"/>
-          </a:xfrm>
-          <a:prstGeom prst="rect">
-            <a:avLst/>
-          </a:prstGeom>
-          <a:noFill/>
-        </p:spPr>
-        <p:txBody>
-          <a:bodyPr wrap="square"/>
-          <a:lstStyle/>
-          <a:p>
-            <a:r>
-              <a:rPr sz="6600" dirty="0" err="1">
-                <a:solidFill>
-                  <a:srgbClr val="FF0000"/>
-                </a:solidFill>
-                <a:latin typeface="华康少女文字W5(P)"/>
-              </a:rPr>
-              <a:t>最高</a:t>
-            </a:r>
-            <a:r>
-              <a:rPr sz="6600" dirty="0" err="1">
-                <a:latin typeface="华康少女文字W5(P)"/>
-              </a:rPr>
-              <a:t>的境界了</a:t>
-            </a:r>
-            <a:endParaRPr sz="6600" dirty="0">
-              <a:latin typeface="华康少女文字W5(P)"/>
-            </a:endParaRPr>
-          </a:p>
-        </p:txBody>
-      </p:sp>
-      <p:sp>
-        <p:nvSpPr>
-          <p:cNvPr id="19" name="TextBox 8">
-            <a:extLst>
-              <a:ext uri="{FF2B5EF4-FFF2-40B4-BE49-F238E27FC236}">
-                <a16:creationId xmlns:a16="http://schemas.microsoft.com/office/drawing/2014/main" id="{852354AB-949A-E225-17E4-155A01981140}"/>
-              </a:ext>
-            </a:extLst>
-          </p:cNvPr>
-          <p:cNvSpPr txBox="1"/>
-          <p:nvPr/>
-        </p:nvSpPr>
-        <p:spPr>
-          <a:xfrm>
-            <a:off x="-9281604" y="-2562910"/>
-            <a:ext cx="7808284" cy="892762"/>
-          </a:xfrm>
-          <a:prstGeom prst="rect">
-            <a:avLst/>
-          </a:prstGeom>
-          <a:noFill/>
-        </p:spPr>
-        <p:txBody>
-          <a:bodyPr wrap="square"/>
-          <a:lstStyle/>
-          <a:p>
-            <a:r>
-              <a:rPr sz="11500" dirty="0" err="1">
-                <a:latin typeface="华康少女文字W5(P)"/>
-              </a:rPr>
-              <a:t>谁占上风</a:t>
-            </a:r>
-            <a:endParaRPr sz="11500" dirty="0">
-              <a:latin typeface="华康少女文字W5(P)"/>
-            </a:endParaRPr>
-          </a:p>
-        </p:txBody>
-      </p:sp>
-      <p:sp>
-        <p:nvSpPr>
-          <p:cNvPr id="20" name="TextBox 7">
-            <a:extLst>
-              <a:ext uri="{FF2B5EF4-FFF2-40B4-BE49-F238E27FC236}">
-                <a16:creationId xmlns:a16="http://schemas.microsoft.com/office/drawing/2014/main" id="{B0FAA264-3A69-7A8F-E3A7-7BF7428C45F4}"/>
-              </a:ext>
-            </a:extLst>
-          </p:cNvPr>
-          <p:cNvSpPr txBox="1"/>
-          <p:nvPr/>
-        </p:nvSpPr>
-        <p:spPr>
-          <a:xfrm>
-            <a:off x="-9281604" y="-4038698"/>
-            <a:ext cx="7808284" cy="892762"/>
-          </a:xfrm>
-          <a:prstGeom prst="rect">
-            <a:avLst/>
-          </a:prstGeom>
-          <a:noFill/>
-        </p:spPr>
-        <p:txBody>
-          <a:bodyPr wrap="square"/>
-          <a:lstStyle/>
-          <a:p>
-            <a:r>
-              <a:rPr sz="9600" dirty="0" err="1">
+          <a:xfrm>
+            <a:off x="-3868996" y="669690"/>
+            <a:ext cx="5760000" cy="724814"/>
+          </a:xfrm>
+          <a:prstGeom prst="rect">
+            <a:avLst/>
+          </a:prstGeom>
+          <a:noFill/>
+        </p:spPr>
+        <p:txBody>
+          <a:bodyPr wrap="none">
+            <a:noAutofit/>
+          </a:bodyPr>
+          <a:lstStyle/>
+          <a:p>
+            <a:r>
+              <a:rPr sz="3600" dirty="0" err="1">
                 <a:latin typeface="华康少女文字W5(P)"/>
               </a:rPr>
               <a:t>谁</a:t>
             </a:r>
             <a:r>
-              <a:rPr sz="9600" dirty="0" err="1">
+              <a:rPr sz="3600" dirty="0" err="1">
                 <a:solidFill>
                   <a:srgbClr val="FF0000"/>
                 </a:solidFill>
@@ -5472,7 +5264,7 @@
               </a:rPr>
               <a:t>不讲道理</a:t>
             </a:r>
-            <a:endParaRPr sz="9600" dirty="0">
+            <a:endParaRPr sz="3600" dirty="0">
               <a:solidFill>
                 <a:srgbClr val="FF0000"/>
               </a:solidFill>
@@ -5483,10 +5275,10 @@
       </p:sp>
       <p:sp>
         <p:nvSpPr>
-          <p:cNvPr id="21" name="TextBox 6">
+          <p:cNvPr id="23" name="TextBox 5">
             <a:extLst>
               <a:ext uri="{FF2B5EF4-FFF2-40B4-BE49-F238E27FC236}">
-                <a16:creationId xmlns:a16="http://schemas.microsoft.com/office/drawing/2014/main" id="{B4AEC016-A6B7-D519-0273-9FBA93D337B9}"/>
+                <a16:creationId xmlns:a16="http://schemas.microsoft.com/office/drawing/2014/main" id="{6AB2D4F6-1065-54FC-D83B-8A283B6FF468}"/>
               </a:ext>
             </a:extLst>
           </p:cNvPr>
@@ -5495,25 +5287,27 @@
         </p:nvSpPr>
         <p:spPr>
           <a:xfrm>
-            <a:off x="-9281604" y="-5555476"/>
-            <a:ext cx="7808284" cy="892762"/>
-          </a:xfrm>
-          <a:prstGeom prst="rect">
-            <a:avLst/>
-          </a:prstGeom>
-          <a:noFill/>
-        </p:spPr>
-        <p:txBody>
-          <a:bodyPr wrap="square"/>
-          <a:lstStyle/>
-          <a:p>
-            <a:r>
-              <a:rPr sz="9600" dirty="0" err="1">
+            <a:off x="-3874168" y="75343"/>
+            <a:ext cx="5760000" cy="594347"/>
+          </a:xfrm>
+          <a:prstGeom prst="rect">
+            <a:avLst/>
+          </a:prstGeom>
+          <a:noFill/>
+        </p:spPr>
+        <p:txBody>
+          <a:bodyPr wrap="none">
+            <a:noAutofit/>
+          </a:bodyPr>
+          <a:lstStyle/>
+          <a:p>
+            <a:r>
+              <a:rPr sz="3200" dirty="0" err="1">
                 <a:latin typeface="华康少女文字W5(P)"/>
               </a:rPr>
               <a:t>结婚之后嘛</a:t>
             </a:r>
-            <a:endParaRPr sz="9600" dirty="0">
+            <a:endParaRPr sz="3200" dirty="0">
               <a:latin typeface="华康少女文字W5(P)"/>
             </a:endParaRPr>
           </a:p>
@@ -5524,43 +5318,6 @@
   <p:clrMapOvr>
     <a:masterClrMapping/>
   </p:clrMapOvr>
-  <p:transition advTm="22260"/>
-  <p:timing>
-    <p:tnLst>
-      <p:par>
-        <p:cTn id="1" dur="indefinite" restart="never" nodeType="tmRoot">
-          <p:stCondLst>
-            <p:cond delay="0"/>
-          </p:stCondLst>
-          <p:childTnLst>
-            <p:par>
-              <p:cTn id="2" fill="hold">
-                <p:stCondLst>
-                  <p:cond delay="0"/>
-                </p:stCondLst>
-                <p:childTnLst>
-                  <p:par>
-                    <p:cTn id="3" dur="500" fill="hold">
-                      <p:childTnLst>
-                        <p:animEffect transition="in">
-                          <p:cBhvr>
-                            <p:cTn id="4" dur="500"/>
-                            <p:tgtEl>
-                              <p:spTgt spid="12"/>
-                            </p:tgtEl>
-                          </p:cBhvr>
-                        </p:animEffect>
-                      </p:childTnLst>
-                    </p:cTn>
-                  </p:par>
-                </p:childTnLst>
-              </p:cTn>
-            </p:par>
-          </p:childTnLst>
-        </p:cTn>
-      </p:par>
-    </p:tnLst>
-  </p:timing>
 </p:sld>
 </file>
 
@@ -5583,13 +5340,7 @@
       </p:grpSpPr>
       <p:pic>
         <p:nvPicPr>
-          <p:cNvPr id="6" name="Picture 1">
-            <a:extLst>
-              <a:ext uri="{FF2B5EF4-FFF2-40B4-BE49-F238E27FC236}">
-                <a16:creationId xmlns:a16="http://schemas.microsoft.com/office/drawing/2014/main" id="{DE29DE33-1167-0B2F-A202-BF44C5C3DECC}"/>
-              </a:ext>
-            </a:extLst>
-          </p:cNvPr>
+          <p:cNvPr id="2" name="Picture 1" descr="image.jpg"/>
           <p:cNvPicPr>
             <a:picLocks noChangeAspect="1"/>
           </p:cNvPicPr>
@@ -5597,15 +5348,14 @@
         </p:nvPicPr>
         <p:blipFill>
           <a:blip r:embed="rId2"/>
-          <a:srcRect l="2292" t="7736" r="40652" b="28868"/>
           <a:stretch>
             <a:fillRect/>
           </a:stretch>
         </p:blipFill>
         <p:spPr>
           <a:xfrm>
-            <a:off x="-1" y="-1"/>
-            <a:ext cx="6858001" cy="12192001"/>
+            <a:off x="0" y="0"/>
+            <a:ext cx="6858000" cy="12193200"/>
           </a:xfrm>
           <a:prstGeom prst="rect">
             <a:avLst/>
@@ -5614,31 +5364,33 @@
       </p:pic>
       <p:sp>
         <p:nvSpPr>
-          <p:cNvPr id="4" name="TextBox 3"/>
-          <p:cNvSpPr txBox="1"/>
-          <p:nvPr/>
-        </p:nvSpPr>
-        <p:spPr>
-          <a:xfrm>
-            <a:off x="914400" y="5852013"/>
-            <a:ext cx="5029200" cy="711200"/>
-          </a:xfrm>
-          <a:prstGeom prst="rect">
-            <a:avLst/>
-          </a:prstGeom>
-          <a:noFill/>
-        </p:spPr>
-        <p:txBody>
-          <a:bodyPr wrap="square"/>
-          <a:lstStyle/>
-          <a:p>
-            <a:r>
-              <a:rPr sz="7100" dirty="0" err="1">
+          <p:cNvPr id="3" name="TextBox 2"/>
+          <p:cNvSpPr txBox="1"/>
+          <p:nvPr/>
+        </p:nvSpPr>
+        <p:spPr>
+          <a:xfrm>
+            <a:off x="914400" y="5682479"/>
+            <a:ext cx="5760000" cy="883920"/>
+          </a:xfrm>
+          <a:prstGeom prst="rect">
+            <a:avLst/>
+          </a:prstGeom>
+          <a:noFill/>
+        </p:spPr>
+        <p:txBody>
+          <a:bodyPr wrap="none">
+            <a:noAutofit/>
+          </a:bodyPr>
+          <a:lstStyle/>
+          <a:p>
+            <a:r>
+              <a:rPr sz="4800" dirty="0" err="1">
                 <a:latin typeface="华康少女文字W5(P)"/>
               </a:rPr>
               <a:t>讲得很对的</a:t>
             </a:r>
-            <a:endParaRPr sz="7100" dirty="0">
+            <a:endParaRPr sz="4800" dirty="0">
               <a:latin typeface="华康少女文字W5(P)"/>
             </a:endParaRPr>
           </a:p>
@@ -5646,32 +5398,28 @@
       </p:sp>
       <p:sp>
         <p:nvSpPr>
-          <p:cNvPr id="7" name="TextBox 2">
-            <a:extLst>
-              <a:ext uri="{FF2B5EF4-FFF2-40B4-BE49-F238E27FC236}">
-                <a16:creationId xmlns:a16="http://schemas.microsoft.com/office/drawing/2014/main" id="{A690E407-C503-E434-2FEA-DE85D6A820D7}"/>
-              </a:ext>
-            </a:extLst>
-          </p:cNvPr>
-          <p:cNvSpPr txBox="1"/>
-          <p:nvPr/>
-        </p:nvSpPr>
-        <p:spPr>
-          <a:xfrm>
-            <a:off x="914399" y="5010185"/>
-            <a:ext cx="5029200" cy="711200"/>
-          </a:xfrm>
-          <a:prstGeom prst="rect">
-            <a:avLst/>
-          </a:prstGeom>
-          <a:noFill/>
-        </p:spPr>
-        <p:txBody>
-          <a:bodyPr wrap="square"/>
-          <a:lstStyle/>
-          <a:p>
-            <a:r>
-              <a:rPr sz="5100" dirty="0" err="1">
+          <p:cNvPr id="4" name="TextBox 3"/>
+          <p:cNvSpPr txBox="1"/>
+          <p:nvPr/>
+        </p:nvSpPr>
+        <p:spPr>
+          <a:xfrm>
+            <a:off x="914400" y="4831665"/>
+            <a:ext cx="5760000" cy="724814"/>
+          </a:xfrm>
+          <a:prstGeom prst="rect">
+            <a:avLst/>
+          </a:prstGeom>
+          <a:noFill/>
+        </p:spPr>
+        <p:txBody>
+          <a:bodyPr wrap="none">
+            <a:noAutofit/>
+          </a:bodyPr>
+          <a:lstStyle/>
+          <a:p>
+            <a:r>
+              <a:rPr sz="3936" dirty="0" err="1">
                 <a:solidFill>
                   <a:srgbClr val="FF6B35"/>
                 </a:solidFill>
@@ -5680,12 +5428,12 @@
               <a:t>张爱玲</a:t>
             </a:r>
             <a:r>
-              <a:rPr sz="5100" dirty="0" err="1">
+              <a:rPr sz="3936" dirty="0" err="1">
                 <a:latin typeface="华康少女文字W5(P)"/>
               </a:rPr>
               <a:t>有一句话</a:t>
             </a:r>
-            <a:endParaRPr sz="5100" dirty="0">
+            <a:endParaRPr sz="3936" dirty="0">
               <a:latin typeface="华康少女文字W5(P)"/>
             </a:endParaRPr>
           </a:p>
@@ -5696,43 +5444,6 @@
   <p:clrMapOvr>
     <a:masterClrMapping/>
   </p:clrMapOvr>
-  <p:transition advTm="2720"/>
-  <p:timing>
-    <p:tnLst>
-      <p:par>
-        <p:cTn id="1" dur="indefinite" restart="never" nodeType="tmRoot">
-          <p:stCondLst>
-            <p:cond delay="0"/>
-          </p:stCondLst>
-          <p:childTnLst>
-            <p:par>
-              <p:cTn id="2" fill="hold">
-                <p:stCondLst>
-                  <p:cond delay="0"/>
-                </p:stCondLst>
-                <p:childTnLst>
-                  <p:par>
-                    <p:cTn id="3" dur="500" fill="hold">
-                      <p:childTnLst>
-                        <p:animEffect transition="in">
-                          <p:cBhvr>
-                            <p:cTn id="4" dur="500"/>
-                            <p:tgtEl>
-                              <p:spTgt spid="4"/>
-                            </p:tgtEl>
-                          </p:cBhvr>
-                        </p:animEffect>
-                      </p:childTnLst>
-                    </p:cTn>
-                  </p:par>
-                </p:childTnLst>
-              </p:cTn>
-            </p:par>
-          </p:childTnLst>
-        </p:cTn>
-      </p:par>
-    </p:tnLst>
-  </p:timing>
 </p:sld>
 </file>
 
@@ -5755,7 +5466,7 @@
       </p:grpSpPr>
       <p:pic>
         <p:nvPicPr>
-          <p:cNvPr id="2" name="Picture 1"/>
+          <p:cNvPr id="2" name="Picture 1" descr="image.jpg"/>
           <p:cNvPicPr>
             <a:picLocks noChangeAspect="1"/>
           </p:cNvPicPr>
@@ -5763,199 +5474,136 @@
         </p:nvPicPr>
         <p:blipFill>
           <a:blip r:embed="rId2"/>
-          <a:srcRect/>
-          <a:stretch/>
+          <a:stretch>
+            <a:fillRect/>
+          </a:stretch>
         </p:blipFill>
         <p:spPr>
           <a:xfrm>
-            <a:off x="86" y="0"/>
-            <a:ext cx="6857828" cy="12191695"/>
+            <a:off x="0" y="0"/>
+            <a:ext cx="6858000" cy="12193200"/>
           </a:xfrm>
           <a:prstGeom prst="rect">
             <a:avLst/>
           </a:prstGeom>
         </p:spPr>
       </p:pic>
-      <p:grpSp>
-        <p:nvGrpSpPr>
-          <p:cNvPr id="8" name="组合 7">
-            <a:extLst>
-              <a:ext uri="{FF2B5EF4-FFF2-40B4-BE49-F238E27FC236}">
-                <a16:creationId xmlns:a16="http://schemas.microsoft.com/office/drawing/2014/main" id="{882B2F7E-35EC-DED6-35D9-9EA6A1626996}"/>
-              </a:ext>
-            </a:extLst>
-          </p:cNvPr>
-          <p:cNvGrpSpPr/>
-          <p:nvPr/>
-        </p:nvGrpSpPr>
-        <p:grpSpPr>
-          <a:xfrm>
-            <a:off x="914399" y="2253343"/>
-            <a:ext cx="7641771" cy="4371862"/>
-            <a:chOff x="914400" y="3965157"/>
-            <a:chExt cx="5029201" cy="2660048"/>
-          </a:xfrm>
-        </p:grpSpPr>
-        <p:sp>
-          <p:nvSpPr>
-            <p:cNvPr id="5" name="TextBox 4"/>
-            <p:cNvSpPr txBox="1"/>
-            <p:nvPr/>
-          </p:nvSpPr>
-          <p:spPr>
-            <a:xfrm>
-              <a:off x="914400" y="5914005"/>
-              <a:ext cx="5029200" cy="711200"/>
-            </a:xfrm>
-            <a:prstGeom prst="rect">
-              <a:avLst/>
-            </a:prstGeom>
-            <a:noFill/>
-          </p:spPr>
-          <p:txBody>
-            <a:bodyPr wrap="square"/>
-            <a:lstStyle/>
-            <a:p>
-              <a:r>
-                <a:rPr sz="11500" dirty="0" err="1">
-                  <a:latin typeface="华康少女文字W5(P)"/>
-                </a:rPr>
-                <a:t>我觉得</a:t>
-              </a:r>
-              <a:endParaRPr sz="11500" dirty="0">
-                <a:latin typeface="华康少女文字W5(P)"/>
-              </a:endParaRPr>
-            </a:p>
-          </p:txBody>
-        </p:sp>
-        <p:sp>
-          <p:nvSpPr>
-            <p:cNvPr id="6" name="TextBox 3">
-              <a:extLst>
-                <a:ext uri="{FF2B5EF4-FFF2-40B4-BE49-F238E27FC236}">
-                  <a16:creationId xmlns:a16="http://schemas.microsoft.com/office/drawing/2014/main" id="{9413E9FE-64E4-7DB1-78A5-0F087967AE6A}"/>
-                </a:ext>
-              </a:extLst>
-            </p:cNvPr>
-            <p:cNvSpPr txBox="1"/>
-            <p:nvPr/>
-          </p:nvSpPr>
-          <p:spPr>
-            <a:xfrm>
-              <a:off x="914401" y="4806985"/>
-              <a:ext cx="5029200" cy="711200"/>
-            </a:xfrm>
-            <a:prstGeom prst="rect">
-              <a:avLst/>
-            </a:prstGeom>
-            <a:noFill/>
-          </p:spPr>
-          <p:txBody>
-            <a:bodyPr wrap="square"/>
-            <a:lstStyle/>
-            <a:p>
-              <a:r>
-                <a:rPr sz="9600" dirty="0" err="1">
-                  <a:latin typeface="华康少女文字W5(P)"/>
-                </a:rPr>
-                <a:t>讲得很对的</a:t>
-              </a:r>
-              <a:endParaRPr sz="9600" dirty="0">
-                <a:latin typeface="华康少女文字W5(P)"/>
-              </a:endParaRPr>
-            </a:p>
-          </p:txBody>
-        </p:sp>
-        <p:sp>
-          <p:nvSpPr>
-            <p:cNvPr id="7" name="TextBox 2">
-              <a:extLst>
-                <a:ext uri="{FF2B5EF4-FFF2-40B4-BE49-F238E27FC236}">
-                  <a16:creationId xmlns:a16="http://schemas.microsoft.com/office/drawing/2014/main" id="{7F236CF3-EFD9-F50A-1218-6B4DE204AB03}"/>
-                </a:ext>
-              </a:extLst>
-            </p:cNvPr>
-            <p:cNvSpPr txBox="1"/>
-            <p:nvPr/>
-          </p:nvSpPr>
-          <p:spPr>
-            <a:xfrm>
-              <a:off x="914400" y="3965157"/>
-              <a:ext cx="5029200" cy="711200"/>
-            </a:xfrm>
-            <a:prstGeom prst="rect">
-              <a:avLst/>
-            </a:prstGeom>
-            <a:noFill/>
-          </p:spPr>
-          <p:txBody>
-            <a:bodyPr wrap="square"/>
-            <a:lstStyle/>
-            <a:p>
-              <a:r>
-                <a:rPr sz="7200" dirty="0" err="1">
-                  <a:solidFill>
-                    <a:srgbClr val="FF6B35"/>
-                  </a:solidFill>
-                  <a:latin typeface="华文行楷"/>
-                </a:rPr>
-                <a:t>张爱玲</a:t>
-              </a:r>
-              <a:r>
-                <a:rPr sz="7200" dirty="0" err="1">
-                  <a:latin typeface="华康少女文字W5(P)"/>
-                </a:rPr>
-                <a:t>有一句话</a:t>
-              </a:r>
-              <a:endParaRPr sz="7200" dirty="0">
-                <a:latin typeface="华康少女文字W5(P)"/>
-              </a:endParaRPr>
-            </a:p>
-          </p:txBody>
-        </p:sp>
-      </p:grpSp>
+      <p:sp>
+        <p:nvSpPr>
+          <p:cNvPr id="3" name="TextBox 2"/>
+          <p:cNvSpPr txBox="1"/>
+          <p:nvPr/>
+        </p:nvSpPr>
+        <p:spPr>
+          <a:xfrm>
+            <a:off x="914400" y="5682479"/>
+            <a:ext cx="5760000" cy="883920"/>
+          </a:xfrm>
+          <a:prstGeom prst="rect">
+            <a:avLst/>
+          </a:prstGeom>
+          <a:noFill/>
+        </p:spPr>
+        <p:txBody>
+          <a:bodyPr wrap="none">
+            <a:noAutofit/>
+          </a:bodyPr>
+          <a:lstStyle/>
+          <a:p>
+            <a:r>
+              <a:rPr sz="4800" dirty="0" err="1">
+                <a:latin typeface="华康少女文字W5(P)"/>
+              </a:rPr>
+              <a:t>我觉得</a:t>
+            </a:r>
+            <a:endParaRPr sz="4800" dirty="0">
+              <a:latin typeface="华康少女文字W5(P)"/>
+            </a:endParaRPr>
+          </a:p>
+        </p:txBody>
+      </p:sp>
+      <p:sp>
+        <p:nvSpPr>
+          <p:cNvPr id="4" name="TextBox 3"/>
+          <p:cNvSpPr txBox="1"/>
+          <p:nvPr/>
+        </p:nvSpPr>
+        <p:spPr>
+          <a:xfrm>
+            <a:off x="914400" y="4831665"/>
+            <a:ext cx="5760000" cy="724814"/>
+          </a:xfrm>
+          <a:prstGeom prst="rect">
+            <a:avLst/>
+          </a:prstGeom>
+          <a:noFill/>
+        </p:spPr>
+        <p:txBody>
+          <a:bodyPr wrap="none">
+            <a:noAutofit/>
+          </a:bodyPr>
+          <a:lstStyle/>
+          <a:p>
+            <a:r>
+              <a:rPr sz="3936" dirty="0" err="1">
+                <a:latin typeface="华康少女文字W5(P)"/>
+              </a:rPr>
+              <a:t>讲得很对的</a:t>
+            </a:r>
+            <a:endParaRPr sz="3936" dirty="0">
+              <a:latin typeface="华康少女文字W5(P)"/>
+            </a:endParaRPr>
+          </a:p>
+        </p:txBody>
+      </p:sp>
+      <p:sp>
+        <p:nvSpPr>
+          <p:cNvPr id="5" name="TextBox 4"/>
+          <p:cNvSpPr txBox="1"/>
+          <p:nvPr/>
+        </p:nvSpPr>
+        <p:spPr>
+          <a:xfrm>
+            <a:off x="914400" y="4111317"/>
+            <a:ext cx="5760000" cy="594347"/>
+          </a:xfrm>
+          <a:prstGeom prst="rect">
+            <a:avLst/>
+          </a:prstGeom>
+          <a:noFill/>
+        </p:spPr>
+        <p:txBody>
+          <a:bodyPr wrap="none">
+            <a:noAutofit/>
+          </a:bodyPr>
+          <a:lstStyle/>
+          <a:p>
+            <a:r>
+              <a:rPr sz="3227" dirty="0" err="1">
+                <a:solidFill>
+                  <a:srgbClr val="FF6B35"/>
+                </a:solidFill>
+                <a:latin typeface="华文行楷"/>
+              </a:rPr>
+              <a:t>张爱玲</a:t>
+            </a:r>
+            <a:r>
+              <a:rPr sz="3227" dirty="0" err="1">
+                <a:latin typeface="华康少女文字W5(P)"/>
+              </a:rPr>
+              <a:t>有一句话</a:t>
+            </a:r>
+            <a:endParaRPr sz="3227" dirty="0">
+              <a:latin typeface="华康少女文字W5(P)"/>
+            </a:endParaRPr>
+          </a:p>
+        </p:txBody>
+      </p:sp>
     </p:spTree>
   </p:cSld>
   <p:clrMapOvr>
     <a:masterClrMapping/>
   </p:clrMapOvr>
-  <p:transition advTm="3680"/>
-  <p:timing>
-    <p:tnLst>
-      <p:par>
-        <p:cTn id="1" dur="indefinite" restart="never" nodeType="tmRoot">
-          <p:stCondLst>
-            <p:cond delay="0"/>
-          </p:stCondLst>
-          <p:childTnLst>
-            <p:par>
-              <p:cTn id="2" fill="hold">
-                <p:stCondLst>
-                  <p:cond delay="0"/>
-                </p:stCondLst>
-                <p:childTnLst>
-                  <p:par>
-                    <p:cTn id="3" dur="500" fill="hold">
-                      <p:childTnLst>
-                        <p:animEffect transition="in">
-                          <p:cBhvr>
-                            <p:cTn id="4" dur="500"/>
-                            <p:tgtEl>
-                              <p:spTgt spid="5"/>
-                            </p:tgtEl>
-                          </p:cBhvr>
-                        </p:animEffect>
-                      </p:childTnLst>
-                    </p:cTn>
-                  </p:par>
-                </p:childTnLst>
-              </p:cTn>
-            </p:par>
-          </p:childTnLst>
-        </p:cTn>
-      </p:par>
-    </p:tnLst>
-  </p:timing>
 </p:sld>
 </file>
 
@@ -5978,7 +5626,7 @@
       </p:grpSpPr>
       <p:pic>
         <p:nvPicPr>
-          <p:cNvPr id="2" name="Picture 1"/>
+          <p:cNvPr id="2" name="Picture 1" descr="image.jpg"/>
           <p:cNvPicPr>
             <a:picLocks noChangeAspect="1"/>
           </p:cNvPicPr>
@@ -5986,13 +5634,14 @@
         </p:nvPicPr>
         <p:blipFill>
           <a:blip r:embed="rId2"/>
-          <a:srcRect/>
-          <a:stretch/>
+          <a:stretch>
+            <a:fillRect/>
+          </a:stretch>
         </p:blipFill>
         <p:spPr>
           <a:xfrm>
-            <a:off x="86" y="0"/>
-            <a:ext cx="6857828" cy="12191695"/>
+            <a:off x="0" y="0"/>
+            <a:ext cx="6858000" cy="12193200"/>
           </a:xfrm>
           <a:prstGeom prst="rect">
             <a:avLst/>
@@ -6001,31 +5650,33 @@
       </p:pic>
       <p:sp>
         <p:nvSpPr>
-          <p:cNvPr id="6" name="TextBox 5"/>
-          <p:cNvSpPr txBox="1"/>
-          <p:nvPr/>
-        </p:nvSpPr>
-        <p:spPr>
-          <a:xfrm>
-            <a:off x="914399" y="5593382"/>
-            <a:ext cx="6705600" cy="969832"/>
-          </a:xfrm>
-          <a:prstGeom prst="rect">
-            <a:avLst/>
-          </a:prstGeom>
-          <a:noFill/>
-        </p:spPr>
-        <p:txBody>
-          <a:bodyPr wrap="square"/>
-          <a:lstStyle/>
-          <a:p>
-            <a:r>
-              <a:rPr sz="16600" dirty="0" err="1">
+          <p:cNvPr id="3" name="TextBox 2"/>
+          <p:cNvSpPr txBox="1"/>
+          <p:nvPr/>
+        </p:nvSpPr>
+        <p:spPr>
+          <a:xfrm>
+            <a:off x="914399" y="5682479"/>
+            <a:ext cx="5760000" cy="883920"/>
+          </a:xfrm>
+          <a:prstGeom prst="rect">
+            <a:avLst/>
+          </a:prstGeom>
+          <a:noFill/>
+        </p:spPr>
+        <p:txBody>
+          <a:bodyPr wrap="none">
+            <a:noAutofit/>
+          </a:bodyPr>
+          <a:lstStyle/>
+          <a:p>
+            <a:r>
+              <a:rPr sz="4800" dirty="0" err="1">
                 <a:latin typeface="华康少女文字W5(P)"/>
               </a:rPr>
               <a:t>她说</a:t>
             </a:r>
-            <a:endParaRPr sz="16600" dirty="0">
+            <a:endParaRPr sz="4800" dirty="0">
               <a:latin typeface="华康少女文字W5(P)"/>
             </a:endParaRPr>
           </a:p>
@@ -6033,37 +5684,33 @@
       </p:sp>
       <p:sp>
         <p:nvSpPr>
-          <p:cNvPr id="12" name="TextBox 4">
-            <a:extLst>
-              <a:ext uri="{FF2B5EF4-FFF2-40B4-BE49-F238E27FC236}">
-                <a16:creationId xmlns:a16="http://schemas.microsoft.com/office/drawing/2014/main" id="{1F333CD0-2328-DFAD-2E29-A7AD1747EBF6}"/>
-              </a:ext>
-            </a:extLst>
-          </p:cNvPr>
-          <p:cNvSpPr txBox="1"/>
-          <p:nvPr/>
-        </p:nvSpPr>
-        <p:spPr>
-          <a:xfrm>
-            <a:off x="914400" y="3257426"/>
-            <a:ext cx="10189025" cy="1593946"/>
-          </a:xfrm>
-          <a:prstGeom prst="rect">
-            <a:avLst/>
-          </a:prstGeom>
-          <a:noFill/>
-        </p:spPr>
-        <p:txBody>
-          <a:bodyPr wrap="square"/>
-          <a:lstStyle/>
-          <a:p>
-            <a:r>
-              <a:rPr sz="16600" dirty="0" err="1">
+          <p:cNvPr id="4" name="TextBox 3"/>
+          <p:cNvSpPr txBox="1"/>
+          <p:nvPr/>
+        </p:nvSpPr>
+        <p:spPr>
+          <a:xfrm>
+            <a:off x="914399" y="4831665"/>
+            <a:ext cx="5760000" cy="724814"/>
+          </a:xfrm>
+          <a:prstGeom prst="rect">
+            <a:avLst/>
+          </a:prstGeom>
+          <a:noFill/>
+        </p:spPr>
+        <p:txBody>
+          <a:bodyPr wrap="none">
+            <a:noAutofit/>
+          </a:bodyPr>
+          <a:lstStyle/>
+          <a:p>
+            <a:r>
+              <a:rPr sz="3936" dirty="0" err="1">
                 <a:latin typeface="华康少女文字W5(P)"/>
               </a:rPr>
               <a:t>我觉得</a:t>
             </a:r>
-            <a:endParaRPr sz="16600" dirty="0">
+            <a:endParaRPr sz="3936" dirty="0">
               <a:latin typeface="华康少女文字W5(P)"/>
             </a:endParaRPr>
           </a:p>
@@ -6071,37 +5718,33 @@
       </p:sp>
       <p:sp>
         <p:nvSpPr>
-          <p:cNvPr id="13" name="TextBox 3">
-            <a:extLst>
-              <a:ext uri="{FF2B5EF4-FFF2-40B4-BE49-F238E27FC236}">
-                <a16:creationId xmlns:a16="http://schemas.microsoft.com/office/drawing/2014/main" id="{8D87E04E-ABFD-E646-CC50-11F500D27A55}"/>
-              </a:ext>
-            </a:extLst>
-          </p:cNvPr>
-          <p:cNvSpPr txBox="1"/>
-          <p:nvPr/>
-        </p:nvSpPr>
-        <p:spPr>
-          <a:xfrm>
-            <a:off x="914403" y="776367"/>
-            <a:ext cx="10189025" cy="1593946"/>
-          </a:xfrm>
-          <a:prstGeom prst="rect">
-            <a:avLst/>
-          </a:prstGeom>
-          <a:noFill/>
-        </p:spPr>
-        <p:txBody>
-          <a:bodyPr wrap="square"/>
-          <a:lstStyle/>
-          <a:p>
-            <a:r>
-              <a:rPr sz="13800" dirty="0" err="1">
+          <p:cNvPr id="5" name="TextBox 4"/>
+          <p:cNvSpPr txBox="1"/>
+          <p:nvPr/>
+        </p:nvSpPr>
+        <p:spPr>
+          <a:xfrm>
+            <a:off x="914400" y="4111317"/>
+            <a:ext cx="5760000" cy="594347"/>
+          </a:xfrm>
+          <a:prstGeom prst="rect">
+            <a:avLst/>
+          </a:prstGeom>
+          <a:noFill/>
+        </p:spPr>
+        <p:txBody>
+          <a:bodyPr wrap="none">
+            <a:noAutofit/>
+          </a:bodyPr>
+          <a:lstStyle/>
+          <a:p>
+            <a:r>
+              <a:rPr sz="3227" dirty="0" err="1">
                 <a:latin typeface="华康少女文字W5(P)"/>
               </a:rPr>
               <a:t>讲得很对的</a:t>
             </a:r>
-            <a:endParaRPr sz="13800" dirty="0">
+            <a:endParaRPr sz="3227" dirty="0">
               <a:latin typeface="华康少女文字W5(P)"/>
             </a:endParaRPr>
           </a:p>
@@ -6109,32 +5752,28 @@
       </p:sp>
       <p:sp>
         <p:nvSpPr>
-          <p:cNvPr id="14" name="TextBox 2">
-            <a:extLst>
-              <a:ext uri="{FF2B5EF4-FFF2-40B4-BE49-F238E27FC236}">
-                <a16:creationId xmlns:a16="http://schemas.microsoft.com/office/drawing/2014/main" id="{98575401-2990-2178-D154-24FF66A5BD9B}"/>
-              </a:ext>
-            </a:extLst>
-          </p:cNvPr>
-          <p:cNvSpPr txBox="1"/>
-          <p:nvPr/>
-        </p:nvSpPr>
-        <p:spPr>
-          <a:xfrm>
-            <a:off x="914400" y="-1110342"/>
-            <a:ext cx="10189025" cy="1593946"/>
-          </a:xfrm>
-          <a:prstGeom prst="rect">
-            <a:avLst/>
-          </a:prstGeom>
-          <a:noFill/>
-        </p:spPr>
-        <p:txBody>
-          <a:bodyPr wrap="square"/>
-          <a:lstStyle/>
-          <a:p>
-            <a:r>
-              <a:rPr sz="8800" dirty="0" err="1">
+          <p:cNvPr id="6" name="TextBox 5"/>
+          <p:cNvSpPr txBox="1"/>
+          <p:nvPr/>
+        </p:nvSpPr>
+        <p:spPr>
+          <a:xfrm>
+            <a:off x="914399" y="3497952"/>
+            <a:ext cx="5760000" cy="487365"/>
+          </a:xfrm>
+          <a:prstGeom prst="rect">
+            <a:avLst/>
+          </a:prstGeom>
+          <a:noFill/>
+        </p:spPr>
+        <p:txBody>
+          <a:bodyPr wrap="none">
+            <a:noAutofit/>
+          </a:bodyPr>
+          <a:lstStyle/>
+          <a:p>
+            <a:r>
+              <a:rPr sz="2646" dirty="0" err="1">
                 <a:solidFill>
                   <a:srgbClr val="FF6B35"/>
                 </a:solidFill>
@@ -6143,12 +5782,12 @@
               <a:t>张爱玲</a:t>
             </a:r>
             <a:r>
-              <a:rPr sz="8800" dirty="0" err="1">
+              <a:rPr sz="2646" dirty="0" err="1">
                 <a:latin typeface="华康少女文字W5(P)"/>
               </a:rPr>
               <a:t>有一句话</a:t>
             </a:r>
-            <a:endParaRPr sz="8800" dirty="0">
+            <a:endParaRPr sz="2646" dirty="0">
               <a:latin typeface="华康少女文字W5(P)"/>
             </a:endParaRPr>
           </a:p>
@@ -6159,43 +5798,6 @@
   <p:clrMapOvr>
     <a:masterClrMapping/>
   </p:clrMapOvr>
-  <p:transition advTm="4500"/>
-  <p:timing>
-    <p:tnLst>
-      <p:par>
-        <p:cTn id="1" dur="indefinite" restart="never" nodeType="tmRoot">
-          <p:stCondLst>
-            <p:cond delay="0"/>
-          </p:stCondLst>
-          <p:childTnLst>
-            <p:par>
-              <p:cTn id="2" fill="hold">
-                <p:stCondLst>
-                  <p:cond delay="0"/>
-                </p:stCondLst>
-                <p:childTnLst>
-                  <p:par>
-                    <p:cTn id="3" dur="500" fill="hold">
-                      <p:childTnLst>
-                        <p:animEffect transition="in">
-                          <p:cBhvr>
-                            <p:cTn id="4" dur="500"/>
-                            <p:tgtEl>
-                              <p:spTgt spid="6"/>
-                            </p:tgtEl>
-                          </p:cBhvr>
-                        </p:animEffect>
-                      </p:childTnLst>
-                    </p:cTn>
-                  </p:par>
-                </p:childTnLst>
-              </p:cTn>
-            </p:par>
-          </p:childTnLst>
-        </p:cTn>
-      </p:par>
-    </p:tnLst>
-  </p:timing>
 </p:sld>
 </file>
 
@@ -6218,7 +5820,7 @@
       </p:grpSpPr>
       <p:pic>
         <p:nvPicPr>
-          <p:cNvPr id="2" name="Picture 1"/>
+          <p:cNvPr id="2" name="Picture 1" descr="image.jpg"/>
           <p:cNvPicPr>
             <a:picLocks noChangeAspect="1"/>
           </p:cNvPicPr>
@@ -6226,13 +5828,14 @@
         </p:nvPicPr>
         <p:blipFill>
           <a:blip r:embed="rId2"/>
-          <a:srcRect/>
-          <a:stretch/>
+          <a:stretch>
+            <a:fillRect/>
+          </a:stretch>
         </p:blipFill>
         <p:spPr>
           <a:xfrm>
-            <a:off x="86" y="0"/>
-            <a:ext cx="6857828" cy="12191695"/>
+            <a:off x="0" y="0"/>
+            <a:ext cx="6858000" cy="12193200"/>
           </a:xfrm>
           <a:prstGeom prst="rect">
             <a:avLst/>
@@ -6241,31 +5844,33 @@
       </p:pic>
       <p:sp>
         <p:nvSpPr>
-          <p:cNvPr id="7" name="TextBox 6"/>
-          <p:cNvSpPr txBox="1"/>
-          <p:nvPr/>
-        </p:nvSpPr>
-        <p:spPr>
-          <a:xfrm>
-            <a:off x="914400" y="5852013"/>
-            <a:ext cx="5029200" cy="711200"/>
-          </a:xfrm>
-          <a:prstGeom prst="rect">
-            <a:avLst/>
-          </a:prstGeom>
-          <a:noFill/>
-        </p:spPr>
-        <p:txBody>
-          <a:bodyPr wrap="square"/>
-          <a:lstStyle/>
-          <a:p>
-            <a:r>
-              <a:rPr sz="7100" dirty="0" err="1">
+          <p:cNvPr id="3" name="TextBox 2"/>
+          <p:cNvSpPr txBox="1"/>
+          <p:nvPr/>
+        </p:nvSpPr>
+        <p:spPr>
+          <a:xfrm>
+            <a:off x="914400" y="5682479"/>
+            <a:ext cx="5760000" cy="883920"/>
+          </a:xfrm>
+          <a:prstGeom prst="rect">
+            <a:avLst/>
+          </a:prstGeom>
+          <a:noFill/>
+        </p:spPr>
+        <p:txBody>
+          <a:bodyPr wrap="none">
+            <a:noAutofit/>
+          </a:bodyPr>
+          <a:lstStyle/>
+          <a:p>
+            <a:r>
+              <a:rPr sz="4800" dirty="0" err="1">
                 <a:latin typeface="华康少女文字W5(P)"/>
               </a:rPr>
               <a:t>结婚之后嘛</a:t>
             </a:r>
-            <a:endParaRPr sz="7100" dirty="0">
+            <a:endParaRPr sz="4800" dirty="0">
               <a:latin typeface="华康少女文字W5(P)"/>
             </a:endParaRPr>
           </a:p>
@@ -6273,37 +5878,33 @@
       </p:sp>
       <p:sp>
         <p:nvSpPr>
-          <p:cNvPr id="8" name="TextBox 5">
-            <a:extLst>
-              <a:ext uri="{FF2B5EF4-FFF2-40B4-BE49-F238E27FC236}">
-                <a16:creationId xmlns:a16="http://schemas.microsoft.com/office/drawing/2014/main" id="{94B37CE8-A171-D32E-E3D3-5A974F12DD81}"/>
-              </a:ext>
-            </a:extLst>
-          </p:cNvPr>
+          <p:cNvPr id="4" name="TextBox 3"/>
           <p:cNvSpPr txBox="1"/>
           <p:nvPr/>
         </p:nvSpPr>
         <p:spPr>
           <a:xfrm rot="16200000">
-            <a:off x="-3448960" y="2189712"/>
-            <a:ext cx="6705600" cy="619002"/>
-          </a:xfrm>
-          <a:prstGeom prst="rect">
-            <a:avLst/>
-          </a:prstGeom>
-          <a:noFill/>
-        </p:spPr>
-        <p:txBody>
-          <a:bodyPr wrap="square"/>
-          <a:lstStyle/>
-          <a:p>
-            <a:r>
-              <a:rPr sz="8800" dirty="0" err="1">
+            <a:off x="-2407560" y="2603670"/>
+            <a:ext cx="5760000" cy="883920"/>
+          </a:xfrm>
+          <a:prstGeom prst="rect">
+            <a:avLst/>
+          </a:prstGeom>
+          <a:noFill/>
+        </p:spPr>
+        <p:txBody>
+          <a:bodyPr wrap="none">
+            <a:noAutofit/>
+          </a:bodyPr>
+          <a:lstStyle/>
+          <a:p>
+            <a:r>
+              <a:rPr sz="4800" dirty="0" err="1">
                 <a:latin typeface="华康少女文字W5(P)"/>
               </a:rPr>
               <a:t>她说</a:t>
             </a:r>
-            <a:endParaRPr sz="8800" dirty="0">
+            <a:endParaRPr sz="4800" dirty="0">
               <a:latin typeface="华康少女文字W5(P)"/>
             </a:endParaRPr>
           </a:p>
@@ -6311,37 +5912,33 @@
       </p:sp>
       <p:sp>
         <p:nvSpPr>
-          <p:cNvPr id="9" name="TextBox 4">
-            <a:extLst>
-              <a:ext uri="{FF2B5EF4-FFF2-40B4-BE49-F238E27FC236}">
-                <a16:creationId xmlns:a16="http://schemas.microsoft.com/office/drawing/2014/main" id="{AD926982-4142-F1C7-BA0C-72E90975214E}"/>
-              </a:ext>
-            </a:extLst>
-          </p:cNvPr>
+          <p:cNvPr id="5" name="TextBox 4"/>
           <p:cNvSpPr txBox="1"/>
           <p:nvPr/>
         </p:nvSpPr>
         <p:spPr>
           <a:xfrm rot="16200000">
-            <a:off x="-6482440" y="248825"/>
-            <a:ext cx="10189025" cy="1017347"/>
-          </a:xfrm>
-          <a:prstGeom prst="rect">
-            <a:avLst/>
-          </a:prstGeom>
-          <a:noFill/>
-        </p:spPr>
-        <p:txBody>
-          <a:bodyPr wrap="square"/>
-          <a:lstStyle/>
-          <a:p>
-            <a:r>
-              <a:rPr sz="8800" dirty="0" err="1">
+            <a:off x="-3211927" y="2683222"/>
+            <a:ext cx="5760000" cy="724814"/>
+          </a:xfrm>
+          <a:prstGeom prst="rect">
+            <a:avLst/>
+          </a:prstGeom>
+          <a:noFill/>
+        </p:spPr>
+        <p:txBody>
+          <a:bodyPr wrap="none">
+            <a:noAutofit/>
+          </a:bodyPr>
+          <a:lstStyle/>
+          <a:p>
+            <a:r>
+              <a:rPr sz="3936" dirty="0" err="1">
                 <a:latin typeface="华康少女文字W5(P)"/>
               </a:rPr>
               <a:t>我觉得</a:t>
             </a:r>
-            <a:endParaRPr sz="8800" dirty="0">
+            <a:endParaRPr sz="3936" dirty="0">
               <a:latin typeface="华康少女文字W5(P)"/>
             </a:endParaRPr>
           </a:p>
@@ -6349,37 +5946,33 @@
       </p:sp>
       <p:sp>
         <p:nvSpPr>
-          <p:cNvPr id="10" name="TextBox 3">
-            <a:extLst>
-              <a:ext uri="{FF2B5EF4-FFF2-40B4-BE49-F238E27FC236}">
-                <a16:creationId xmlns:a16="http://schemas.microsoft.com/office/drawing/2014/main" id="{216C4E33-E3C8-6F05-E678-F74FC14DB0AD}"/>
-              </a:ext>
-            </a:extLst>
-          </p:cNvPr>
+          <p:cNvPr id="6" name="TextBox 5"/>
           <p:cNvSpPr txBox="1"/>
           <p:nvPr/>
         </p:nvSpPr>
         <p:spPr>
           <a:xfrm rot="16200000">
-            <a:off x="-8065993" y="248822"/>
-            <a:ext cx="10189025" cy="1017347"/>
-          </a:xfrm>
-          <a:prstGeom prst="rect">
-            <a:avLst/>
-          </a:prstGeom>
-          <a:noFill/>
-        </p:spPr>
-        <p:txBody>
-          <a:bodyPr wrap="square"/>
-          <a:lstStyle/>
-          <a:p>
-            <a:r>
-              <a:rPr sz="8000" dirty="0" err="1">
+            <a:off x="-3871508" y="2748456"/>
+            <a:ext cx="5760000" cy="594347"/>
+          </a:xfrm>
+          <a:prstGeom prst="rect">
+            <a:avLst/>
+          </a:prstGeom>
+          <a:noFill/>
+        </p:spPr>
+        <p:txBody>
+          <a:bodyPr wrap="none">
+            <a:noAutofit/>
+          </a:bodyPr>
+          <a:lstStyle/>
+          <a:p>
+            <a:r>
+              <a:rPr sz="3227" dirty="0" err="1">
                 <a:latin typeface="华康少女文字W5(P)"/>
               </a:rPr>
               <a:t>讲得很对的</a:t>
             </a:r>
-            <a:endParaRPr sz="8000" dirty="0">
+            <a:endParaRPr sz="3227" dirty="0">
               <a:latin typeface="华康少女文字W5(P)"/>
             </a:endParaRPr>
           </a:p>
@@ -6387,32 +5980,28 @@
       </p:sp>
       <p:sp>
         <p:nvSpPr>
-          <p:cNvPr id="11" name="TextBox 2">
-            <a:extLst>
-              <a:ext uri="{FF2B5EF4-FFF2-40B4-BE49-F238E27FC236}">
-                <a16:creationId xmlns:a16="http://schemas.microsoft.com/office/drawing/2014/main" id="{26D16C84-8313-3855-7350-8B1ACD6E5EAB}"/>
-              </a:ext>
-            </a:extLst>
-          </p:cNvPr>
+          <p:cNvPr id="7" name="TextBox 6"/>
           <p:cNvSpPr txBox="1"/>
           <p:nvPr/>
         </p:nvSpPr>
         <p:spPr>
           <a:xfrm rot="16200000">
-            <a:off x="-9270198" y="248825"/>
-            <a:ext cx="10189025" cy="1017347"/>
-          </a:xfrm>
-          <a:prstGeom prst="rect">
-            <a:avLst/>
-          </a:prstGeom>
-          <a:noFill/>
-        </p:spPr>
-        <p:txBody>
-          <a:bodyPr wrap="square"/>
-          <a:lstStyle/>
-          <a:p>
-            <a:r>
-              <a:rPr sz="6000" dirty="0" err="1">
+            <a:off x="-4412364" y="2801947"/>
+            <a:ext cx="5760000" cy="487365"/>
+          </a:xfrm>
+          <a:prstGeom prst="rect">
+            <a:avLst/>
+          </a:prstGeom>
+          <a:noFill/>
+        </p:spPr>
+        <p:txBody>
+          <a:bodyPr wrap="none">
+            <a:noAutofit/>
+          </a:bodyPr>
+          <a:lstStyle/>
+          <a:p>
+            <a:r>
+              <a:rPr sz="2646" dirty="0" err="1">
                 <a:solidFill>
                   <a:srgbClr val="FF6B35"/>
                 </a:solidFill>
@@ -6421,12 +6010,12 @@
               <a:t>张爱玲</a:t>
             </a:r>
             <a:r>
-              <a:rPr sz="6000" dirty="0" err="1">
+              <a:rPr sz="2646" dirty="0" err="1">
                 <a:latin typeface="华康少女文字W5(P)"/>
               </a:rPr>
               <a:t>有一句话</a:t>
             </a:r>
-            <a:endParaRPr sz="6000" dirty="0">
+            <a:endParaRPr sz="2646" dirty="0">
               <a:latin typeface="华康少女文字W5(P)"/>
             </a:endParaRPr>
           </a:p>
@@ -6437,43 +6026,6 @@
   <p:clrMapOvr>
     <a:masterClrMapping/>
   </p:clrMapOvr>
-  <p:transition advTm="6240"/>
-  <p:timing>
-    <p:tnLst>
-      <p:par>
-        <p:cTn id="1" dur="indefinite" restart="never" nodeType="tmRoot">
-          <p:stCondLst>
-            <p:cond delay="0"/>
-          </p:stCondLst>
-          <p:childTnLst>
-            <p:par>
-              <p:cTn id="2" fill="hold">
-                <p:stCondLst>
-                  <p:cond delay="0"/>
-                </p:stCondLst>
-                <p:childTnLst>
-                  <p:par>
-                    <p:cTn id="3" dur="500" fill="hold">
-                      <p:childTnLst>
-                        <p:animEffect transition="in">
-                          <p:cBhvr>
-                            <p:cTn id="4" dur="500"/>
-                            <p:tgtEl>
-                              <p:spTgt spid="7"/>
-                            </p:tgtEl>
-                          </p:cBhvr>
-                        </p:animEffect>
-                      </p:childTnLst>
-                    </p:cTn>
-                  </p:par>
-                </p:childTnLst>
-              </p:cTn>
-            </p:par>
-          </p:childTnLst>
-        </p:cTn>
-      </p:par>
-    </p:tnLst>
-  </p:timing>
 </p:sld>
 </file>
 
@@ -6496,7 +6048,7 @@
       </p:grpSpPr>
       <p:pic>
         <p:nvPicPr>
-          <p:cNvPr id="2" name="Picture 1"/>
+          <p:cNvPr id="2" name="Picture 1" descr="image.jpg"/>
           <p:cNvPicPr>
             <a:picLocks noChangeAspect="1"/>
           </p:cNvPicPr>
@@ -6504,13 +6056,14 @@
         </p:nvPicPr>
         <p:blipFill>
           <a:blip r:embed="rId2"/>
-          <a:srcRect/>
-          <a:stretch/>
+          <a:stretch>
+            <a:fillRect/>
+          </a:stretch>
         </p:blipFill>
         <p:spPr>
           <a:xfrm>
-            <a:off x="86" y="0"/>
-            <a:ext cx="6857828" cy="12191695"/>
+            <a:off x="0" y="0"/>
+            <a:ext cx="6858000" cy="12193200"/>
           </a:xfrm>
           <a:prstGeom prst="rect">
             <a:avLst/>
@@ -6519,32 +6072,34 @@
       </p:pic>
       <p:sp>
         <p:nvSpPr>
-          <p:cNvPr id="8" name="TextBox 7"/>
-          <p:cNvSpPr txBox="1"/>
-          <p:nvPr/>
-        </p:nvSpPr>
-        <p:spPr>
-          <a:xfrm>
-            <a:off x="914400" y="5852013"/>
-            <a:ext cx="5029200" cy="711200"/>
-          </a:xfrm>
-          <a:prstGeom prst="rect">
-            <a:avLst/>
-          </a:prstGeom>
-          <a:noFill/>
-        </p:spPr>
-        <p:txBody>
-          <a:bodyPr wrap="square"/>
-          <a:lstStyle/>
-          <a:p>
-            <a:r>
-              <a:rPr sz="7100" dirty="0" err="1">
+          <p:cNvPr id="3" name="TextBox 2"/>
+          <p:cNvSpPr txBox="1"/>
+          <p:nvPr/>
+        </p:nvSpPr>
+        <p:spPr>
+          <a:xfrm>
+            <a:off x="914399" y="5682479"/>
+            <a:ext cx="5760000" cy="883920"/>
+          </a:xfrm>
+          <a:prstGeom prst="rect">
+            <a:avLst/>
+          </a:prstGeom>
+          <a:noFill/>
+        </p:spPr>
+        <p:txBody>
+          <a:bodyPr wrap="none">
+            <a:noAutofit/>
+          </a:bodyPr>
+          <a:lstStyle/>
+          <a:p>
+            <a:r>
+              <a:rPr sz="4800" dirty="0" err="1">
                 <a:latin typeface="华康少女文字W5(P)"/>
               </a:rPr>
               <a:t>谁</a:t>
             </a:r>
             <a:r>
-              <a:rPr sz="7100" dirty="0" err="1">
+              <a:rPr sz="4800" dirty="0" err="1">
                 <a:solidFill>
                   <a:srgbClr val="FF0000"/>
                 </a:solidFill>
@@ -6552,7 +6107,7 @@
               </a:rPr>
               <a:t>不讲道理</a:t>
             </a:r>
-            <a:endParaRPr sz="7100" dirty="0">
+            <a:endParaRPr sz="4800" dirty="0">
               <a:solidFill>
                 <a:srgbClr val="FF0000"/>
               </a:solidFill>
@@ -6563,10 +6118,44 @@
       </p:sp>
       <p:sp>
         <p:nvSpPr>
-          <p:cNvPr id="9" name="TextBox 6">
+          <p:cNvPr id="4" name="TextBox 3"/>
+          <p:cNvSpPr txBox="1"/>
+          <p:nvPr/>
+        </p:nvSpPr>
+        <p:spPr>
+          <a:xfrm>
+            <a:off x="914399" y="4831665"/>
+            <a:ext cx="5760000" cy="724814"/>
+          </a:xfrm>
+          <a:prstGeom prst="rect">
+            <a:avLst/>
+          </a:prstGeom>
+          <a:noFill/>
+        </p:spPr>
+        <p:txBody>
+          <a:bodyPr wrap="none">
+            <a:noAutofit/>
+          </a:bodyPr>
+          <a:lstStyle/>
+          <a:p>
+            <a:r>
+              <a:rPr sz="3936" dirty="0" err="1">
+                <a:latin typeface="华康少女文字W5(P)"/>
+              </a:rPr>
+              <a:t>结婚之后嘛</a:t>
+            </a:r>
+            <a:endParaRPr sz="3936" dirty="0">
+              <a:latin typeface="华康少女文字W5(P)"/>
+            </a:endParaRPr>
+          </a:p>
+        </p:txBody>
+      </p:sp>
+      <p:sp>
+        <p:nvSpPr>
+          <p:cNvPr id="13" name="TextBox 3">
             <a:extLst>
               <a:ext uri="{FF2B5EF4-FFF2-40B4-BE49-F238E27FC236}">
-                <a16:creationId xmlns:a16="http://schemas.microsoft.com/office/drawing/2014/main" id="{B354585A-8C2A-2BB1-25AF-8576626ED6A5}"/>
+                <a16:creationId xmlns:a16="http://schemas.microsoft.com/office/drawing/2014/main" id="{7C5066CC-CF65-E3CC-CF2A-A9B0B59535C7}"/>
               </a:ext>
             </a:extLst>
           </p:cNvPr>
@@ -6574,26 +6163,28 @@
           <p:nvPr/>
         </p:nvSpPr>
         <p:spPr>
-          <a:xfrm>
-            <a:off x="914400" y="4643704"/>
-            <a:ext cx="5029200" cy="711200"/>
-          </a:xfrm>
-          <a:prstGeom prst="rect">
-            <a:avLst/>
-          </a:prstGeom>
-          <a:noFill/>
-        </p:spPr>
-        <p:txBody>
-          <a:bodyPr wrap="square"/>
-          <a:lstStyle/>
-          <a:p>
-            <a:r>
-              <a:rPr sz="7100" dirty="0" err="1">
-                <a:latin typeface="华康少女文字W5(P)"/>
-              </a:rPr>
-              <a:t>结婚之后嘛</a:t>
-            </a:r>
-            <a:endParaRPr sz="7100" dirty="0">
+          <a:xfrm rot="16200000">
+            <a:off x="-2407560" y="1596281"/>
+            <a:ext cx="5760000" cy="883920"/>
+          </a:xfrm>
+          <a:prstGeom prst="rect">
+            <a:avLst/>
+          </a:prstGeom>
+          <a:noFill/>
+        </p:spPr>
+        <p:txBody>
+          <a:bodyPr wrap="none">
+            <a:noAutofit/>
+          </a:bodyPr>
+          <a:lstStyle/>
+          <a:p>
+            <a:r>
+              <a:rPr sz="4800" dirty="0" err="1">
+                <a:latin typeface="华康少女文字W5(P)"/>
+              </a:rPr>
+              <a:t>她说</a:t>
+            </a:r>
+            <a:endParaRPr sz="4800" dirty="0">
               <a:latin typeface="华康少女文字W5(P)"/>
             </a:endParaRPr>
           </a:p>
@@ -6601,10 +6192,10 @@
       </p:sp>
       <p:sp>
         <p:nvSpPr>
-          <p:cNvPr id="11" name="TextBox 5">
+          <p:cNvPr id="14" name="TextBox 4">
             <a:extLst>
               <a:ext uri="{FF2B5EF4-FFF2-40B4-BE49-F238E27FC236}">
-                <a16:creationId xmlns:a16="http://schemas.microsoft.com/office/drawing/2014/main" id="{7FFB3A80-CDFA-4AB7-8802-A1E18D633E97}"/>
+                <a16:creationId xmlns:a16="http://schemas.microsoft.com/office/drawing/2014/main" id="{B3A2F60E-594F-962F-8400-6E7050879601}"/>
               </a:ext>
             </a:extLst>
           </p:cNvPr>
@@ -6613,25 +6204,27 @@
         </p:nvSpPr>
         <p:spPr>
           <a:xfrm rot="16200000">
-            <a:off x="-3448960" y="981403"/>
-            <a:ext cx="6705600" cy="619002"/>
-          </a:xfrm>
-          <a:prstGeom prst="rect">
-            <a:avLst/>
-          </a:prstGeom>
-          <a:noFill/>
-        </p:spPr>
-        <p:txBody>
-          <a:bodyPr wrap="square"/>
-          <a:lstStyle/>
-          <a:p>
-            <a:r>
-              <a:rPr sz="8800" dirty="0" err="1">
-                <a:latin typeface="华康少女文字W5(P)"/>
-              </a:rPr>
-              <a:t>她说</a:t>
-            </a:r>
-            <a:endParaRPr sz="8800" dirty="0">
+            <a:off x="-3211927" y="1675833"/>
+            <a:ext cx="5760000" cy="724814"/>
+          </a:xfrm>
+          <a:prstGeom prst="rect">
+            <a:avLst/>
+          </a:prstGeom>
+          <a:noFill/>
+        </p:spPr>
+        <p:txBody>
+          <a:bodyPr wrap="none">
+            <a:noAutofit/>
+          </a:bodyPr>
+          <a:lstStyle/>
+          <a:p>
+            <a:r>
+              <a:rPr sz="3936" dirty="0" err="1">
+                <a:latin typeface="华康少女文字W5(P)"/>
+              </a:rPr>
+              <a:t>我觉得</a:t>
+            </a:r>
+            <a:endParaRPr sz="3936" dirty="0">
               <a:latin typeface="华康少女文字W5(P)"/>
             </a:endParaRPr>
           </a:p>
@@ -6639,10 +6232,10 @@
       </p:sp>
       <p:sp>
         <p:nvSpPr>
-          <p:cNvPr id="12" name="TextBox 4">
+          <p:cNvPr id="15" name="TextBox 5">
             <a:extLst>
               <a:ext uri="{FF2B5EF4-FFF2-40B4-BE49-F238E27FC236}">
-                <a16:creationId xmlns:a16="http://schemas.microsoft.com/office/drawing/2014/main" id="{D795603C-3791-D7B6-7E9E-F41CC4D44D74}"/>
+                <a16:creationId xmlns:a16="http://schemas.microsoft.com/office/drawing/2014/main" id="{2D660372-2814-74D5-0807-629208924454}"/>
               </a:ext>
             </a:extLst>
           </p:cNvPr>
@@ -6651,25 +6244,27 @@
         </p:nvSpPr>
         <p:spPr>
           <a:xfrm rot="16200000">
-            <a:off x="-6482440" y="-959484"/>
-            <a:ext cx="10189025" cy="1017347"/>
-          </a:xfrm>
-          <a:prstGeom prst="rect">
-            <a:avLst/>
-          </a:prstGeom>
-          <a:noFill/>
-        </p:spPr>
-        <p:txBody>
-          <a:bodyPr wrap="square"/>
-          <a:lstStyle/>
-          <a:p>
-            <a:r>
-              <a:rPr sz="8800" dirty="0" err="1">
-                <a:latin typeface="华康少女文字W5(P)"/>
-              </a:rPr>
-              <a:t>我觉得</a:t>
-            </a:r>
-            <a:endParaRPr sz="8800" dirty="0">
+            <a:off x="-3871508" y="1741067"/>
+            <a:ext cx="5760000" cy="594347"/>
+          </a:xfrm>
+          <a:prstGeom prst="rect">
+            <a:avLst/>
+          </a:prstGeom>
+          <a:noFill/>
+        </p:spPr>
+        <p:txBody>
+          <a:bodyPr wrap="none">
+            <a:noAutofit/>
+          </a:bodyPr>
+          <a:lstStyle/>
+          <a:p>
+            <a:r>
+              <a:rPr sz="3227" dirty="0" err="1">
+                <a:latin typeface="华康少女文字W5(P)"/>
+              </a:rPr>
+              <a:t>讲得很对的</a:t>
+            </a:r>
+            <a:endParaRPr sz="3227" dirty="0">
               <a:latin typeface="华康少女文字W5(P)"/>
             </a:endParaRPr>
           </a:p>
@@ -6677,10 +6272,10 @@
       </p:sp>
       <p:sp>
         <p:nvSpPr>
-          <p:cNvPr id="13" name="TextBox 3">
+          <p:cNvPr id="16" name="TextBox 6">
             <a:extLst>
               <a:ext uri="{FF2B5EF4-FFF2-40B4-BE49-F238E27FC236}">
-                <a16:creationId xmlns:a16="http://schemas.microsoft.com/office/drawing/2014/main" id="{1ED2F9A3-B0E7-D096-24D8-35B5BEC4106C}"/>
+                <a16:creationId xmlns:a16="http://schemas.microsoft.com/office/drawing/2014/main" id="{528F71F9-FF2B-2E16-D110-77DDCAEC4FC4}"/>
               </a:ext>
             </a:extLst>
           </p:cNvPr>
@@ -6689,58 +6284,22 @@
         </p:nvSpPr>
         <p:spPr>
           <a:xfrm rot="16200000">
-            <a:off x="-8065993" y="-959487"/>
-            <a:ext cx="10189025" cy="1017347"/>
-          </a:xfrm>
-          <a:prstGeom prst="rect">
-            <a:avLst/>
-          </a:prstGeom>
-          <a:noFill/>
-        </p:spPr>
-        <p:txBody>
-          <a:bodyPr wrap="square"/>
-          <a:lstStyle/>
-          <a:p>
-            <a:r>
-              <a:rPr sz="8000" dirty="0" err="1">
-                <a:latin typeface="华康少女文字W5(P)"/>
-              </a:rPr>
-              <a:t>讲得很对的</a:t>
-            </a:r>
-            <a:endParaRPr sz="8000" dirty="0">
-              <a:latin typeface="华康少女文字W5(P)"/>
-            </a:endParaRPr>
-          </a:p>
-        </p:txBody>
-      </p:sp>
-      <p:sp>
-        <p:nvSpPr>
-          <p:cNvPr id="14" name="TextBox 2">
-            <a:extLst>
-              <a:ext uri="{FF2B5EF4-FFF2-40B4-BE49-F238E27FC236}">
-                <a16:creationId xmlns:a16="http://schemas.microsoft.com/office/drawing/2014/main" id="{E718FF4B-9F10-8262-F7C3-6A8E4FDD65F5}"/>
-              </a:ext>
-            </a:extLst>
-          </p:cNvPr>
-          <p:cNvSpPr txBox="1"/>
-          <p:nvPr/>
-        </p:nvSpPr>
-        <p:spPr>
-          <a:xfrm rot="16200000">
-            <a:off x="-9270198" y="-959484"/>
-            <a:ext cx="10189025" cy="1017347"/>
-          </a:xfrm>
-          <a:prstGeom prst="rect">
-            <a:avLst/>
-          </a:prstGeom>
-          <a:noFill/>
-        </p:spPr>
-        <p:txBody>
-          <a:bodyPr wrap="square"/>
-          <a:lstStyle/>
-          <a:p>
-            <a:r>
-              <a:rPr sz="6000" dirty="0" err="1">
+            <a:off x="-4412364" y="1794558"/>
+            <a:ext cx="5760000" cy="487365"/>
+          </a:xfrm>
+          <a:prstGeom prst="rect">
+            <a:avLst/>
+          </a:prstGeom>
+          <a:noFill/>
+        </p:spPr>
+        <p:txBody>
+          <a:bodyPr wrap="none">
+            <a:noAutofit/>
+          </a:bodyPr>
+          <a:lstStyle/>
+          <a:p>
+            <a:r>
+              <a:rPr sz="2646" dirty="0" err="1">
                 <a:solidFill>
                   <a:srgbClr val="FF6B35"/>
                 </a:solidFill>
@@ -6749,12 +6308,12 @@
               <a:t>张爱玲</a:t>
             </a:r>
             <a:r>
-              <a:rPr sz="6000" dirty="0" err="1">
+              <a:rPr sz="2646" dirty="0" err="1">
                 <a:latin typeface="华康少女文字W5(P)"/>
               </a:rPr>
               <a:t>有一句话</a:t>
             </a:r>
-            <a:endParaRPr sz="6000" dirty="0">
+            <a:endParaRPr sz="2646" dirty="0">
               <a:latin typeface="华康少女文字W5(P)"/>
             </a:endParaRPr>
           </a:p>
@@ -6765,43 +6324,6 @@
   <p:clrMapOvr>
     <a:masterClrMapping/>
   </p:clrMapOvr>
-  <p:transition advTm="7840"/>
-  <p:timing>
-    <p:tnLst>
-      <p:par>
-        <p:cTn id="1" dur="indefinite" restart="never" nodeType="tmRoot">
-          <p:stCondLst>
-            <p:cond delay="0"/>
-          </p:stCondLst>
-          <p:childTnLst>
-            <p:par>
-              <p:cTn id="2" fill="hold">
-                <p:stCondLst>
-                  <p:cond delay="0"/>
-                </p:stCondLst>
-                <p:childTnLst>
-                  <p:par>
-                    <p:cTn id="3" dur="500" fill="hold">
-                      <p:childTnLst>
-                        <p:animEffect transition="in">
-                          <p:cBhvr>
-                            <p:cTn id="4" dur="500"/>
-                            <p:tgtEl>
-                              <p:spTgt spid="8"/>
-                            </p:tgtEl>
-                          </p:cBhvr>
-                        </p:animEffect>
-                      </p:childTnLst>
-                    </p:cTn>
-                  </p:par>
-                </p:childTnLst>
-              </p:cTn>
-            </p:par>
-          </p:childTnLst>
-        </p:cTn>
-      </p:par>
-    </p:tnLst>
-  </p:timing>
 </p:sld>
 </file>
 
@@ -6824,7 +6346,7 @@
       </p:grpSpPr>
       <p:pic>
         <p:nvPicPr>
-          <p:cNvPr id="2" name="Picture 1"/>
+          <p:cNvPr id="2" name="Picture 1" descr="image.jpg"/>
           <p:cNvPicPr>
             <a:picLocks noChangeAspect="1"/>
           </p:cNvPicPr>
@@ -6832,13 +6354,14 @@
         </p:nvPicPr>
         <p:blipFill>
           <a:blip r:embed="rId2"/>
-          <a:srcRect/>
-          <a:stretch/>
+          <a:stretch>
+            <a:fillRect/>
+          </a:stretch>
         </p:blipFill>
         <p:spPr>
           <a:xfrm>
-            <a:off x="86" y="0"/>
-            <a:ext cx="6857828" cy="12191695"/>
+            <a:off x="0" y="0"/>
+            <a:ext cx="6858000" cy="12193200"/>
           </a:xfrm>
           <a:prstGeom prst="rect">
             <a:avLst/>
@@ -6847,31 +6370,33 @@
       </p:pic>
       <p:sp>
         <p:nvSpPr>
-          <p:cNvPr id="9" name="TextBox 8"/>
-          <p:cNvSpPr txBox="1"/>
-          <p:nvPr/>
-        </p:nvSpPr>
-        <p:spPr>
-          <a:xfrm>
-            <a:off x="914399" y="5670451"/>
-            <a:ext cx="7260127" cy="892762"/>
-          </a:xfrm>
-          <a:prstGeom prst="rect">
-            <a:avLst/>
-          </a:prstGeom>
-          <a:noFill/>
-        </p:spPr>
-        <p:txBody>
-          <a:bodyPr wrap="square"/>
-          <a:lstStyle/>
-          <a:p>
-            <a:r>
-              <a:rPr sz="8800" dirty="0" err="1">
+          <p:cNvPr id="3" name="TextBox 2"/>
+          <p:cNvSpPr txBox="1"/>
+          <p:nvPr/>
+        </p:nvSpPr>
+        <p:spPr>
+          <a:xfrm>
+            <a:off x="914399" y="5682479"/>
+            <a:ext cx="5760000" cy="883920"/>
+          </a:xfrm>
+          <a:prstGeom prst="rect">
+            <a:avLst/>
+          </a:prstGeom>
+          <a:noFill/>
+        </p:spPr>
+        <p:txBody>
+          <a:bodyPr wrap="none">
+            <a:noAutofit/>
+          </a:bodyPr>
+          <a:lstStyle/>
+          <a:p>
+            <a:r>
+              <a:rPr sz="4800" dirty="0" err="1">
                 <a:latin typeface="华康少女文字W5(P)"/>
               </a:rPr>
               <a:t>谁占上风</a:t>
             </a:r>
-            <a:endParaRPr sz="8800" dirty="0">
+            <a:endParaRPr sz="4800" dirty="0">
               <a:latin typeface="华康少女文字W5(P)"/>
             </a:endParaRPr>
           </a:p>
@@ -6879,38 +6404,34 @@
       </p:sp>
       <p:sp>
         <p:nvSpPr>
-          <p:cNvPr id="10" name="TextBox 7">
-            <a:extLst>
-              <a:ext uri="{FF2B5EF4-FFF2-40B4-BE49-F238E27FC236}">
-                <a16:creationId xmlns:a16="http://schemas.microsoft.com/office/drawing/2014/main" id="{F5975DA5-F5AB-A259-2C33-0A6C0FE1C52B}"/>
-              </a:ext>
-            </a:extLst>
-          </p:cNvPr>
-          <p:cNvSpPr txBox="1"/>
-          <p:nvPr/>
-        </p:nvSpPr>
-        <p:spPr>
-          <a:xfrm>
-            <a:off x="914399" y="4194664"/>
-            <a:ext cx="7260127" cy="892762"/>
-          </a:xfrm>
-          <a:prstGeom prst="rect">
-            <a:avLst/>
-          </a:prstGeom>
-          <a:noFill/>
-        </p:spPr>
-        <p:txBody>
-          <a:bodyPr wrap="square"/>
-          <a:lstStyle/>
-          <a:p>
-            <a:r>
-              <a:rPr sz="8000" dirty="0" err="1">
+          <p:cNvPr id="4" name="TextBox 3"/>
+          <p:cNvSpPr txBox="1"/>
+          <p:nvPr/>
+        </p:nvSpPr>
+        <p:spPr>
+          <a:xfrm>
+            <a:off x="914399" y="4831665"/>
+            <a:ext cx="5760000" cy="724814"/>
+          </a:xfrm>
+          <a:prstGeom prst="rect">
+            <a:avLst/>
+          </a:prstGeom>
+          <a:noFill/>
+        </p:spPr>
+        <p:txBody>
+          <a:bodyPr wrap="none">
+            <a:noAutofit/>
+          </a:bodyPr>
+          <a:lstStyle/>
+          <a:p>
+            <a:r>
+              <a:rPr sz="3936" dirty="0" err="1">
                 <a:latin typeface="华康少女文字W5(P)"/>
               </a:rPr>
               <a:t>谁</a:t>
             </a:r>
             <a:r>
-              <a:rPr sz="8000" dirty="0" err="1">
+              <a:rPr sz="3936" dirty="0" err="1">
                 <a:solidFill>
                   <a:srgbClr val="FF0000"/>
                 </a:solidFill>
@@ -6918,7 +6439,7 @@
               </a:rPr>
               <a:t>不讲道理</a:t>
             </a:r>
-            <a:endParaRPr sz="8000" dirty="0">
+            <a:endParaRPr sz="3936" dirty="0">
               <a:solidFill>
                 <a:srgbClr val="FF0000"/>
               </a:solidFill>
@@ -6929,10 +6450,44 @@
       </p:sp>
       <p:sp>
         <p:nvSpPr>
-          <p:cNvPr id="11" name="TextBox 6">
+          <p:cNvPr id="5" name="TextBox 4"/>
+          <p:cNvSpPr txBox="1"/>
+          <p:nvPr/>
+        </p:nvSpPr>
+        <p:spPr>
+          <a:xfrm>
+            <a:off x="914399" y="4111317"/>
+            <a:ext cx="5760000" cy="594347"/>
+          </a:xfrm>
+          <a:prstGeom prst="rect">
+            <a:avLst/>
+          </a:prstGeom>
+          <a:noFill/>
+        </p:spPr>
+        <p:txBody>
+          <a:bodyPr wrap="none">
+            <a:noAutofit/>
+          </a:bodyPr>
+          <a:lstStyle/>
+          <a:p>
+            <a:r>
+              <a:rPr sz="3227" dirty="0" err="1">
+                <a:latin typeface="华康少女文字W5(P)"/>
+              </a:rPr>
+              <a:t>结婚之后嘛</a:t>
+            </a:r>
+            <a:endParaRPr sz="3227" dirty="0">
+              <a:latin typeface="华康少女文字W5(P)"/>
+            </a:endParaRPr>
+          </a:p>
+        </p:txBody>
+      </p:sp>
+      <p:sp>
+        <p:nvSpPr>
+          <p:cNvPr id="14" name="TextBox 3">
             <a:extLst>
               <a:ext uri="{FF2B5EF4-FFF2-40B4-BE49-F238E27FC236}">
-                <a16:creationId xmlns:a16="http://schemas.microsoft.com/office/drawing/2014/main" id="{46A77D42-DA2A-2AC6-BC3A-6F309080DA3F}"/>
+                <a16:creationId xmlns:a16="http://schemas.microsoft.com/office/drawing/2014/main" id="{7DBA7850-AF35-5D4C-6213-D60CEE8518A3}"/>
               </a:ext>
             </a:extLst>
           </p:cNvPr>
@@ -6940,255 +6495,167 @@
           <p:nvPr/>
         </p:nvSpPr>
         <p:spPr>
-          <a:xfrm>
-            <a:off x="914399" y="2677886"/>
-            <a:ext cx="7260127" cy="892762"/>
-          </a:xfrm>
-          <a:prstGeom prst="rect">
-            <a:avLst/>
-          </a:prstGeom>
-          <a:noFill/>
-        </p:spPr>
-        <p:txBody>
-          <a:bodyPr wrap="square"/>
-          <a:lstStyle/>
-          <a:p>
-            <a:r>
-              <a:rPr sz="8000" dirty="0" err="1">
-                <a:latin typeface="华康少女文字W5(P)"/>
-              </a:rPr>
-              <a:t>结婚之后嘛</a:t>
-            </a:r>
-            <a:endParaRPr sz="8000" dirty="0">
+          <a:xfrm rot="16200000">
+            <a:off x="-2407560" y="883363"/>
+            <a:ext cx="5760000" cy="883920"/>
+          </a:xfrm>
+          <a:prstGeom prst="rect">
+            <a:avLst/>
+          </a:prstGeom>
+          <a:noFill/>
+        </p:spPr>
+        <p:txBody>
+          <a:bodyPr wrap="none">
+            <a:noAutofit/>
+          </a:bodyPr>
+          <a:lstStyle/>
+          <a:p>
+            <a:r>
+              <a:rPr sz="4800" dirty="0" err="1">
+                <a:latin typeface="华康少女文字W5(P)"/>
+              </a:rPr>
+              <a:t>她说</a:t>
+            </a:r>
+            <a:endParaRPr sz="4800" dirty="0">
               <a:latin typeface="华康少女文字W5(P)"/>
             </a:endParaRPr>
           </a:p>
         </p:txBody>
       </p:sp>
-      <p:grpSp>
-        <p:nvGrpSpPr>
-          <p:cNvPr id="12" name="组合 11">
+      <p:sp>
+        <p:nvSpPr>
+          <p:cNvPr id="15" name="TextBox 4">
             <a:extLst>
               <a:ext uri="{FF2B5EF4-FFF2-40B4-BE49-F238E27FC236}">
-                <a16:creationId xmlns:a16="http://schemas.microsoft.com/office/drawing/2014/main" id="{50D1AB6B-7D3A-6E7D-1B75-B5488ED4A4CA}"/>
+                <a16:creationId xmlns:a16="http://schemas.microsoft.com/office/drawing/2014/main" id="{1BD4313B-0331-54D5-BF20-851B023DA15A}"/>
               </a:ext>
             </a:extLst>
           </p:cNvPr>
-          <p:cNvGrpSpPr/>
-          <p:nvPr/>
-        </p:nvGrpSpPr>
-        <p:grpSpPr>
+          <p:cNvSpPr txBox="1"/>
+          <p:nvPr/>
+        </p:nvSpPr>
+        <p:spPr>
           <a:xfrm rot="16200000">
-            <a:off x="-8310090" y="-5610551"/>
-            <a:ext cx="10189029" cy="6857830"/>
-            <a:chOff x="914399" y="-1110342"/>
-            <a:chExt cx="10189029" cy="7673556"/>
-          </a:xfrm>
-        </p:grpSpPr>
-        <p:sp>
-          <p:nvSpPr>
-            <p:cNvPr id="13" name="TextBox 5">
-              <a:extLst>
-                <a:ext uri="{FF2B5EF4-FFF2-40B4-BE49-F238E27FC236}">
-                  <a16:creationId xmlns:a16="http://schemas.microsoft.com/office/drawing/2014/main" id="{3096825D-2808-6846-3B61-21FCABC31A31}"/>
-                </a:ext>
-              </a:extLst>
-            </p:cNvPr>
-            <p:cNvSpPr txBox="1"/>
-            <p:nvPr/>
-          </p:nvSpPr>
-          <p:spPr>
-            <a:xfrm>
-              <a:off x="914399" y="5593382"/>
-              <a:ext cx="6705600" cy="969832"/>
-            </a:xfrm>
-            <a:prstGeom prst="rect">
-              <a:avLst/>
-            </a:prstGeom>
-            <a:noFill/>
-          </p:spPr>
-          <p:txBody>
-            <a:bodyPr wrap="square"/>
-            <a:lstStyle/>
-            <a:p>
-              <a:r>
-                <a:rPr sz="11500" dirty="0" err="1">
-                  <a:latin typeface="华康少女文字W5(P)"/>
-                </a:rPr>
-                <a:t>她说</a:t>
-              </a:r>
-              <a:endParaRPr sz="11500" dirty="0">
-                <a:latin typeface="华康少女文字W5(P)"/>
-              </a:endParaRPr>
-            </a:p>
-          </p:txBody>
-        </p:sp>
-        <p:sp>
-          <p:nvSpPr>
-            <p:cNvPr id="14" name="TextBox 4">
-              <a:extLst>
-                <a:ext uri="{FF2B5EF4-FFF2-40B4-BE49-F238E27FC236}">
-                  <a16:creationId xmlns:a16="http://schemas.microsoft.com/office/drawing/2014/main" id="{3F54BF32-CDB7-8F64-8101-D8FAABA7F197}"/>
-                </a:ext>
-              </a:extLst>
-            </p:cNvPr>
-            <p:cNvSpPr txBox="1"/>
-            <p:nvPr/>
-          </p:nvSpPr>
-          <p:spPr>
-            <a:xfrm>
-              <a:off x="914400" y="3257426"/>
-              <a:ext cx="10189025" cy="1593946"/>
-            </a:xfrm>
-            <a:prstGeom prst="rect">
-              <a:avLst/>
-            </a:prstGeom>
-            <a:noFill/>
-          </p:spPr>
-          <p:txBody>
-            <a:bodyPr wrap="square"/>
-            <a:lstStyle/>
-            <a:p>
-              <a:r>
-                <a:rPr sz="11500" dirty="0" err="1">
-                  <a:latin typeface="华康少女文字W5(P)"/>
-                </a:rPr>
-                <a:t>我觉得</a:t>
-              </a:r>
-              <a:endParaRPr sz="11500" dirty="0">
-                <a:latin typeface="华康少女文字W5(P)"/>
-              </a:endParaRPr>
-            </a:p>
-          </p:txBody>
-        </p:sp>
-        <p:sp>
-          <p:nvSpPr>
-            <p:cNvPr id="15" name="TextBox 3">
-              <a:extLst>
-                <a:ext uri="{FF2B5EF4-FFF2-40B4-BE49-F238E27FC236}">
-                  <a16:creationId xmlns:a16="http://schemas.microsoft.com/office/drawing/2014/main" id="{CC21FB8C-6E73-6B5C-61B7-79D72C00E3BE}"/>
-                </a:ext>
-              </a:extLst>
-            </p:cNvPr>
-            <p:cNvSpPr txBox="1"/>
-            <p:nvPr/>
-          </p:nvSpPr>
-          <p:spPr>
-            <a:xfrm>
-              <a:off x="914403" y="776367"/>
-              <a:ext cx="10189025" cy="1593946"/>
-            </a:xfrm>
-            <a:prstGeom prst="rect">
-              <a:avLst/>
-            </a:prstGeom>
-            <a:noFill/>
-          </p:spPr>
-          <p:txBody>
-            <a:bodyPr wrap="square"/>
-            <a:lstStyle/>
-            <a:p>
-              <a:r>
-                <a:rPr sz="9600" dirty="0" err="1">
-                  <a:latin typeface="华康少女文字W5(P)"/>
-                </a:rPr>
-                <a:t>讲得很对的</a:t>
-              </a:r>
-              <a:endParaRPr sz="9600" dirty="0">
-                <a:latin typeface="华康少女文字W5(P)"/>
-              </a:endParaRPr>
-            </a:p>
-          </p:txBody>
-        </p:sp>
-        <p:sp>
-          <p:nvSpPr>
-            <p:cNvPr id="16" name="TextBox 2">
-              <a:extLst>
-                <a:ext uri="{FF2B5EF4-FFF2-40B4-BE49-F238E27FC236}">
-                  <a16:creationId xmlns:a16="http://schemas.microsoft.com/office/drawing/2014/main" id="{AE084A7A-360C-3AEC-4A85-1028F136EB63}"/>
-                </a:ext>
-              </a:extLst>
-            </p:cNvPr>
-            <p:cNvSpPr txBox="1"/>
-            <p:nvPr/>
-          </p:nvSpPr>
-          <p:spPr>
-            <a:xfrm>
-              <a:off x="914400" y="-1110342"/>
-              <a:ext cx="10189025" cy="1593946"/>
-            </a:xfrm>
-            <a:prstGeom prst="rect">
-              <a:avLst/>
-            </a:prstGeom>
-            <a:noFill/>
-          </p:spPr>
-          <p:txBody>
-            <a:bodyPr wrap="square"/>
-            <a:lstStyle/>
-            <a:p>
-              <a:r>
-                <a:rPr sz="7200" dirty="0" err="1">
-                  <a:solidFill>
-                    <a:srgbClr val="FF6B35"/>
-                  </a:solidFill>
-                  <a:latin typeface="华文行楷"/>
-                </a:rPr>
-                <a:t>张爱玲</a:t>
-              </a:r>
-              <a:r>
-                <a:rPr sz="7200" dirty="0" err="1">
-                  <a:latin typeface="华康少女文字W5(P)"/>
-                </a:rPr>
-                <a:t>有一句话</a:t>
-              </a:r>
-              <a:endParaRPr sz="7200" dirty="0">
-                <a:latin typeface="华康少女文字W5(P)"/>
-              </a:endParaRPr>
-            </a:p>
-          </p:txBody>
-        </p:sp>
-      </p:grpSp>
+            <a:off x="-3211927" y="962915"/>
+            <a:ext cx="5760000" cy="724814"/>
+          </a:xfrm>
+          <a:prstGeom prst="rect">
+            <a:avLst/>
+          </a:prstGeom>
+          <a:noFill/>
+        </p:spPr>
+        <p:txBody>
+          <a:bodyPr wrap="none">
+            <a:noAutofit/>
+          </a:bodyPr>
+          <a:lstStyle/>
+          <a:p>
+            <a:r>
+              <a:rPr sz="3936" dirty="0" err="1">
+                <a:latin typeface="华康少女文字W5(P)"/>
+              </a:rPr>
+              <a:t>我觉得</a:t>
+            </a:r>
+            <a:endParaRPr sz="3936" dirty="0">
+              <a:latin typeface="华康少女文字W5(P)"/>
+            </a:endParaRPr>
+          </a:p>
+        </p:txBody>
+      </p:sp>
+      <p:sp>
+        <p:nvSpPr>
+          <p:cNvPr id="16" name="TextBox 5">
+            <a:extLst>
+              <a:ext uri="{FF2B5EF4-FFF2-40B4-BE49-F238E27FC236}">
+                <a16:creationId xmlns:a16="http://schemas.microsoft.com/office/drawing/2014/main" id="{B36725BD-E230-C2E0-4267-8B47C6AEF5F0}"/>
+              </a:ext>
+            </a:extLst>
+          </p:cNvPr>
+          <p:cNvSpPr txBox="1"/>
+          <p:nvPr/>
+        </p:nvSpPr>
+        <p:spPr>
+          <a:xfrm rot="16200000">
+            <a:off x="-3871508" y="1028149"/>
+            <a:ext cx="5760000" cy="594347"/>
+          </a:xfrm>
+          <a:prstGeom prst="rect">
+            <a:avLst/>
+          </a:prstGeom>
+          <a:noFill/>
+        </p:spPr>
+        <p:txBody>
+          <a:bodyPr wrap="none">
+            <a:noAutofit/>
+          </a:bodyPr>
+          <a:lstStyle/>
+          <a:p>
+            <a:r>
+              <a:rPr sz="3227" dirty="0" err="1">
+                <a:latin typeface="华康少女文字W5(P)"/>
+              </a:rPr>
+              <a:t>讲得很对的</a:t>
+            </a:r>
+            <a:endParaRPr sz="3227" dirty="0">
+              <a:latin typeface="华康少女文字W5(P)"/>
+            </a:endParaRPr>
+          </a:p>
+        </p:txBody>
+      </p:sp>
+      <p:sp>
+        <p:nvSpPr>
+          <p:cNvPr id="17" name="TextBox 6">
+            <a:extLst>
+              <a:ext uri="{FF2B5EF4-FFF2-40B4-BE49-F238E27FC236}">
+                <a16:creationId xmlns:a16="http://schemas.microsoft.com/office/drawing/2014/main" id="{4F48EAB3-1BED-36CC-1BA8-2F0BD538C546}"/>
+              </a:ext>
+            </a:extLst>
+          </p:cNvPr>
+          <p:cNvSpPr txBox="1"/>
+          <p:nvPr/>
+        </p:nvSpPr>
+        <p:spPr>
+          <a:xfrm rot="16200000">
+            <a:off x="-4412364" y="1081640"/>
+            <a:ext cx="5760000" cy="487365"/>
+          </a:xfrm>
+          <a:prstGeom prst="rect">
+            <a:avLst/>
+          </a:prstGeom>
+          <a:noFill/>
+        </p:spPr>
+        <p:txBody>
+          <a:bodyPr wrap="none">
+            <a:noAutofit/>
+          </a:bodyPr>
+          <a:lstStyle/>
+          <a:p>
+            <a:r>
+              <a:rPr sz="2646" dirty="0" err="1">
+                <a:solidFill>
+                  <a:srgbClr val="FF6B35"/>
+                </a:solidFill>
+                <a:latin typeface="华文行楷"/>
+              </a:rPr>
+              <a:t>张爱玲</a:t>
+            </a:r>
+            <a:r>
+              <a:rPr sz="2646" dirty="0" err="1">
+                <a:latin typeface="华康少女文字W5(P)"/>
+              </a:rPr>
+              <a:t>有一句话</a:t>
+            </a:r>
+            <a:endParaRPr sz="2646" dirty="0">
+              <a:latin typeface="华康少女文字W5(P)"/>
+            </a:endParaRPr>
+          </a:p>
+        </p:txBody>
+      </p:sp>
     </p:spTree>
   </p:cSld>
   <p:clrMapOvr>
     <a:masterClrMapping/>
   </p:clrMapOvr>
-  <p:transition advTm="9380"/>
-  <p:timing>
-    <p:tnLst>
-      <p:par>
-        <p:cTn id="1" dur="indefinite" restart="never" nodeType="tmRoot">
-          <p:stCondLst>
-            <p:cond delay="0"/>
-          </p:stCondLst>
-          <p:childTnLst>
-            <p:par>
-              <p:cTn id="2" fill="hold">
-                <p:stCondLst>
-                  <p:cond delay="0"/>
-                </p:stCondLst>
-                <p:childTnLst>
-                  <p:par>
-                    <p:cTn id="3" dur="500" fill="hold">
-                      <p:childTnLst>
-                        <p:animEffect transition="in">
-                          <p:cBhvr>
-                            <p:cTn id="4" dur="500"/>
-                            <p:tgtEl>
-                              <p:spTgt spid="9"/>
-                            </p:tgtEl>
-                          </p:cBhvr>
-                        </p:animEffect>
-                      </p:childTnLst>
-                    </p:cTn>
-                  </p:par>
-                </p:childTnLst>
-              </p:cTn>
-            </p:par>
-          </p:childTnLst>
-        </p:cTn>
-      </p:par>
-    </p:tnLst>
-  </p:timing>
 </p:sld>
 </file>
 
@@ -7211,7 +6678,7 @@
       </p:grpSpPr>
       <p:pic>
         <p:nvPicPr>
-          <p:cNvPr id="2" name="Picture 1"/>
+          <p:cNvPr id="2" name="Picture 1" descr="image.jpg"/>
           <p:cNvPicPr>
             <a:picLocks noChangeAspect="1"/>
           </p:cNvPicPr>
@@ -7219,13 +6686,14 @@
         </p:nvPicPr>
         <p:blipFill>
           <a:blip r:embed="rId2"/>
-          <a:srcRect/>
-          <a:stretch/>
+          <a:stretch>
+            <a:fillRect/>
+          </a:stretch>
         </p:blipFill>
         <p:spPr>
           <a:xfrm>
-            <a:off x="86" y="0"/>
-            <a:ext cx="6857828" cy="12191695"/>
+            <a:off x="0" y="0"/>
+            <a:ext cx="6858000" cy="12193200"/>
           </a:xfrm>
           <a:prstGeom prst="rect">
             <a:avLst/>
@@ -7234,31 +6702,33 @@
       </p:pic>
       <p:sp>
         <p:nvSpPr>
-          <p:cNvPr id="10" name="TextBox 9"/>
-          <p:cNvSpPr txBox="1"/>
-          <p:nvPr/>
-        </p:nvSpPr>
-        <p:spPr>
-          <a:xfrm>
-            <a:off x="914400" y="5852013"/>
-            <a:ext cx="5029200" cy="711200"/>
-          </a:xfrm>
-          <a:prstGeom prst="rect">
-            <a:avLst/>
-          </a:prstGeom>
-          <a:noFill/>
-        </p:spPr>
-        <p:txBody>
-          <a:bodyPr wrap="square"/>
-          <a:lstStyle/>
-          <a:p>
-            <a:r>
-              <a:rPr sz="5900" dirty="0" err="1">
+          <p:cNvPr id="3" name="TextBox 2"/>
+          <p:cNvSpPr txBox="1"/>
+          <p:nvPr/>
+        </p:nvSpPr>
+        <p:spPr>
+          <a:xfrm>
+            <a:off x="914400" y="5682479"/>
+            <a:ext cx="5760000" cy="883920"/>
+          </a:xfrm>
+          <a:prstGeom prst="rect">
+            <a:avLst/>
+          </a:prstGeom>
+          <a:noFill/>
+        </p:spPr>
+        <p:txBody>
+          <a:bodyPr wrap="none">
+            <a:noAutofit/>
+          </a:bodyPr>
+          <a:lstStyle/>
+          <a:p>
+            <a:r>
+              <a:rPr sz="4800" dirty="0" err="1">
                 <a:latin typeface="华康少女文字W5(P)"/>
               </a:rPr>
               <a:t>我们家里那个</a:t>
             </a:r>
-            <a:endParaRPr sz="5900" dirty="0">
+            <a:endParaRPr sz="4800" dirty="0">
               <a:latin typeface="华康少女文字W5(P)"/>
             </a:endParaRPr>
           </a:p>
@@ -7266,37 +6736,33 @@
       </p:sp>
       <p:sp>
         <p:nvSpPr>
-          <p:cNvPr id="12" name="TextBox 5">
-            <a:extLst>
-              <a:ext uri="{FF2B5EF4-FFF2-40B4-BE49-F238E27FC236}">
-                <a16:creationId xmlns:a16="http://schemas.microsoft.com/office/drawing/2014/main" id="{EA57A38B-7EA8-A1A5-8FB2-9CDCAAE8745F}"/>
-              </a:ext>
-            </a:extLst>
-          </p:cNvPr>
-          <p:cNvSpPr txBox="1"/>
-          <p:nvPr/>
-        </p:nvSpPr>
-        <p:spPr>
-          <a:xfrm>
-            <a:off x="9894241" y="-183094"/>
-            <a:ext cx="6705600" cy="619002"/>
-          </a:xfrm>
-          <a:prstGeom prst="rect">
-            <a:avLst/>
-          </a:prstGeom>
-          <a:noFill/>
-        </p:spPr>
-        <p:txBody>
-          <a:bodyPr wrap="square"/>
-          <a:lstStyle/>
-          <a:p>
-            <a:r>
-              <a:rPr sz="8800" dirty="0" err="1">
-                <a:latin typeface="华康少女文字W5(P)"/>
-              </a:rPr>
-              <a:t>她说</a:t>
-            </a:r>
-            <a:endParaRPr sz="8800" dirty="0">
+          <p:cNvPr id="4" name="TextBox 3"/>
+          <p:cNvSpPr txBox="1"/>
+          <p:nvPr/>
+        </p:nvSpPr>
+        <p:spPr>
+          <a:xfrm rot="5400000">
+            <a:off x="2139387" y="5760932"/>
+            <a:ext cx="5760000" cy="883920"/>
+          </a:xfrm>
+          <a:prstGeom prst="rect">
+            <a:avLst/>
+          </a:prstGeom>
+          <a:noFill/>
+        </p:spPr>
+        <p:txBody>
+          <a:bodyPr wrap="none">
+            <a:noAutofit/>
+          </a:bodyPr>
+          <a:lstStyle/>
+          <a:p>
+            <a:r>
+              <a:rPr sz="4800" dirty="0" err="1">
+                <a:latin typeface="华康少女文字W5(P)"/>
+              </a:rPr>
+              <a:t>谁占上风</a:t>
+            </a:r>
+            <a:endParaRPr sz="4800" dirty="0">
               <a:latin typeface="华康少女文字W5(P)"/>
             </a:endParaRPr>
           </a:p>
@@ -7304,199 +6770,34 @@
       </p:sp>
       <p:sp>
         <p:nvSpPr>
-          <p:cNvPr id="13" name="TextBox 4">
-            <a:extLst>
-              <a:ext uri="{FF2B5EF4-FFF2-40B4-BE49-F238E27FC236}">
-                <a16:creationId xmlns:a16="http://schemas.microsoft.com/office/drawing/2014/main" id="{7C06FDDC-06A1-AA55-ADBE-ACF4EF4E1233}"/>
-              </a:ext>
-            </a:extLst>
-          </p:cNvPr>
-          <p:cNvSpPr txBox="1"/>
-          <p:nvPr/>
-        </p:nvSpPr>
-        <p:spPr>
-          <a:xfrm>
-            <a:off x="9894242" y="-1674034"/>
-            <a:ext cx="10189025" cy="1017347"/>
-          </a:xfrm>
-          <a:prstGeom prst="rect">
-            <a:avLst/>
-          </a:prstGeom>
-          <a:noFill/>
-        </p:spPr>
-        <p:txBody>
-          <a:bodyPr wrap="square"/>
-          <a:lstStyle/>
-          <a:p>
-            <a:r>
-              <a:rPr sz="8800" dirty="0" err="1">
-                <a:latin typeface="华康少女文字W5(P)"/>
-              </a:rPr>
-              <a:t>我觉得</a:t>
-            </a:r>
-            <a:endParaRPr sz="8800" dirty="0">
-              <a:latin typeface="华康少女文字W5(P)"/>
-            </a:endParaRPr>
-          </a:p>
-        </p:txBody>
-      </p:sp>
-      <p:sp>
-        <p:nvSpPr>
-          <p:cNvPr id="14" name="TextBox 3">
-            <a:extLst>
-              <a:ext uri="{FF2B5EF4-FFF2-40B4-BE49-F238E27FC236}">
-                <a16:creationId xmlns:a16="http://schemas.microsoft.com/office/drawing/2014/main" id="{3D8EC1A0-BC50-23DA-B1CE-93DE0B816EDF}"/>
-              </a:ext>
-            </a:extLst>
-          </p:cNvPr>
-          <p:cNvSpPr txBox="1"/>
-          <p:nvPr/>
-        </p:nvSpPr>
-        <p:spPr>
-          <a:xfrm>
-            <a:off x="9894245" y="-3257587"/>
-            <a:ext cx="10189025" cy="1017347"/>
-          </a:xfrm>
-          <a:prstGeom prst="rect">
-            <a:avLst/>
-          </a:prstGeom>
-          <a:noFill/>
-        </p:spPr>
-        <p:txBody>
-          <a:bodyPr wrap="square"/>
-          <a:lstStyle/>
-          <a:p>
-            <a:r>
-              <a:rPr sz="8000" dirty="0" err="1">
-                <a:latin typeface="华康少女文字W5(P)"/>
-              </a:rPr>
-              <a:t>讲得很对的</a:t>
-            </a:r>
-            <a:endParaRPr sz="8000" dirty="0">
-              <a:latin typeface="华康少女文字W5(P)"/>
-            </a:endParaRPr>
-          </a:p>
-        </p:txBody>
-      </p:sp>
-      <p:sp>
-        <p:nvSpPr>
-          <p:cNvPr id="15" name="TextBox 2">
-            <a:extLst>
-              <a:ext uri="{FF2B5EF4-FFF2-40B4-BE49-F238E27FC236}">
-                <a16:creationId xmlns:a16="http://schemas.microsoft.com/office/drawing/2014/main" id="{36CB42DB-7852-A92E-AA55-5FE0C2EB3739}"/>
-              </a:ext>
-            </a:extLst>
-          </p:cNvPr>
-          <p:cNvSpPr txBox="1"/>
-          <p:nvPr/>
-        </p:nvSpPr>
-        <p:spPr>
-          <a:xfrm>
-            <a:off x="9894242" y="-4461792"/>
-            <a:ext cx="10189025" cy="1017347"/>
-          </a:xfrm>
-          <a:prstGeom prst="rect">
-            <a:avLst/>
-          </a:prstGeom>
-          <a:noFill/>
-        </p:spPr>
-        <p:txBody>
-          <a:bodyPr wrap="square"/>
-          <a:lstStyle/>
-          <a:p>
-            <a:r>
-              <a:rPr sz="6000" dirty="0" err="1">
-                <a:solidFill>
-                  <a:srgbClr val="FF6B35"/>
-                </a:solidFill>
-                <a:latin typeface="华文行楷"/>
-              </a:rPr>
-              <a:t>张爱玲</a:t>
-            </a:r>
-            <a:r>
-              <a:rPr sz="6000" dirty="0" err="1">
-                <a:latin typeface="华康少女文字W5(P)"/>
-              </a:rPr>
-              <a:t>有一句话</a:t>
-            </a:r>
-            <a:endParaRPr sz="6000" dirty="0">
-              <a:latin typeface="华康少女文字W5(P)"/>
-            </a:endParaRPr>
-          </a:p>
-        </p:txBody>
-      </p:sp>
-      <p:sp>
-        <p:nvSpPr>
-          <p:cNvPr id="17" name="TextBox 8">
-            <a:extLst>
-              <a:ext uri="{FF2B5EF4-FFF2-40B4-BE49-F238E27FC236}">
-                <a16:creationId xmlns:a16="http://schemas.microsoft.com/office/drawing/2014/main" id="{48AECC25-5912-EC20-44FB-019B80512135}"/>
-              </a:ext>
-            </a:extLst>
-          </p:cNvPr>
+          <p:cNvPr id="5" name="TextBox 4"/>
           <p:cNvSpPr txBox="1"/>
           <p:nvPr/>
         </p:nvSpPr>
         <p:spPr>
           <a:xfrm rot="5400000">
-            <a:off x="2825230" y="4387888"/>
-            <a:ext cx="7260127" cy="892762"/>
-          </a:xfrm>
-          <a:prstGeom prst="rect">
-            <a:avLst/>
-          </a:prstGeom>
-          <a:noFill/>
-        </p:spPr>
-        <p:txBody>
-          <a:bodyPr wrap="square"/>
-          <a:lstStyle/>
-          <a:p>
-            <a:r>
-              <a:rPr sz="8800" dirty="0" err="1">
-                <a:latin typeface="华康少女文字W5(P)"/>
-              </a:rPr>
-              <a:t>谁占上风</a:t>
-            </a:r>
-            <a:endParaRPr sz="8800" dirty="0">
-              <a:latin typeface="华康少女文字W5(P)"/>
-            </a:endParaRPr>
-          </a:p>
-        </p:txBody>
-      </p:sp>
-      <p:sp>
-        <p:nvSpPr>
-          <p:cNvPr id="18" name="TextBox 7">
-            <a:extLst>
-              <a:ext uri="{FF2B5EF4-FFF2-40B4-BE49-F238E27FC236}">
-                <a16:creationId xmlns:a16="http://schemas.microsoft.com/office/drawing/2014/main" id="{88E2C63E-84A0-570F-9977-861528F49B98}"/>
-              </a:ext>
-            </a:extLst>
-          </p:cNvPr>
-          <p:cNvSpPr txBox="1"/>
-          <p:nvPr/>
-        </p:nvSpPr>
-        <p:spPr>
-          <a:xfrm rot="5400000">
-            <a:off x="4301018" y="4387888"/>
-            <a:ext cx="7260127" cy="892762"/>
-          </a:xfrm>
-          <a:prstGeom prst="rect">
-            <a:avLst/>
-          </a:prstGeom>
-          <a:noFill/>
-        </p:spPr>
-        <p:txBody>
-          <a:bodyPr wrap="square"/>
-          <a:lstStyle/>
-          <a:p>
-            <a:r>
-              <a:rPr sz="8000" dirty="0" err="1">
+            <a:off x="2943754" y="5840484"/>
+            <a:ext cx="5760000" cy="724814"/>
+          </a:xfrm>
+          <a:prstGeom prst="rect">
+            <a:avLst/>
+          </a:prstGeom>
+          <a:noFill/>
+        </p:spPr>
+        <p:txBody>
+          <a:bodyPr wrap="none">
+            <a:noAutofit/>
+          </a:bodyPr>
+          <a:lstStyle/>
+          <a:p>
+            <a:r>
+              <a:rPr sz="3936" dirty="0" err="1">
                 <a:latin typeface="华康少女文字W5(P)"/>
               </a:rPr>
               <a:t>谁</a:t>
             </a:r>
             <a:r>
-              <a:rPr sz="8000" dirty="0" err="1">
+              <a:rPr sz="3936" dirty="0" err="1">
                 <a:solidFill>
                   <a:srgbClr val="FF0000"/>
                 </a:solidFill>
@@ -7504,7 +6805,7 @@
               </a:rPr>
               <a:t>不讲道理</a:t>
             </a:r>
-            <a:endParaRPr sz="8000" dirty="0">
+            <a:endParaRPr sz="3936" dirty="0">
               <a:solidFill>
                 <a:srgbClr val="FF0000"/>
               </a:solidFill>
@@ -7515,37 +6816,172 @@
       </p:sp>
       <p:sp>
         <p:nvSpPr>
-          <p:cNvPr id="19" name="TextBox 6">
-            <a:extLst>
-              <a:ext uri="{FF2B5EF4-FFF2-40B4-BE49-F238E27FC236}">
-                <a16:creationId xmlns:a16="http://schemas.microsoft.com/office/drawing/2014/main" id="{3832D3B3-EA5D-71F2-56CE-88B7F5AE9639}"/>
-              </a:ext>
-            </a:extLst>
-          </p:cNvPr>
+          <p:cNvPr id="6" name="TextBox 5"/>
           <p:cNvSpPr txBox="1"/>
           <p:nvPr/>
         </p:nvSpPr>
         <p:spPr>
           <a:xfrm rot="5400000">
-            <a:off x="5817796" y="4387888"/>
-            <a:ext cx="7260127" cy="892762"/>
-          </a:xfrm>
-          <a:prstGeom prst="rect">
-            <a:avLst/>
-          </a:prstGeom>
-          <a:noFill/>
-        </p:spPr>
-        <p:txBody>
-          <a:bodyPr wrap="square"/>
-          <a:lstStyle/>
-          <a:p>
-            <a:r>
-              <a:rPr sz="8000" dirty="0" err="1">
+            <a:off x="3603335" y="5905718"/>
+            <a:ext cx="5760000" cy="594347"/>
+          </a:xfrm>
+          <a:prstGeom prst="rect">
+            <a:avLst/>
+          </a:prstGeom>
+          <a:noFill/>
+        </p:spPr>
+        <p:txBody>
+          <a:bodyPr wrap="none">
+            <a:noAutofit/>
+          </a:bodyPr>
+          <a:lstStyle/>
+          <a:p>
+            <a:r>
+              <a:rPr sz="3227" dirty="0" err="1">
                 <a:latin typeface="华康少女文字W5(P)"/>
               </a:rPr>
               <a:t>结婚之后嘛</a:t>
             </a:r>
-            <a:endParaRPr sz="8000" dirty="0">
+            <a:endParaRPr sz="3227" dirty="0">
+              <a:latin typeface="华康少女文字W5(P)"/>
+            </a:endParaRPr>
+          </a:p>
+        </p:txBody>
+      </p:sp>
+      <p:sp>
+        <p:nvSpPr>
+          <p:cNvPr id="7" name="TextBox 6"/>
+          <p:cNvSpPr txBox="1"/>
+          <p:nvPr/>
+        </p:nvSpPr>
+        <p:spPr>
+          <a:xfrm>
+            <a:off x="6649569" y="2547375"/>
+            <a:ext cx="5760000" cy="883920"/>
+          </a:xfrm>
+          <a:prstGeom prst="rect">
+            <a:avLst/>
+          </a:prstGeom>
+          <a:noFill/>
+        </p:spPr>
+        <p:txBody>
+          <a:bodyPr wrap="none">
+            <a:noAutofit/>
+          </a:bodyPr>
+          <a:lstStyle/>
+          <a:p>
+            <a:r>
+              <a:rPr sz="4800">
+                <a:latin typeface="华康少女文字W5(P)"/>
+              </a:rPr>
+              <a:t>她说</a:t>
+            </a:r>
+          </a:p>
+        </p:txBody>
+      </p:sp>
+      <p:sp>
+        <p:nvSpPr>
+          <p:cNvPr id="8" name="TextBox 7"/>
+          <p:cNvSpPr txBox="1"/>
+          <p:nvPr/>
+        </p:nvSpPr>
+        <p:spPr>
+          <a:xfrm>
+            <a:off x="6649569" y="1696561"/>
+            <a:ext cx="5760000" cy="724814"/>
+          </a:xfrm>
+          <a:prstGeom prst="rect">
+            <a:avLst/>
+          </a:prstGeom>
+          <a:noFill/>
+        </p:spPr>
+        <p:txBody>
+          <a:bodyPr wrap="none">
+            <a:noAutofit/>
+          </a:bodyPr>
+          <a:lstStyle/>
+          <a:p>
+            <a:r>
+              <a:rPr sz="3936">
+                <a:latin typeface="华康少女文字W5(P)"/>
+              </a:rPr>
+              <a:t>我觉得</a:t>
+            </a:r>
+          </a:p>
+        </p:txBody>
+      </p:sp>
+      <p:sp>
+        <p:nvSpPr>
+          <p:cNvPr id="9" name="TextBox 8"/>
+          <p:cNvSpPr txBox="1"/>
+          <p:nvPr/>
+        </p:nvSpPr>
+        <p:spPr>
+          <a:xfrm>
+            <a:off x="6649569" y="976213"/>
+            <a:ext cx="5760000" cy="594347"/>
+          </a:xfrm>
+          <a:prstGeom prst="rect">
+            <a:avLst/>
+          </a:prstGeom>
+          <a:noFill/>
+        </p:spPr>
+        <p:txBody>
+          <a:bodyPr wrap="none">
+            <a:noAutofit/>
+          </a:bodyPr>
+          <a:lstStyle/>
+          <a:p>
+            <a:r>
+              <a:rPr sz="3227" dirty="0" err="1">
+                <a:latin typeface="华康少女文字W5(P)"/>
+              </a:rPr>
+              <a:t>讲得很对的</a:t>
+            </a:r>
+            <a:endParaRPr sz="3227" dirty="0">
+              <a:latin typeface="华康少女文字W5(P)"/>
+            </a:endParaRPr>
+          </a:p>
+        </p:txBody>
+      </p:sp>
+      <p:sp>
+        <p:nvSpPr>
+          <p:cNvPr id="10" name="TextBox 9"/>
+          <p:cNvSpPr txBox="1"/>
+          <p:nvPr/>
+        </p:nvSpPr>
+        <p:spPr>
+          <a:xfrm>
+            <a:off x="6649568" y="362848"/>
+            <a:ext cx="5760000" cy="487365"/>
+          </a:xfrm>
+          <a:prstGeom prst="rect">
+            <a:avLst/>
+          </a:prstGeom>
+          <a:noFill/>
+        </p:spPr>
+        <p:txBody>
+          <a:bodyPr wrap="none">
+            <a:noAutofit/>
+          </a:bodyPr>
+          <a:lstStyle/>
+          <a:p>
+            <a:r>
+              <a:rPr sz="2646" dirty="0" err="1">
+                <a:solidFill>
+                  <a:srgbClr val="FF6B35"/>
+                </a:solidFill>
+                <a:latin typeface="华文行楷"/>
+              </a:rPr>
+              <a:t>张爱玲</a:t>
+            </a:r>
+            <a:r>
+              <a:rPr sz="2646" dirty="0" err="1">
+                <a:latin typeface="华康少女文字W5(P)"/>
+              </a:rPr>
+              <a:t>有一句话</a:t>
+            </a:r>
+            <a:endParaRPr sz="2646" dirty="0">
               <a:latin typeface="华康少女文字W5(P)"/>
             </a:endParaRPr>
           </a:p>
@@ -7556,43 +6992,6 @@
   <p:clrMapOvr>
     <a:masterClrMapping/>
   </p:clrMapOvr>
-  <p:transition advTm="10720"/>
-  <p:timing>
-    <p:tnLst>
-      <p:par>
-        <p:cTn id="1" dur="indefinite" restart="never" nodeType="tmRoot">
-          <p:stCondLst>
-            <p:cond delay="0"/>
-          </p:stCondLst>
-          <p:childTnLst>
-            <p:par>
-              <p:cTn id="2" fill="hold">
-                <p:stCondLst>
-                  <p:cond delay="0"/>
-                </p:stCondLst>
-                <p:childTnLst>
-                  <p:par>
-                    <p:cTn id="3" dur="500" fill="hold">
-                      <p:childTnLst>
-                        <p:animEffect transition="in">
-                          <p:cBhvr>
-                            <p:cTn id="4" dur="500"/>
-                            <p:tgtEl>
-                              <p:spTgt spid="10"/>
-                            </p:tgtEl>
-                          </p:cBhvr>
-                        </p:animEffect>
-                      </p:childTnLst>
-                    </p:cTn>
-                  </p:par>
-                </p:childTnLst>
-              </p:cTn>
-            </p:par>
-          </p:childTnLst>
-        </p:cTn>
-      </p:par>
-    </p:tnLst>
-  </p:timing>
 </p:sld>
 </file>
 
@@ -7615,7 +7014,7 @@
       </p:grpSpPr>
       <p:pic>
         <p:nvPicPr>
-          <p:cNvPr id="2" name="Picture 1"/>
+          <p:cNvPr id="2" name="Picture 1" descr="image.jpg"/>
           <p:cNvPicPr>
             <a:picLocks noChangeAspect="1"/>
           </p:cNvPicPr>
@@ -7623,13 +7022,14 @@
         </p:nvPicPr>
         <p:blipFill>
           <a:blip r:embed="rId2"/>
-          <a:srcRect/>
-          <a:stretch/>
+          <a:stretch>
+            <a:fillRect/>
+          </a:stretch>
         </p:blipFill>
         <p:spPr>
           <a:xfrm>
-            <a:off x="86" y="0"/>
-            <a:ext cx="6857828" cy="12191695"/>
+            <a:off x="0" y="0"/>
+            <a:ext cx="6858000" cy="12193200"/>
           </a:xfrm>
           <a:prstGeom prst="rect">
             <a:avLst/>
@@ -7638,31 +7038,64 @@
       </p:pic>
       <p:sp>
         <p:nvSpPr>
-          <p:cNvPr id="11" name="TextBox 10"/>
-          <p:cNvSpPr txBox="1"/>
-          <p:nvPr/>
-        </p:nvSpPr>
-        <p:spPr>
-          <a:xfrm>
-            <a:off x="914400" y="5852013"/>
-            <a:ext cx="5029200" cy="711200"/>
-          </a:xfrm>
-          <a:prstGeom prst="rect">
-            <a:avLst/>
-          </a:prstGeom>
-          <a:noFill/>
-        </p:spPr>
-        <p:txBody>
-          <a:bodyPr wrap="square"/>
-          <a:lstStyle/>
-          <a:p>
-            <a:r>
-              <a:rPr sz="4400" dirty="0" err="1">
+          <p:cNvPr id="3" name="TextBox 2"/>
+          <p:cNvSpPr txBox="1"/>
+          <p:nvPr/>
+        </p:nvSpPr>
+        <p:spPr>
+          <a:xfrm>
+            <a:off x="914400" y="5682479"/>
+            <a:ext cx="5760000" cy="883920"/>
+          </a:xfrm>
+          <a:prstGeom prst="rect">
+            <a:avLst/>
+          </a:prstGeom>
+          <a:noFill/>
+        </p:spPr>
+        <p:txBody>
+          <a:bodyPr wrap="none">
+            <a:noAutofit/>
+          </a:bodyPr>
+          <a:lstStyle/>
+          <a:p>
+            <a:r>
+              <a:rPr sz="4800">
                 <a:latin typeface="华康少女文字W5(P)"/>
               </a:rPr>
               <a:t>不讲道理已经到了</a:t>
             </a:r>
-            <a:endParaRPr sz="4400" dirty="0">
+          </a:p>
+        </p:txBody>
+      </p:sp>
+      <p:sp>
+        <p:nvSpPr>
+          <p:cNvPr id="4" name="TextBox 3"/>
+          <p:cNvSpPr txBox="1"/>
+          <p:nvPr/>
+        </p:nvSpPr>
+        <p:spPr>
+          <a:xfrm>
+            <a:off x="914400" y="4831665"/>
+            <a:ext cx="5760000" cy="724814"/>
+          </a:xfrm>
+          <a:prstGeom prst="rect">
+            <a:avLst/>
+          </a:prstGeom>
+          <a:noFill/>
+        </p:spPr>
+        <p:txBody>
+          <a:bodyPr wrap="none">
+            <a:noAutofit/>
+          </a:bodyPr>
+          <a:lstStyle/>
+          <a:p>
+            <a:r>
+              <a:rPr sz="3936" dirty="0" err="1">
+                <a:latin typeface="华康少女文字W5(P)"/>
+              </a:rPr>
+              <a:t>我们家里那个</a:t>
+            </a:r>
+            <a:endParaRPr sz="3936" dirty="0">
               <a:latin typeface="华康少女文字W5(P)"/>
             </a:endParaRPr>
           </a:p>
@@ -7670,10 +7103,10 @@
       </p:sp>
       <p:sp>
         <p:nvSpPr>
-          <p:cNvPr id="12" name="TextBox 9">
+          <p:cNvPr id="12" name="TextBox 3">
             <a:extLst>
               <a:ext uri="{FF2B5EF4-FFF2-40B4-BE49-F238E27FC236}">
-                <a16:creationId xmlns:a16="http://schemas.microsoft.com/office/drawing/2014/main" id="{8BC50999-2369-1804-A6E8-1EA784782C0E}"/>
+                <a16:creationId xmlns:a16="http://schemas.microsoft.com/office/drawing/2014/main" id="{D54041BF-9711-B393-E090-66FD9B04D2CE}"/>
               </a:ext>
             </a:extLst>
           </p:cNvPr>
@@ -7681,24 +7114,26 @@
           <p:nvPr/>
         </p:nvSpPr>
         <p:spPr>
-          <a:xfrm>
-            <a:off x="914400" y="4839646"/>
-            <a:ext cx="5029200" cy="711200"/>
-          </a:xfrm>
-          <a:prstGeom prst="rect">
-            <a:avLst/>
-          </a:prstGeom>
-          <a:noFill/>
-        </p:spPr>
-        <p:txBody>
-          <a:bodyPr wrap="square"/>
+          <a:xfrm rot="5400000">
+            <a:off x="1534946" y="4831034"/>
+            <a:ext cx="5760000" cy="883920"/>
+          </a:xfrm>
+          <a:prstGeom prst="rect">
+            <a:avLst/>
+          </a:prstGeom>
+          <a:noFill/>
+        </p:spPr>
+        <p:txBody>
+          <a:bodyPr wrap="none">
+            <a:noAutofit/>
+          </a:bodyPr>
           <a:lstStyle/>
           <a:p>
             <a:r>
               <a:rPr sz="4800" dirty="0" err="1">
                 <a:latin typeface="华康少女文字W5(P)"/>
               </a:rPr>
-              <a:t>我们家里那个</a:t>
+              <a:t>谁占上风</a:t>
             </a:r>
             <a:endParaRPr sz="4800" dirty="0">
               <a:latin typeface="华康少女文字W5(P)"/>
@@ -7706,377 +7141,266 @@
           </a:p>
         </p:txBody>
       </p:sp>
-      <p:grpSp>
-        <p:nvGrpSpPr>
-          <p:cNvPr id="13" name="组合 12">
+      <p:sp>
+        <p:nvSpPr>
+          <p:cNvPr id="13" name="TextBox 4">
             <a:extLst>
               <a:ext uri="{FF2B5EF4-FFF2-40B4-BE49-F238E27FC236}">
-                <a16:creationId xmlns:a16="http://schemas.microsoft.com/office/drawing/2014/main" id="{932F1544-0017-AAE4-D02F-62AEC09773B1}"/>
+                <a16:creationId xmlns:a16="http://schemas.microsoft.com/office/drawing/2014/main" id="{21A199D4-249A-6ED6-AC9C-D2382D475650}"/>
               </a:ext>
             </a:extLst>
           </p:cNvPr>
-          <p:cNvGrpSpPr/>
-          <p:nvPr/>
-        </p:nvGrpSpPr>
-        <p:grpSpPr>
-          <a:xfrm>
-            <a:off x="8162137" y="-3374152"/>
-            <a:ext cx="8351357" cy="3880353"/>
-            <a:chOff x="914399" y="-1110342"/>
-            <a:chExt cx="10189029" cy="7673556"/>
-          </a:xfrm>
-        </p:grpSpPr>
-        <p:sp>
-          <p:nvSpPr>
-            <p:cNvPr id="14" name="TextBox 5">
-              <a:extLst>
-                <a:ext uri="{FF2B5EF4-FFF2-40B4-BE49-F238E27FC236}">
-                  <a16:creationId xmlns:a16="http://schemas.microsoft.com/office/drawing/2014/main" id="{3A82FC87-0137-FA62-3FA0-1D88C02F2DF9}"/>
-                </a:ext>
-              </a:extLst>
-            </p:cNvPr>
-            <p:cNvSpPr txBox="1"/>
-            <p:nvPr/>
-          </p:nvSpPr>
-          <p:spPr>
-            <a:xfrm>
-              <a:off x="914399" y="5593382"/>
-              <a:ext cx="6705600" cy="969832"/>
-            </a:xfrm>
-            <a:prstGeom prst="rect">
-              <a:avLst/>
-            </a:prstGeom>
-            <a:noFill/>
-          </p:spPr>
-          <p:txBody>
-            <a:bodyPr wrap="square"/>
-            <a:lstStyle/>
-            <a:p>
-              <a:r>
-                <a:rPr sz="7200" dirty="0" err="1">
-                  <a:latin typeface="华康少女文字W5(P)"/>
-                </a:rPr>
-                <a:t>她说</a:t>
-              </a:r>
-              <a:endParaRPr sz="7200" dirty="0">
-                <a:latin typeface="华康少女文字W5(P)"/>
-              </a:endParaRPr>
-            </a:p>
-          </p:txBody>
-        </p:sp>
-        <p:sp>
-          <p:nvSpPr>
-            <p:cNvPr id="15" name="TextBox 4">
-              <a:extLst>
-                <a:ext uri="{FF2B5EF4-FFF2-40B4-BE49-F238E27FC236}">
-                  <a16:creationId xmlns:a16="http://schemas.microsoft.com/office/drawing/2014/main" id="{B5A5D0DC-FD29-28A9-E239-B24E0F09EB59}"/>
-                </a:ext>
-              </a:extLst>
-            </p:cNvPr>
-            <p:cNvSpPr txBox="1"/>
-            <p:nvPr/>
-          </p:nvSpPr>
-          <p:spPr>
-            <a:xfrm>
-              <a:off x="914400" y="3257426"/>
-              <a:ext cx="10189025" cy="1593946"/>
-            </a:xfrm>
-            <a:prstGeom prst="rect">
-              <a:avLst/>
-            </a:prstGeom>
-            <a:noFill/>
-          </p:spPr>
-          <p:txBody>
-            <a:bodyPr wrap="square"/>
-            <a:lstStyle/>
-            <a:p>
-              <a:r>
-                <a:rPr sz="7200" dirty="0" err="1">
-                  <a:latin typeface="华康少女文字W5(P)"/>
-                </a:rPr>
-                <a:t>我觉得</a:t>
-              </a:r>
-              <a:endParaRPr sz="7200" dirty="0">
-                <a:latin typeface="华康少女文字W5(P)"/>
-              </a:endParaRPr>
-            </a:p>
-          </p:txBody>
-        </p:sp>
-        <p:sp>
-          <p:nvSpPr>
-            <p:cNvPr id="16" name="TextBox 3">
-              <a:extLst>
-                <a:ext uri="{FF2B5EF4-FFF2-40B4-BE49-F238E27FC236}">
-                  <a16:creationId xmlns:a16="http://schemas.microsoft.com/office/drawing/2014/main" id="{45B7BEDB-83DA-1516-18A8-DA939D8E57A9}"/>
-                </a:ext>
-              </a:extLst>
-            </p:cNvPr>
-            <p:cNvSpPr txBox="1"/>
-            <p:nvPr/>
-          </p:nvSpPr>
-          <p:spPr>
-            <a:xfrm>
-              <a:off x="914403" y="776367"/>
-              <a:ext cx="10189025" cy="1593946"/>
-            </a:xfrm>
-            <a:prstGeom prst="rect">
-              <a:avLst/>
-            </a:prstGeom>
-            <a:noFill/>
-          </p:spPr>
-          <p:txBody>
-            <a:bodyPr wrap="square"/>
-            <a:lstStyle/>
-            <a:p>
-              <a:r>
-                <a:rPr sz="6600" dirty="0" err="1">
-                  <a:latin typeface="华康少女文字W5(P)"/>
-                </a:rPr>
-                <a:t>讲得很对的</a:t>
-              </a:r>
-              <a:endParaRPr sz="6600" dirty="0">
-                <a:latin typeface="华康少女文字W5(P)"/>
-              </a:endParaRPr>
-            </a:p>
-          </p:txBody>
-        </p:sp>
-        <p:sp>
-          <p:nvSpPr>
-            <p:cNvPr id="17" name="TextBox 2">
-              <a:extLst>
-                <a:ext uri="{FF2B5EF4-FFF2-40B4-BE49-F238E27FC236}">
-                  <a16:creationId xmlns:a16="http://schemas.microsoft.com/office/drawing/2014/main" id="{AF38CA6B-16C0-61CB-4F48-513943AB9FA1}"/>
-                </a:ext>
-              </a:extLst>
-            </p:cNvPr>
-            <p:cNvSpPr txBox="1"/>
-            <p:nvPr/>
-          </p:nvSpPr>
-          <p:spPr>
-            <a:xfrm>
-              <a:off x="914400" y="-1110342"/>
-              <a:ext cx="10189025" cy="1593946"/>
-            </a:xfrm>
-            <a:prstGeom prst="rect">
-              <a:avLst/>
-            </a:prstGeom>
-            <a:noFill/>
-          </p:spPr>
-          <p:txBody>
-            <a:bodyPr wrap="square"/>
-            <a:lstStyle/>
-            <a:p>
-              <a:r>
-                <a:rPr sz="4800" dirty="0" err="1">
-                  <a:solidFill>
-                    <a:srgbClr val="FF6B35"/>
-                  </a:solidFill>
-                  <a:latin typeface="华文行楷"/>
-                </a:rPr>
-                <a:t>张爱玲</a:t>
-              </a:r>
-              <a:r>
-                <a:rPr sz="4800" dirty="0" err="1">
-                  <a:latin typeface="华康少女文字W5(P)"/>
-                </a:rPr>
-                <a:t>有一句话</a:t>
-              </a:r>
-              <a:endParaRPr sz="4800" dirty="0">
-                <a:latin typeface="华康少女文字W5(P)"/>
-              </a:endParaRPr>
-            </a:p>
-          </p:txBody>
-        </p:sp>
-      </p:grpSp>
-      <p:grpSp>
-        <p:nvGrpSpPr>
-          <p:cNvPr id="18" name="组合 17">
-            <a:extLst>
-              <a:ext uri="{FF2B5EF4-FFF2-40B4-BE49-F238E27FC236}">
-                <a16:creationId xmlns:a16="http://schemas.microsoft.com/office/drawing/2014/main" id="{2F614B6E-BB26-DFCE-6330-550E6AFA0DE6}"/>
-              </a:ext>
-            </a:extLst>
-          </p:cNvPr>
-          <p:cNvGrpSpPr/>
-          <p:nvPr/>
-        </p:nvGrpSpPr>
-        <p:grpSpPr>
+          <p:cNvSpPr txBox="1"/>
+          <p:nvPr/>
+        </p:nvSpPr>
+        <p:spPr>
           <a:xfrm rot="5400000">
-            <a:off x="3035790" y="3343363"/>
-            <a:ext cx="7260128" cy="2992565"/>
-            <a:chOff x="914400" y="3468049"/>
-            <a:chExt cx="5029200" cy="3095164"/>
-          </a:xfrm>
-        </p:grpSpPr>
-        <p:sp>
-          <p:nvSpPr>
-            <p:cNvPr id="19" name="TextBox 8">
-              <a:extLst>
-                <a:ext uri="{FF2B5EF4-FFF2-40B4-BE49-F238E27FC236}">
-                  <a16:creationId xmlns:a16="http://schemas.microsoft.com/office/drawing/2014/main" id="{20AB76EB-14F6-202B-C5A2-5116E96C686E}"/>
-                </a:ext>
-              </a:extLst>
-            </p:cNvPr>
-            <p:cNvSpPr txBox="1"/>
-            <p:nvPr/>
-          </p:nvSpPr>
-          <p:spPr>
-            <a:xfrm>
-              <a:off x="914400" y="5852013"/>
-              <a:ext cx="5029200" cy="711200"/>
-            </a:xfrm>
-            <a:prstGeom prst="rect">
-              <a:avLst/>
-            </a:prstGeom>
-            <a:noFill/>
-          </p:spPr>
-          <p:txBody>
-            <a:bodyPr wrap="square"/>
-            <a:lstStyle/>
-            <a:p>
-              <a:r>
-                <a:rPr sz="7200" dirty="0" err="1">
-                  <a:latin typeface="华康少女文字W5(P)"/>
-                </a:rPr>
-                <a:t>谁占上风</a:t>
-              </a:r>
-              <a:endParaRPr sz="7200" dirty="0">
-                <a:latin typeface="华康少女文字W5(P)"/>
-              </a:endParaRPr>
-            </a:p>
-          </p:txBody>
-        </p:sp>
-        <p:sp>
-          <p:nvSpPr>
-            <p:cNvPr id="20" name="TextBox 7">
-              <a:extLst>
-                <a:ext uri="{FF2B5EF4-FFF2-40B4-BE49-F238E27FC236}">
-                  <a16:creationId xmlns:a16="http://schemas.microsoft.com/office/drawing/2014/main" id="{6B112506-F4A3-0D7E-1EC2-1D41B5165D5E}"/>
-                </a:ext>
-              </a:extLst>
-            </p:cNvPr>
-            <p:cNvSpPr txBox="1"/>
-            <p:nvPr/>
-          </p:nvSpPr>
-          <p:spPr>
-            <a:xfrm>
-              <a:off x="914400" y="4676358"/>
-              <a:ext cx="5029200" cy="711200"/>
-            </a:xfrm>
-            <a:prstGeom prst="rect">
-              <a:avLst/>
-            </a:prstGeom>
-            <a:noFill/>
-          </p:spPr>
-          <p:txBody>
-            <a:bodyPr wrap="square"/>
-            <a:lstStyle/>
-            <a:p>
-              <a:r>
-                <a:rPr sz="6600" dirty="0" err="1">
-                  <a:latin typeface="华康少女文字W5(P)"/>
-                </a:rPr>
-                <a:t>谁</a:t>
-              </a:r>
-              <a:r>
-                <a:rPr sz="6600" dirty="0" err="1">
-                  <a:solidFill>
-                    <a:srgbClr val="FF0000"/>
-                  </a:solidFill>
-                  <a:latin typeface="文鼎霹雳体"/>
-                </a:rPr>
-                <a:t>不讲道理</a:t>
-              </a:r>
-              <a:endParaRPr sz="6600" dirty="0">
+            <a:off x="2339313" y="4910586"/>
+            <a:ext cx="5760000" cy="724814"/>
+          </a:xfrm>
+          <a:prstGeom prst="rect">
+            <a:avLst/>
+          </a:prstGeom>
+          <a:noFill/>
+        </p:spPr>
+        <p:txBody>
+          <a:bodyPr wrap="none">
+            <a:noAutofit/>
+          </a:bodyPr>
+          <a:lstStyle/>
+          <a:p>
+            <a:r>
+              <a:rPr sz="3936" dirty="0" err="1">
+                <a:latin typeface="华康少女文字W5(P)"/>
+              </a:rPr>
+              <a:t>谁</a:t>
+            </a:r>
+            <a:r>
+              <a:rPr sz="3936" dirty="0" err="1">
                 <a:solidFill>
                   <a:srgbClr val="FF0000"/>
                 </a:solidFill>
                 <a:latin typeface="文鼎霹雳体"/>
-              </a:endParaRPr>
-            </a:p>
-          </p:txBody>
-        </p:sp>
-        <p:sp>
-          <p:nvSpPr>
-            <p:cNvPr id="21" name="TextBox 6">
-              <a:extLst>
-                <a:ext uri="{FF2B5EF4-FFF2-40B4-BE49-F238E27FC236}">
-                  <a16:creationId xmlns:a16="http://schemas.microsoft.com/office/drawing/2014/main" id="{DA855D01-8C1C-6E4C-9B6F-CCD801C643E5}"/>
-                </a:ext>
-              </a:extLst>
-            </p:cNvPr>
-            <p:cNvSpPr txBox="1"/>
-            <p:nvPr/>
-          </p:nvSpPr>
-          <p:spPr>
-            <a:xfrm>
-              <a:off x="914400" y="3468049"/>
-              <a:ext cx="5029200" cy="711200"/>
-            </a:xfrm>
-            <a:prstGeom prst="rect">
-              <a:avLst/>
-            </a:prstGeom>
-            <a:noFill/>
-          </p:spPr>
-          <p:txBody>
-            <a:bodyPr wrap="square"/>
-            <a:lstStyle/>
-            <a:p>
-              <a:r>
-                <a:rPr sz="6600" dirty="0" err="1">
-                  <a:latin typeface="华康少女文字W5(P)"/>
-                </a:rPr>
-                <a:t>结婚之后嘛</a:t>
-              </a:r>
-              <a:endParaRPr sz="6600" dirty="0">
-                <a:latin typeface="华康少女文字W5(P)"/>
-              </a:endParaRPr>
-            </a:p>
-          </p:txBody>
-        </p:sp>
-      </p:grpSp>
+              </a:rPr>
+              <a:t>不讲道理</a:t>
+            </a:r>
+            <a:endParaRPr sz="3936" dirty="0">
+              <a:solidFill>
+                <a:srgbClr val="FF0000"/>
+              </a:solidFill>
+              <a:latin typeface="文鼎霹雳体"/>
+            </a:endParaRPr>
+          </a:p>
+        </p:txBody>
+      </p:sp>
+      <p:sp>
+        <p:nvSpPr>
+          <p:cNvPr id="14" name="TextBox 5">
+            <a:extLst>
+              <a:ext uri="{FF2B5EF4-FFF2-40B4-BE49-F238E27FC236}">
+                <a16:creationId xmlns:a16="http://schemas.microsoft.com/office/drawing/2014/main" id="{F8CFDC30-2C84-DB7F-058C-E6634A32096B}"/>
+              </a:ext>
+            </a:extLst>
+          </p:cNvPr>
+          <p:cNvSpPr txBox="1"/>
+          <p:nvPr/>
+        </p:nvSpPr>
+        <p:spPr>
+          <a:xfrm rot="5400000">
+            <a:off x="2998894" y="4975820"/>
+            <a:ext cx="5760000" cy="594347"/>
+          </a:xfrm>
+          <a:prstGeom prst="rect">
+            <a:avLst/>
+          </a:prstGeom>
+          <a:noFill/>
+        </p:spPr>
+        <p:txBody>
+          <a:bodyPr wrap="none">
+            <a:noAutofit/>
+          </a:bodyPr>
+          <a:lstStyle/>
+          <a:p>
+            <a:r>
+              <a:rPr sz="3227" dirty="0" err="1">
+                <a:latin typeface="华康少女文字W5(P)"/>
+              </a:rPr>
+              <a:t>结婚之后嘛</a:t>
+            </a:r>
+            <a:endParaRPr sz="3227" dirty="0">
+              <a:latin typeface="华康少女文字W5(P)"/>
+            </a:endParaRPr>
+          </a:p>
+        </p:txBody>
+      </p:sp>
+      <p:sp>
+        <p:nvSpPr>
+          <p:cNvPr id="15" name="TextBox 6">
+            <a:extLst>
+              <a:ext uri="{FF2B5EF4-FFF2-40B4-BE49-F238E27FC236}">
+                <a16:creationId xmlns:a16="http://schemas.microsoft.com/office/drawing/2014/main" id="{166ECF9D-6055-ADC2-18DE-2CF8D3A012EC}"/>
+              </a:ext>
+            </a:extLst>
+          </p:cNvPr>
+          <p:cNvSpPr txBox="1"/>
+          <p:nvPr/>
+        </p:nvSpPr>
+        <p:spPr>
+          <a:xfrm>
+            <a:off x="6060626" y="1508991"/>
+            <a:ext cx="5760000" cy="883920"/>
+          </a:xfrm>
+          <a:prstGeom prst="rect">
+            <a:avLst/>
+          </a:prstGeom>
+          <a:noFill/>
+        </p:spPr>
+        <p:txBody>
+          <a:bodyPr wrap="none">
+            <a:noAutofit/>
+          </a:bodyPr>
+          <a:lstStyle/>
+          <a:p>
+            <a:r>
+              <a:rPr sz="4800">
+                <a:latin typeface="华康少女文字W5(P)"/>
+              </a:rPr>
+              <a:t>她说</a:t>
+            </a:r>
+          </a:p>
+        </p:txBody>
+      </p:sp>
+      <p:sp>
+        <p:nvSpPr>
+          <p:cNvPr id="16" name="TextBox 7">
+            <a:extLst>
+              <a:ext uri="{FF2B5EF4-FFF2-40B4-BE49-F238E27FC236}">
+                <a16:creationId xmlns:a16="http://schemas.microsoft.com/office/drawing/2014/main" id="{AC147C27-EF9C-F900-6C2D-1133D8F8499D}"/>
+              </a:ext>
+            </a:extLst>
+          </p:cNvPr>
+          <p:cNvSpPr txBox="1"/>
+          <p:nvPr/>
+        </p:nvSpPr>
+        <p:spPr>
+          <a:xfrm>
+            <a:off x="6060626" y="658177"/>
+            <a:ext cx="5760000" cy="724814"/>
+          </a:xfrm>
+          <a:prstGeom prst="rect">
+            <a:avLst/>
+          </a:prstGeom>
+          <a:noFill/>
+        </p:spPr>
+        <p:txBody>
+          <a:bodyPr wrap="none">
+            <a:noAutofit/>
+          </a:bodyPr>
+          <a:lstStyle/>
+          <a:p>
+            <a:r>
+              <a:rPr sz="3936">
+                <a:latin typeface="华康少女文字W5(P)"/>
+              </a:rPr>
+              <a:t>我觉得</a:t>
+            </a:r>
+          </a:p>
+        </p:txBody>
+      </p:sp>
+      <p:sp>
+        <p:nvSpPr>
+          <p:cNvPr id="17" name="TextBox 8">
+            <a:extLst>
+              <a:ext uri="{FF2B5EF4-FFF2-40B4-BE49-F238E27FC236}">
+                <a16:creationId xmlns:a16="http://schemas.microsoft.com/office/drawing/2014/main" id="{AFBCFE0F-5B84-A080-F975-6D017864C475}"/>
+              </a:ext>
+            </a:extLst>
+          </p:cNvPr>
+          <p:cNvSpPr txBox="1"/>
+          <p:nvPr/>
+        </p:nvSpPr>
+        <p:spPr>
+          <a:xfrm>
+            <a:off x="6060626" y="-62171"/>
+            <a:ext cx="5760000" cy="594347"/>
+          </a:xfrm>
+          <a:prstGeom prst="rect">
+            <a:avLst/>
+          </a:prstGeom>
+          <a:noFill/>
+        </p:spPr>
+        <p:txBody>
+          <a:bodyPr wrap="none">
+            <a:noAutofit/>
+          </a:bodyPr>
+          <a:lstStyle/>
+          <a:p>
+            <a:r>
+              <a:rPr sz="3227" dirty="0" err="1">
+                <a:latin typeface="华康少女文字W5(P)"/>
+              </a:rPr>
+              <a:t>讲得很对的</a:t>
+            </a:r>
+            <a:endParaRPr sz="3227" dirty="0">
+              <a:latin typeface="华康少女文字W5(P)"/>
+            </a:endParaRPr>
+          </a:p>
+        </p:txBody>
+      </p:sp>
+      <p:sp>
+        <p:nvSpPr>
+          <p:cNvPr id="18" name="TextBox 9">
+            <a:extLst>
+              <a:ext uri="{FF2B5EF4-FFF2-40B4-BE49-F238E27FC236}">
+                <a16:creationId xmlns:a16="http://schemas.microsoft.com/office/drawing/2014/main" id="{D70F442C-5EE8-0604-7802-AD8A52227511}"/>
+              </a:ext>
+            </a:extLst>
+          </p:cNvPr>
+          <p:cNvSpPr txBox="1"/>
+          <p:nvPr/>
+        </p:nvSpPr>
+        <p:spPr>
+          <a:xfrm>
+            <a:off x="6060625" y="-675536"/>
+            <a:ext cx="5760000" cy="487365"/>
+          </a:xfrm>
+          <a:prstGeom prst="rect">
+            <a:avLst/>
+          </a:prstGeom>
+          <a:noFill/>
+        </p:spPr>
+        <p:txBody>
+          <a:bodyPr wrap="none">
+            <a:noAutofit/>
+          </a:bodyPr>
+          <a:lstStyle/>
+          <a:p>
+            <a:r>
+              <a:rPr sz="2646" dirty="0" err="1">
+                <a:solidFill>
+                  <a:srgbClr val="FF6B35"/>
+                </a:solidFill>
+                <a:latin typeface="华文行楷"/>
+              </a:rPr>
+              <a:t>张爱玲</a:t>
+            </a:r>
+            <a:r>
+              <a:rPr sz="2646" dirty="0" err="1">
+                <a:latin typeface="华康少女文字W5(P)"/>
+              </a:rPr>
+              <a:t>有一句话</a:t>
+            </a:r>
+            <a:endParaRPr sz="2646" dirty="0">
+              <a:latin typeface="华康少女文字W5(P)"/>
+            </a:endParaRPr>
+          </a:p>
+        </p:txBody>
+      </p:sp>
     </p:spTree>
   </p:cSld>
   <p:clrMapOvr>
     <a:masterClrMapping/>
   </p:clrMapOvr>
-  <p:transition advTm="12080"/>
-  <p:timing>
-    <p:tnLst>
-      <p:par>
-        <p:cTn id="1" dur="indefinite" restart="never" nodeType="tmRoot">
-          <p:stCondLst>
-            <p:cond delay="0"/>
-          </p:stCondLst>
-          <p:childTnLst>
-            <p:par>
-              <p:cTn id="2" fill="hold">
-                <p:stCondLst>
-                  <p:cond delay="0"/>
-                </p:stCondLst>
-                <p:childTnLst>
-                  <p:par>
-                    <p:cTn id="3" dur="500" fill="hold">
-                      <p:childTnLst>
-                        <p:animEffect transition="in">
-                          <p:cBhvr>
-                            <p:cTn id="4" dur="500"/>
-                            <p:tgtEl>
-                              <p:spTgt spid="11"/>
-                            </p:tgtEl>
-                          </p:cBhvr>
-                        </p:animEffect>
-                      </p:childTnLst>
-                    </p:cTn>
-                  </p:par>
-                </p:childTnLst>
-              </p:cTn>
-            </p:par>
-          </p:childTnLst>
-        </p:cTn>
-      </p:par>
-    </p:tnLst>
-  </p:timing>
 </p:sld>
 </file>
 
